--- a/outputs/vignettes/poster_ESMO.pptx
+++ b/outputs/vignettes/poster_ESMO.pptx
@@ -208,7 +208,7 @@
           <a:p>
             <a:fld id="{89CEAEC2-C692-4B46-978F-109B22A150D2}" type="datetimeFigureOut">
               <a:rPr lang="en-US" smtClean="0"/>
-              <a:t>9/18/2026</a:t>
+              <a:t>9/22/2026</a:t>
             </a:fld>
             <a:endParaRPr lang="en-US" dirty="0"/>
           </a:p>
@@ -703,7 +703,7 @@
           <a:p>
             <a:fld id="{EDF32165-6009-0A44-BE1F-48670E89FB19}" type="datetimeFigureOut">
               <a:rPr lang="en-US" smtClean="0"/>
-              <a:t>9/18/2026</a:t>
+              <a:t>9/22/2026</a:t>
             </a:fld>
             <a:endParaRPr lang="en-US" dirty="0"/>
           </a:p>
@@ -873,7 +873,7 @@
           <a:p>
             <a:fld id="{EDF32165-6009-0A44-BE1F-48670E89FB19}" type="datetimeFigureOut">
               <a:rPr lang="en-US" smtClean="0"/>
-              <a:t>9/18/2026</a:t>
+              <a:t>9/22/2026</a:t>
             </a:fld>
             <a:endParaRPr lang="en-US" dirty="0"/>
           </a:p>
@@ -1053,7 +1053,7 @@
           <a:p>
             <a:fld id="{EDF32165-6009-0A44-BE1F-48670E89FB19}" type="datetimeFigureOut">
               <a:rPr lang="en-US" smtClean="0"/>
-              <a:t>9/18/2026</a:t>
+              <a:t>9/22/2026</a:t>
             </a:fld>
             <a:endParaRPr lang="en-US" dirty="0"/>
           </a:p>
@@ -1223,7 +1223,7 @@
           <a:p>
             <a:fld id="{EDF32165-6009-0A44-BE1F-48670E89FB19}" type="datetimeFigureOut">
               <a:rPr lang="en-US" smtClean="0"/>
-              <a:t>9/18/2026</a:t>
+              <a:t>9/22/2026</a:t>
             </a:fld>
             <a:endParaRPr lang="en-US" dirty="0"/>
           </a:p>
@@ -1469,7 +1469,7 @@
           <a:p>
             <a:fld id="{EDF32165-6009-0A44-BE1F-48670E89FB19}" type="datetimeFigureOut">
               <a:rPr lang="en-US" smtClean="0"/>
-              <a:t>9/18/2026</a:t>
+              <a:t>9/22/2026</a:t>
             </a:fld>
             <a:endParaRPr lang="en-US" dirty="0"/>
           </a:p>
@@ -1701,7 +1701,7 @@
           <a:p>
             <a:fld id="{EDF32165-6009-0A44-BE1F-48670E89FB19}" type="datetimeFigureOut">
               <a:rPr lang="en-US" smtClean="0"/>
-              <a:t>9/18/2026</a:t>
+              <a:t>9/22/2026</a:t>
             </a:fld>
             <a:endParaRPr lang="en-US" dirty="0"/>
           </a:p>
@@ -2068,7 +2068,7 @@
           <a:p>
             <a:fld id="{EDF32165-6009-0A44-BE1F-48670E89FB19}" type="datetimeFigureOut">
               <a:rPr lang="en-US" smtClean="0"/>
-              <a:t>9/18/2026</a:t>
+              <a:t>9/22/2026</a:t>
             </a:fld>
             <a:endParaRPr lang="en-US" dirty="0"/>
           </a:p>
@@ -2186,7 +2186,7 @@
           <a:p>
             <a:fld id="{EDF32165-6009-0A44-BE1F-48670E89FB19}" type="datetimeFigureOut">
               <a:rPr lang="en-US" smtClean="0"/>
-              <a:t>9/18/2026</a:t>
+              <a:t>9/22/2026</a:t>
             </a:fld>
             <a:endParaRPr lang="en-US" dirty="0"/>
           </a:p>
@@ -2281,7 +2281,7 @@
           <a:p>
             <a:fld id="{EDF32165-6009-0A44-BE1F-48670E89FB19}" type="datetimeFigureOut">
               <a:rPr lang="en-US" smtClean="0"/>
-              <a:t>9/18/2026</a:t>
+              <a:t>9/22/2026</a:t>
             </a:fld>
             <a:endParaRPr lang="en-US" dirty="0"/>
           </a:p>
@@ -2558,7 +2558,7 @@
           <a:p>
             <a:fld id="{EDF32165-6009-0A44-BE1F-48670E89FB19}" type="datetimeFigureOut">
               <a:rPr lang="en-US" smtClean="0"/>
-              <a:t>9/18/2026</a:t>
+              <a:t>9/22/2026</a:t>
             </a:fld>
             <a:endParaRPr lang="en-US" dirty="0"/>
           </a:p>
@@ -2814,7 +2814,7 @@
           <a:p>
             <a:fld id="{EDF32165-6009-0A44-BE1F-48670E89FB19}" type="datetimeFigureOut">
               <a:rPr lang="en-US" smtClean="0"/>
-              <a:t>9/18/2026</a:t>
+              <a:t>9/22/2026</a:t>
             </a:fld>
             <a:endParaRPr lang="en-US" dirty="0"/>
           </a:p>
@@ -3027,7 +3027,7 @@
           <a:p>
             <a:fld id="{EDF32165-6009-0A44-BE1F-48670E89FB19}" type="datetimeFigureOut">
               <a:rPr lang="en-US" smtClean="0"/>
-              <a:t>9/18/2026</a:t>
+              <a:t>9/22/2026</a:t>
             </a:fld>
             <a:endParaRPr lang="en-US" dirty="0"/>
           </a:p>
@@ -3483,21 +3483,17 @@
                 <a:latin typeface="Arial" panose="020B0604020202020204" pitchFamily="34" charset="0"/>
                 <a:cs typeface="Arial" panose="020B0604020202020204" pitchFamily="34" charset="0"/>
               </a:rPr>
-              <a:t>Biomarker signals in MSS/pMMR metastatic colorectal cancer (mCRC) are predominantly prognostic, not predictive</a:t>
-            </a:r>
-          </a:p>
-          <a:p>
-            <a:pPr algn="ctr">
-              <a:spcAft>
-                <a:spcPts val="600"/>
-              </a:spcAft>
-            </a:pPr>
+              <a:t>Biomarker signals in MSS/pMMR metastatic colorectal cancer (mCRC) are predominantly </a:t>
+            </a:r>
+          </a:p>
+          <a:p>
+            <a:pPr algn="ctr"/>
             <a:r>
               <a:rPr lang="en-US" sz="6000" b="1" dirty="0">
                 <a:latin typeface="Arial" panose="020B0604020202020204" pitchFamily="34" charset="0"/>
                 <a:cs typeface="Arial" panose="020B0604020202020204" pitchFamily="34" charset="0"/>
               </a:rPr>
-              <a:t>– lessons from the randomized phase-2 METIMMOX trial</a:t>
+              <a:t>prognostic, not predictive – lessons from the randomized phase-2 METIMMOX trial</a:t>
             </a:r>
           </a:p>
           <a:p>
@@ -3525,14 +3521,7 @@
                 <a:latin typeface="Arial" panose="020B0604020202020204" pitchFamily="34" charset="0"/>
                 <a:cs typeface="Arial" panose="020B0604020202020204" pitchFamily="34" charset="0"/>
               </a:rPr>
-              <a:t xml:space="preserve">, </a:t>
-            </a:r>
-            <a:r>
-              <a:rPr lang="en-US" sz="4400" dirty="0">
-                <a:latin typeface="Arial" panose="020B0604020202020204" pitchFamily="34" charset="0"/>
-                <a:cs typeface="Arial" panose="020B0604020202020204" pitchFamily="34" charset="0"/>
-              </a:rPr>
-              <a:t>Megan Othus</a:t>
+              <a:t>, Megan Othus</a:t>
             </a:r>
             <a:r>
               <a:rPr lang="en-US" sz="4400" baseline="30000" dirty="0">
@@ -3546,14 +3535,7 @@
                 <a:latin typeface="Arial" panose="020B0604020202020204" pitchFamily="34" charset="0"/>
                 <a:cs typeface="Arial" panose="020B0604020202020204" pitchFamily="34" charset="0"/>
               </a:rPr>
-              <a:t xml:space="preserve">, </a:t>
-            </a:r>
-            <a:r>
-              <a:rPr lang="en-US" sz="4400" dirty="0">
-                <a:latin typeface="Arial" panose="020B0604020202020204" pitchFamily="34" charset="0"/>
-                <a:cs typeface="Arial" panose="020B0604020202020204" pitchFamily="34" charset="0"/>
-              </a:rPr>
-              <a:t>Sebastian Meltzer</a:t>
+              <a:t>, Sebastian Meltzer</a:t>
             </a:r>
             <a:r>
               <a:rPr lang="en-US" sz="4400" baseline="30000" dirty="0">
@@ -3567,14 +3549,7 @@
                 <a:latin typeface="Arial" panose="020B0604020202020204" pitchFamily="34" charset="0"/>
                 <a:cs typeface="Arial" panose="020B0604020202020204" pitchFamily="34" charset="0"/>
               </a:rPr>
-              <a:t xml:space="preserve">, </a:t>
-            </a:r>
-            <a:r>
-              <a:rPr lang="en-US" sz="4400" dirty="0">
-                <a:latin typeface="Arial" panose="020B0604020202020204" pitchFamily="34" charset="0"/>
-                <a:cs typeface="Arial" panose="020B0604020202020204" pitchFamily="34" charset="0"/>
-              </a:rPr>
-              <a:t>Paula A. Bousquet</a:t>
+              <a:t>, Paula A. Bousquet</a:t>
             </a:r>
             <a:r>
               <a:rPr lang="en-US" sz="4400" baseline="30000" dirty="0">
@@ -3588,14 +3563,7 @@
                 <a:latin typeface="Arial" panose="020B0604020202020204" pitchFamily="34" charset="0"/>
                 <a:cs typeface="Arial" panose="020B0604020202020204" pitchFamily="34" charset="0"/>
               </a:rPr>
-              <a:t xml:space="preserve">, </a:t>
-            </a:r>
-            <a:r>
-              <a:rPr lang="en-US" sz="4400" dirty="0">
-                <a:latin typeface="Arial" panose="020B0604020202020204" pitchFamily="34" charset="0"/>
-                <a:cs typeface="Arial" panose="020B0604020202020204" pitchFamily="34" charset="0"/>
-              </a:rPr>
-              <a:t>Emily A. Burger</a:t>
+              <a:t>, Emily A. Burger</a:t>
             </a:r>
             <a:r>
               <a:rPr lang="en-US" sz="4400" baseline="30000" dirty="0">
@@ -3609,14 +3577,7 @@
                 <a:latin typeface="Arial" panose="020B0604020202020204" pitchFamily="34" charset="0"/>
                 <a:cs typeface="Arial" panose="020B0604020202020204" pitchFamily="34" charset="0"/>
               </a:rPr>
-              <a:t xml:space="preserve">, </a:t>
-            </a:r>
-            <a:r>
-              <a:rPr lang="en-US" sz="4400" dirty="0">
-                <a:latin typeface="Arial" panose="020B0604020202020204" pitchFamily="34" charset="0"/>
-                <a:cs typeface="Arial" panose="020B0604020202020204" pitchFamily="34" charset="0"/>
-              </a:rPr>
-              <a:t>Eline Aas</a:t>
+              <a:t>, Eline Aas</a:t>
             </a:r>
             <a:r>
               <a:rPr lang="en-US" sz="4400" baseline="30000" dirty="0">
@@ -3630,14 +3591,7 @@
                 <a:latin typeface="Arial" panose="020B0604020202020204" pitchFamily="34" charset="0"/>
                 <a:cs typeface="Arial" panose="020B0604020202020204" pitchFamily="34" charset="0"/>
               </a:rPr>
-              <a:t xml:space="preserve">, </a:t>
-            </a:r>
-            <a:r>
-              <a:rPr lang="en-US" sz="4400" dirty="0">
-                <a:latin typeface="Arial" panose="020B0604020202020204" pitchFamily="34" charset="0"/>
-                <a:cs typeface="Arial" panose="020B0604020202020204" pitchFamily="34" charset="0"/>
-              </a:rPr>
-              <a:t>Anne H. Ree</a:t>
+              <a:t>, Anne H. Ree</a:t>
             </a:r>
             <a:r>
               <a:rPr lang="en-US" sz="4400" baseline="30000" dirty="0">
@@ -3661,7 +3615,7 @@
                 <a:latin typeface="Arial" panose="020B0604020202020204" pitchFamily="34" charset="0"/>
                 <a:cs typeface="Arial" panose="020B0604020202020204" pitchFamily="34" charset="0"/>
               </a:rPr>
-              <a:t xml:space="preserve">Department of Health Management and Health Economics, University of Oslo, Oslo, Norway; </a:t>
+              <a:t>Department of Health Management and Health Economics, University of Oslo, Oslo, Norway; </a:t>
             </a:r>
             <a:r>
               <a:rPr lang="en-US" sz="3200" baseline="30000" dirty="0">
@@ -3675,7 +3629,7 @@
                 <a:latin typeface="Arial" panose="020B0604020202020204" pitchFamily="34" charset="0"/>
                 <a:cs typeface="Arial" panose="020B0604020202020204" pitchFamily="34" charset="0"/>
               </a:rPr>
-              <a:t xml:space="preserve">Department of Oncology, Akershus University Hospital, Lørenskog, Norway; </a:t>
+              <a:t>Department of Oncology, Akershus University Hospital, Lørenskog, Norway; </a:t>
             </a:r>
             <a:r>
               <a:rPr lang="en-US" sz="3200" baseline="30000" dirty="0">
@@ -3689,7 +3643,7 @@
                 <a:latin typeface="Arial" panose="020B0604020202020204" pitchFamily="34" charset="0"/>
                 <a:cs typeface="Arial" panose="020B0604020202020204" pitchFamily="34" charset="0"/>
               </a:rPr>
-              <a:t xml:space="preserve">Fred Hutchinson Cancer Center, Seattle WA, United States; </a:t>
+              <a:t>Fred Hutchinson Cancer Center, Seattle WA, United States; </a:t>
             </a:r>
             <a:r>
               <a:rPr lang="en-US" sz="3200" baseline="30000" dirty="0">
@@ -3703,7 +3657,7 @@
                 <a:latin typeface="Arial" panose="020B0604020202020204" pitchFamily="34" charset="0"/>
                 <a:cs typeface="Arial" panose="020B0604020202020204" pitchFamily="34" charset="0"/>
               </a:rPr>
-              <a:t xml:space="preserve">Center for Health Decision Science, Harvard T. H. Chan School of Public Health, Boston MA, United States; </a:t>
+              <a:t>Center for Health Decision Science, Harvard T. H. Chan School of Public Health, Boston MA, United States; </a:t>
             </a:r>
             <a:r>
               <a:rPr lang="en-US" sz="3200" baseline="30000" dirty="0">
@@ -3717,7 +3671,7 @@
                 <a:latin typeface="Arial" panose="020B0604020202020204" pitchFamily="34" charset="0"/>
                 <a:cs typeface="Arial" panose="020B0604020202020204" pitchFamily="34" charset="0"/>
               </a:rPr>
-              <a:t xml:space="preserve">Division for Health Services, Norwegian Institute of Public Health, Oslo, Norway; </a:t>
+              <a:t>Division for Health Services, Norwegian Institute of Public Health, Oslo, Norway; </a:t>
             </a:r>
             <a:r>
               <a:rPr lang="en-US" sz="3200" baseline="30000" dirty="0">
@@ -3778,7 +3732,7 @@
         <p:spPr>
           <a:xfrm>
             <a:off x="283464" y="4471416"/>
-            <a:ext cx="13990320" cy="987552"/>
+            <a:ext cx="12188952" cy="987552"/>
           </a:xfrm>
           <a:prstGeom prst="roundRect">
             <a:avLst/>
@@ -3822,8 +3776,8 @@
         </p:nvSpPr>
         <p:spPr>
           <a:xfrm>
-            <a:off x="14730984" y="4462272"/>
-            <a:ext cx="36100512" cy="1005840"/>
+            <a:off x="12929616" y="4462272"/>
+            <a:ext cx="37938456" cy="1005840"/>
           </a:xfrm>
           <a:prstGeom prst="roundRect">
             <a:avLst/>
@@ -3868,7 +3822,7 @@
         <p:spPr>
           <a:xfrm>
             <a:off x="365760" y="5751576"/>
-            <a:ext cx="13908024" cy="5029200"/>
+            <a:ext cx="12106656" cy="4572000"/>
           </a:xfrm>
           <a:prstGeom prst="roundRect">
             <a:avLst/>
@@ -3915,7 +3869,6 @@
               <a:rPr lang="en-US" sz="3200" dirty="0"/>
               <a:t>Immune checkpoint blockade is ineffective in unselected MSS/pMMR mCRC.</a:t>
             </a:r>
-            <a:endParaRPr lang="en-US" sz="3200" dirty="0"/>
           </a:p>
           <a:p>
             <a:pPr marL="571500" indent="-571500">
@@ -3927,9 +3880,8 @@
             </a:pPr>
             <a:r>
               <a:rPr lang="en-US" sz="3200" dirty="0"/>
-              <a:t>The randomized phase-2 METIMMOX trial (NCT03388190; EudraCT 2017-001845-29) compared alternating oxaliplatin-based chemotherapy (FLOX) and nivolumab with FLOX alone; progression-free survival (PFS) was identical.</a:t>
-            </a:r>
-            <a:endParaRPr lang="en-US" sz="3200" dirty="0"/>
+              <a:t>METIMMOX (randomized phase 2; NCT03388190, EudraCT 2017-001845-29): alternating FLOX + nivolumab vs FLOX alone; identical progression-free survival (PFS).</a:t>
+            </a:r>
           </a:p>
           <a:p>
             <a:pPr marL="571500" indent="-571500">
@@ -3941,23 +3893,16 @@
             </a:pPr>
             <a:r>
               <a:rPr lang="en-US" sz="3200" dirty="0"/>
-              <a:t>Post hoc analyses suggested benefit in three biomarker subgroups but conflated prognostic and predictive effects.</a:t>
-            </a:r>
-            <a:endParaRPr lang="en-US" sz="3200" dirty="0"/>
-          </a:p>
-          <a:p>
-            <a:pPr marL="571500" indent="-571500">
-              <a:spcAft>
-                <a:spcPts val="1200"/>
-              </a:spcAft>
-              <a:buFont typeface="Courier New" panose="02070309020205020404" pitchFamily="49" charset="0"/>
-              <a:buChar char="o"/>
-            </a:pPr>
+              <a:t>Post hoc subgroup signals (TMB/</a:t>
+            </a:r>
+            <a:r>
+              <a:rPr lang="en-US" sz="3200" i="1" dirty="0"/>
+              <a:t>BRAF</a:t>
+            </a:r>
             <a:r>
               <a:rPr lang="en-US" sz="3200" dirty="0"/>
-              <a:t>We evaluated treatment-effect heterogeneity in a causally motivated regression framework.</a:t>
-            </a:r>
-            <a:endParaRPr lang="en-US" sz="3200" dirty="0"/>
+              <a:t>, CRP, TLR) conflated prognostic and predictive effects; we separated them in one pre-specified interaction model per endpoint.</a:t>
+            </a:r>
           </a:p>
         </p:txBody>
       </p:sp>
@@ -3969,8 +3914,8 @@
         </p:nvSpPr>
         <p:spPr>
           <a:xfrm>
-            <a:off x="283464" y="11018520"/>
-            <a:ext cx="13990320" cy="978408"/>
+            <a:off x="283464" y="10597896"/>
+            <a:ext cx="12188952" cy="978408"/>
           </a:xfrm>
           <a:prstGeom prst="roundRect">
             <a:avLst/>
@@ -4014,8 +3959,8 @@
         </p:nvSpPr>
         <p:spPr>
           <a:xfrm>
-            <a:off x="329184" y="12252960"/>
-            <a:ext cx="13944600" cy="14127480"/>
+            <a:off x="329184" y="11832336"/>
+            <a:ext cx="12143232" cy="14548104"/>
           </a:xfrm>
           <a:prstGeom prst="roundRect">
             <a:avLst/>
@@ -4059,10 +4004,9 @@
               <a:buChar char="o"/>
             </a:pPr>
             <a:r>
-              <a:rPr lang="en-US" sz="3200" dirty="0"/>
-              <a:t>Complete-case cohort: 68 patients with both biomarkers, covariates and both endpoints (59 deaths; 63 progression-or-death events).</a:t>
-            </a:r>
-            <a:endParaRPr lang="en-US" sz="3200" dirty="0"/>
+              <a:rPr lang="en-US" sz="3600" dirty="0"/>
+              <a:t>68 complete cases (59 deaths; 63 PFS events).</a:t>
+            </a:r>
           </a:p>
           <a:p>
             <a:pPr marL="571500" indent="-571500">
@@ -4073,18 +4017,17 @@
               <a:buChar char="o"/>
             </a:pPr>
             <a:r>
-              <a:rPr lang="en-US" sz="3200" dirty="0"/>
-              <a:t xml:space="preserve">Pre-immunotherapy biomarkers: TMB ≥9 mut/Mb or </a:t>
-            </a:r>
-            <a:r>
-              <a:rPr lang="en-US" sz="3200" i="1" dirty="0"/>
+              <a:rPr lang="en-US" sz="3600" dirty="0"/>
+              <a:t>Biomarkers before nivolumab: TMB ≥9 mut/Mb or </a:t>
+            </a:r>
+            <a:r>
+              <a:rPr lang="en-US" sz="3600" i="1" dirty="0"/>
               <a:t>BRAF</a:t>
             </a:r>
             <a:r>
-              <a:rPr lang="en-US" sz="3200" dirty="0"/>
-              <a:t xml:space="preserve"> V600E (baseline NGS), and suppressed systemic inflammation (CRP &lt;5 mg/L) after the initial 2 FLOX cycles common to both arms (week 4, before the first nivolumab dose).</a:t>
-            </a:r>
-            <a:endParaRPr lang="en-US" sz="3200" dirty="0"/>
+              <a:rPr lang="en-US" sz="3600" dirty="0"/>
+              <a:t> V600E; CRP &lt;5 mg/L after 2 FLOX cycles common to both arms (by chance 47% vs 19% positive).</a:t>
+            </a:r>
           </a:p>
           <a:p>
             <a:pPr marL="571500" indent="-571500">
@@ -4095,10 +4038,9 @@
               <a:buChar char="o"/>
             </a:pPr>
             <a:r>
-              <a:rPr lang="en-US" sz="3200" dirty="0"/>
-              <a:t>Tumor lesion reduction (TLR) ≥10% at the first on-treatment CT was adjudicated an intermediate endpoint (T → TLR → PFS) and analyzed separately with a week-9 landmark.</a:t>
-            </a:r>
-            <a:endParaRPr lang="en-US" sz="3200" dirty="0"/>
+              <a:rPr lang="en-US" sz="3600" dirty="0"/>
+              <a:t>TLR ≥10% at the first on-treatment CT: analyzed as intermediate endpoint with a week-9 landmark.</a:t>
+            </a:r>
           </a:p>
           <a:p>
             <a:pPr marL="571500" indent="-571500">
@@ -4109,18 +4051,17 @@
               <a:buChar char="o"/>
             </a:pPr>
             <a:r>
-              <a:rPr lang="en-US" sz="3200" dirty="0"/>
-              <a:t xml:space="preserve">One unified Firth-corrected Cox model per endpoint (PFS and overall survival [OS]; </a:t>
-            </a:r>
-            <a:r>
-              <a:rPr lang="en-US" sz="3200" b="1" dirty="0"/>
+              <a:rPr lang="en-US" sz="3600" dirty="0"/>
+              <a:t>Per endpoint (PFS, overall survival [OS]): one Firth-corrected Cox model with age, sex, treatment, biomarker main effects and treatment × biomarker interactions (</a:t>
+            </a:r>
+            <a:r>
+              <a:rPr lang="en-US" sz="3600" b="1" dirty="0"/>
               <a:t>Figure 1</a:t>
             </a:r>
             <a:r>
-              <a:rPr lang="en-US" sz="3200" dirty="0"/>
-              <a:t>): age, sex, treatment, biomarker main effects and treatment × biomarker interactions; profile-likelihood 95% CIs and penalized likelihood-ratio tests (PLRT).</a:t>
-            </a:r>
-            <a:endParaRPr lang="en-US" sz="3200" dirty="0"/>
+              <a:rPr lang="en-US" sz="3600" dirty="0"/>
+              <a:t>); profile-likelihood 95% CIs, penalized likelihood-ratio tests (PLRT).</a:t>
+            </a:r>
           </a:p>
           <a:p>
             <a:pPr marL="571500" indent="-571500">
@@ -4131,31 +4072,30 @@
               <a:buChar char="o"/>
             </a:pPr>
             <a:r>
-              <a:rPr lang="en-US" sz="3200" dirty="0"/>
-              <a:t>Ridge-penalized Cox regression (cross-validated penalty) as co-primary stability estimator.</a:t>
-            </a:r>
-            <a:endParaRPr lang="en-US" sz="3200" dirty="0"/>
+              <a:rPr lang="en-US" sz="3600" dirty="0"/>
+              <a:t>Ridge-penalized Cox as co-primary stability estimator.</a:t>
+            </a:r>
           </a:p>
         </p:txBody>
       </p:sp>
       <p:pic>
         <p:nvPicPr>
-          <p:cNvPr id="108" name="Simplified DAG" descr="Simplified causal diagram: treatment, CRP, TMB/BRAF, age/sex and survival"/>
+          <p:cNvPr id="108" name="Figure 1 DAG" descr="Directed acyclic graph of the assumed relationships between treatment, CRP, TMB/BRAF, age/sex and survival"/>
           <p:cNvPicPr>
             <a:picLocks noChangeAspect="1"/>
           </p:cNvPicPr>
           <p:nvPr/>
         </p:nvPicPr>
         <p:blipFill>
-          <a:blip r:embed="rId7"/>
+          <a:blip r:embed="rId3"/>
           <a:stretch>
             <a:fillRect/>
           </a:stretch>
         </p:blipFill>
         <p:spPr>
           <a:xfrm>
-            <a:off x="4192524" y="21293763"/>
-            <a:ext cx="6217920" cy="4263717"/>
+            <a:off x="2468880" y="20165133"/>
+            <a:ext cx="7863840" cy="5392347"/>
           </a:xfrm>
           <a:prstGeom prst="rect">
             <a:avLst/>
@@ -4164,14 +4104,14 @@
       </p:pic>
       <p:sp>
         <p:nvSpPr>
-          <p:cNvPr id="109" name="DAG caption"/>
+          <p:cNvPr id="109" name="Figure 1 caption"/>
           <p:cNvSpPr txBox="1"/>
           <p:nvPr/>
         </p:nvSpPr>
         <p:spPr>
           <a:xfrm>
-            <a:off x="1133856" y="25557480"/>
-            <a:ext cx="12344400" cy="777240"/>
+            <a:off x="822960" y="25557480"/>
+            <a:ext cx="11155680" cy="777240"/>
           </a:xfrm>
           <a:prstGeom prst="rect">
             <a:avLst/>
@@ -4187,11 +4127,11 @@
             <a:pPr algn="ctr"/>
             <a:r>
               <a:rPr lang="en-US" sz="2400" b="1" dirty="0"/>
-              <a:t xml:space="preserve">Figure 1. Simplified causal diagram. </a:t>
+              <a:t>Figure 1. Assumed relationships (DAG) behind the model. </a:t>
             </a:r>
             <a:r>
               <a:rPr lang="en-US" sz="2400" dirty="0"/>
-              <a:t>Solid arrows: assumed causal effects; dashed arrow: treatment effect hypothesized to be modified by CRP and TMB/</a:t>
+              <a:t>Dashed arrow: treatment effect possibly modified by CRP and TMB/</a:t>
             </a:r>
             <a:r>
               <a:rPr lang="en-US" sz="2400" i="1" dirty="0"/>
@@ -4199,21 +4139,45 @@
             </a:r>
             <a:r>
               <a:rPr lang="en-US" sz="2400" dirty="0"/>
-              <a:t xml:space="preserve"> (interaction terms).</a:t>
-            </a:r>
-          </a:p>
-        </p:txBody>
-      </p:sp>
-      <p:sp>
-        <p:nvSpPr>
-          <p:cNvPr id="110" name="Results text box"/>
+              <a:t>.</a:t>
+            </a:r>
+          </a:p>
+        </p:txBody>
+      </p:sp>
+      <p:pic>
+        <p:nvPicPr>
+          <p:cNvPr id="110" name="Figure 2 Kaplan-Meier" descr="Kaplan-Meier curves by biomarker status and treatment arm"/>
+          <p:cNvPicPr>
+            <a:picLocks noChangeAspect="1"/>
+          </p:cNvPicPr>
+          <p:nvPr/>
+        </p:nvPicPr>
+        <p:blipFill>
+          <a:blip r:embed="rId4"/>
+          <a:stretch>
+            <a:fillRect/>
+          </a:stretch>
+        </p:blipFill>
+        <p:spPr>
+          <a:xfrm>
+            <a:off x="12929616" y="5751576"/>
+            <a:ext cx="24505920" cy="13784580"/>
+          </a:xfrm>
+          <a:prstGeom prst="rect">
+            <a:avLst/>
+          </a:prstGeom>
+        </p:spPr>
+      </p:pic>
+      <p:sp>
+        <p:nvSpPr>
+          <p:cNvPr id="111" name="Key findings box"/>
           <p:cNvSpPr/>
           <p:nvPr/>
         </p:nvSpPr>
         <p:spPr>
           <a:xfrm>
-            <a:off x="14730984" y="5751576"/>
-            <a:ext cx="14868144" cy="12454128"/>
+            <a:off x="37801296" y="5751576"/>
+            <a:ext cx="13066776" cy="13784580"/>
           </a:xfrm>
           <a:prstGeom prst="roundRect">
             <a:avLst/>
@@ -4244,166 +4208,157 @@
           </a:fontRef>
         </p:style>
         <p:txBody>
-          <a:bodyPr rtlCol="0" anchor="ctr">
+          <a:bodyPr lIns="137160" rIns="137160" rtlCol="0" anchor="ctr">
             <a:noAutofit/>
           </a:bodyPr>
           <a:lstStyle/>
           <a:p>
             <a:pPr marL="571500" indent="-571500">
               <a:spcAft>
-                <a:spcPts val="1200"/>
+                <a:spcPts val="1600"/>
               </a:spcAft>
               <a:buFont typeface="Courier New" panose="02070309020205020404" pitchFamily="49" charset="0"/>
               <a:buChar char="o"/>
             </a:pPr>
             <a:r>
-              <a:rPr lang="en-US" sz="3200" dirty="0"/>
-              <a:t>68 patients had complete biomarker and covariate data (mean age 64 years; 47% female; 59 deaths; 63 progression-or-death events).</a:t>
-            </a:r>
-            <a:endParaRPr lang="en-US" sz="3200" dirty="0"/>
+              <a:rPr lang="en-US" sz="4000" b="1" dirty="0"/>
+              <a:t>No marginal treatment effect: </a:t>
+            </a:r>
+            <a:r>
+              <a:rPr lang="en-US" sz="4000" dirty="0"/>
+              <a:t>OS HR 0.96 (95% CI 0.58–1.61); PFS HR 0.80 (0.49–1.33).</a:t>
+            </a:r>
           </a:p>
           <a:p>
             <a:pPr marL="571500" indent="-571500">
               <a:spcAft>
-                <a:spcPts val="1200"/>
+                <a:spcPts val="1600"/>
               </a:spcAft>
               <a:buFont typeface="Courier New" panose="02070309020205020404" pitchFamily="49" charset="0"/>
               <a:buChar char="o"/>
             </a:pPr>
-            <a:r>
-              <a:rPr lang="en-US" sz="3200" dirty="0"/>
-              <a:t>No detectable marginal treatment effect: OS HR 0.96 (95% CI 0.58–1.61); PFS HR 0.80 (0.49–1.33).</a:t>
-            </a:r>
-            <a:endParaRPr lang="en-US" sz="3200" dirty="0"/>
+            <a:endParaRPr lang="en-US" sz="2000" dirty="0"/>
           </a:p>
           <a:p>
             <a:pPr marL="571500" indent="-571500">
               <a:spcAft>
-                <a:spcPts val="1200"/>
+                <a:spcPts val="1600"/>
               </a:spcAft>
               <a:buFont typeface="Courier New" panose="02070309020205020404" pitchFamily="49" charset="0"/>
               <a:buChar char="o"/>
             </a:pPr>
             <a:r>
-              <a:rPr lang="en-US" sz="3200" dirty="0"/>
+              <a:rPr lang="en-US" sz="4000" b="1" dirty="0"/>
+              <a:t>Prognostic: </a:t>
+            </a:r>
+            <a:r>
+              <a:rPr lang="en-US" sz="4000" dirty="0"/>
               <a:t>CRP &lt;5 mg/L and TMB/</a:t>
             </a:r>
             <a:r>
-              <a:rPr lang="en-US" sz="3200" i="1" dirty="0"/>
+              <a:rPr lang="en-US" sz="4000" i="1" dirty="0"/>
               <a:t>BRAF</a:t>
             </a:r>
             <a:r>
-              <a:rPr lang="en-US" sz="3200" dirty="0"/>
-              <a:t xml:space="preserve"> positivity were prognostic: both were associated with longer PFS (HR 0.41 and 0.49), and low CRP also with longer OS (HR 0.49) (</a:t>
-            </a:r>
-            <a:r>
-              <a:rPr lang="en-US" sz="3200" b="1" dirty="0"/>
+              <a:rPr lang="en-US" sz="4000" dirty="0"/>
+              <a:t> positivity were associated with longer PFS (HR 0.41 and 0.49) and, for CRP, longer OS (HR 0.49), regardless of treatment (</a:t>
+            </a:r>
+            <a:r>
+              <a:rPr lang="en-US" sz="4000" b="1" dirty="0"/>
               <a:t>Table 1</a:t>
             </a:r>
             <a:r>
-              <a:rPr lang="en-US" sz="3200" dirty="0"/>
-              <a:t xml:space="preserve">, </a:t>
-            </a:r>
-            <a:r>
-              <a:rPr lang="en-US" sz="3200" b="1" dirty="0"/>
+              <a:rPr lang="en-US" sz="4000" dirty="0"/>
+              <a:t>, </a:t>
+            </a:r>
+            <a:r>
+              <a:rPr lang="en-US" sz="4000" b="1" dirty="0"/>
               <a:t>Figure 2</a:t>
             </a:r>
             <a:r>
-              <a:rPr lang="en-US" sz="3200" dirty="0"/>
+              <a:rPr lang="en-US" sz="4000" dirty="0"/>
               <a:t>).</a:t>
             </a:r>
-            <a:endParaRPr lang="en-US" sz="3200" dirty="0"/>
           </a:p>
           <a:p>
             <a:pPr marL="571500" indent="-571500">
               <a:spcAft>
-                <a:spcPts val="1200"/>
+                <a:spcPts val="1600"/>
               </a:spcAft>
               <a:buFont typeface="Courier New" panose="02070309020205020404" pitchFamily="49" charset="0"/>
               <a:buChar char="o"/>
             </a:pPr>
-            <a:r>
-              <a:rPr lang="en-US" sz="3200" dirty="0"/>
-              <a:t>No treatment × biomarker interaction reached statistical significance (</a:t>
-            </a:r>
-            <a:r>
-              <a:rPr lang="en-US" sz="3200" b="1" dirty="0"/>
-              <a:t>Figure 3</a:t>
-            </a:r>
-            <a:r>
-              <a:rPr lang="en-US" sz="3200" dirty="0"/>
-              <a:t>). The CRP × treatment interaction for PFS was the most directionally consistent finding (Firth HR 0.42, 95% CI 0.11–1.68; PLRT p = 0.21; ridge HR 0.33) but was attenuated for OS (Firth HR 0.65; ridge HR 0.40).</a:t>
-            </a:r>
-            <a:endParaRPr lang="en-US" sz="3200" dirty="0"/>
+            <a:endParaRPr lang="en-US" sz="2000" dirty="0"/>
           </a:p>
           <a:p>
             <a:pPr marL="571500" indent="-571500">
               <a:spcAft>
-                <a:spcPts val="1200"/>
+                <a:spcPts val="1600"/>
               </a:spcAft>
               <a:buFont typeface="Courier New" panose="02070309020205020404" pitchFamily="49" charset="0"/>
               <a:buChar char="o"/>
             </a:pPr>
             <a:r>
-              <a:rPr lang="en-US" sz="3200" dirty="0"/>
-              <a:t>Week-4 CRP positivity was imbalanced by chance (47% with FLOX/nivolumab vs 19% with FLOX alone; p = 0.02); the CRP × treatment interaction is estimated against this contrast.</a:t>
-            </a:r>
-            <a:endParaRPr lang="en-US" sz="3200" dirty="0"/>
+              <a:rPr lang="en-US" sz="4000" b="1" dirty="0"/>
+              <a:t>Not predictive: </a:t>
+            </a:r>
+            <a:r>
+              <a:rPr lang="en-US" sz="4000" dirty="0"/>
+              <a:t>no treatment × biomarker interaction reached significance (</a:t>
+            </a:r>
+            <a:r>
+              <a:rPr lang="en-US" sz="4000" b="1" dirty="0"/>
+              <a:t>Figure 3</a:t>
+            </a:r>
+            <a:r>
+              <a:rPr lang="en-US" sz="4000" dirty="0"/>
+              <a:t>). Most consistent signal: CRP × treatment for PFS, HR 0.42 (0.11–1.68), p = 0.21, ridge HR 0.33; attenuated for OS (HR 0.65).</a:t>
+            </a:r>
           </a:p>
           <a:p>
             <a:pPr marL="571500" indent="-571500">
               <a:spcAft>
-                <a:spcPts val="1200"/>
+                <a:spcPts val="1600"/>
               </a:spcAft>
               <a:buFont typeface="Courier New" panose="02070309020205020404" pitchFamily="49" charset="0"/>
               <a:buChar char="o"/>
             </a:pPr>
-            <a:r>
-              <a:rPr lang="en-US" sz="3200" dirty="0"/>
-              <a:t>TLR ≥10% was strongly associated with both endpoints (landmark HR 0.35 for OS and PFS) but was more frequent with FLOX alone (75.9% vs 52.8% with FLOX/nivolumab; p = 0.07), and the TLR × treatment interaction pointed towards less, not more, benefit from nivolumab (HR &gt;1): TLR marks chemotherapy-responsive disease rather than immunotherapy benefit.</a:t>
-            </a:r>
-            <a:endParaRPr lang="en-US" sz="3200" dirty="0"/>
+            <a:endParaRPr lang="en-US" sz="2000" dirty="0"/>
           </a:p>
           <a:p>
             <a:pPr marL="571500" indent="-571500">
               <a:spcAft>
-                <a:spcPts val="1200"/>
+                <a:spcPts val="0"/>
               </a:spcAft>
               <a:buFont typeface="Courier New" panose="02070309020205020404" pitchFamily="49" charset="0"/>
               <a:buChar char="o"/>
             </a:pPr>
             <a:r>
-              <a:rPr lang="en-US" sz="3200" dirty="0"/>
-              <a:t>Proportional hazards held globally (Schoenfeld p = 0.25 for OS, 0.12 for PFS).</a:t>
-            </a:r>
-            <a:endParaRPr lang="en-US" sz="3200" dirty="0"/>
-          </a:p>
-        </p:txBody>
-      </p:sp>
-      <p:pic>
-        <p:nvPicPr>
-          <p:cNvPr id="111" name="Figure 3 forest plot" descr="Forest plot of treatment by biomarker interaction hazard ratios"/>
-          <p:cNvPicPr>
-            <a:picLocks noChangeAspect="1"/>
-          </p:cNvPicPr>
-          <p:nvPr/>
-        </p:nvPicPr>
-        <p:blipFill>
-          <a:blip r:embed="rId6"/>
-          <a:stretch>
-            <a:fillRect/>
-          </a:stretch>
-        </p:blipFill>
-        <p:spPr>
-          <a:xfrm>
-            <a:off x="14730984" y="18481738"/>
-            <a:ext cx="14868144" cy="7898702"/>
-          </a:xfrm>
-          <a:prstGeom prst="rect">
-            <a:avLst/>
-          </a:prstGeom>
-        </p:spPr>
-      </p:pic>
+              <a:rPr lang="en-US" sz="4000" b="1" dirty="0"/>
+              <a:t>TLR: </a:t>
+            </a:r>
+            <a:r>
+              <a:rPr lang="en-US" sz="4000" dirty="0"/>
+              <a:t>strongly prognostic for both endpoints (landmark HR 0.35), but more frequent with FLOX alone (76% vs 53%) and with an interaction HR &gt;1</a:t>
+            </a:r>
+            <a:r>
+              <a:rPr lang="en-US" sz="4000"/>
+              <a:t>: </a:t>
+            </a:r>
+            <a:br>
+              <a:rPr lang="en-US" sz="4000"/>
+            </a:br>
+            <a:r>
+              <a:rPr lang="en-US" sz="4000"/>
+              <a:t>a </a:t>
+            </a:r>
+            <a:r>
+              <a:rPr lang="en-US" sz="4000" dirty="0"/>
+              <a:t>marker of chemotherapy-responsive disease, not of nivolumab benefit.</a:t>
+            </a:r>
+          </a:p>
+        </p:txBody>
+      </p:sp>
       <p:sp>
         <p:nvSpPr>
           <p:cNvPr id="112" name="Table 1 caption"/>
@@ -4412,8 +4367,8 @@
         </p:nvSpPr>
         <p:spPr>
           <a:xfrm>
-            <a:off x="30056328" y="5751576"/>
-            <a:ext cx="20775168" cy="603504"/>
+            <a:off x="12929616" y="19883628"/>
+            <a:ext cx="25594056" cy="566928"/>
           </a:xfrm>
           <a:prstGeom prst="rect">
             <a:avLst/>
@@ -4428,7 +4383,7 @@
           <a:p>
             <a:r>
               <a:rPr lang="en-US" sz="2800" b="1" dirty="0"/>
-              <a:t xml:space="preserve">Table 1. </a:t>
+              <a:t>Table 1. </a:t>
             </a:r>
             <a:r>
               <a:rPr lang="en-US" sz="2800" dirty="0"/>
@@ -4443,26 +4398,81 @@
           <p:cNvGraphicFramePr>
             <a:graphicFrameLocks noGrp="1"/>
           </p:cNvGraphicFramePr>
-          <p:nvPr/>
+          <p:nvPr>
+            <p:extLst>
+              <p:ext uri="{D42A27DB-BD31-4B8C-83A1-F6EECF244321}">
+                <p14:modId xmlns:p14="http://schemas.microsoft.com/office/powerpoint/2010/main" val="580684924"/>
+              </p:ext>
+            </p:extLst>
+          </p:nvPr>
         </p:nvGraphicFramePr>
         <p:xfrm>
-          <a:off x="30056328" y="6409944"/>
-          <a:ext cx="20775168" cy="6583680"/>
+          <a:off x="12929616" y="20487132"/>
+          <a:ext cx="25594056" cy="4773168"/>
         </p:xfrm>
         <a:graphic>
           <a:graphicData uri="http://schemas.openxmlformats.org/drawingml/2006/table">
             <a:tbl>
               <a:tblPr firstRow="1" bandRow="1"/>
               <a:tblGrid>
-                <a:gridCol w="6784848"/>
-                <a:gridCol w="3657600"/>
-                <a:gridCol w="1463040"/>
-                <a:gridCol w="1828800"/>
-                <a:gridCol w="3657600"/>
-                <a:gridCol w="1463040"/>
-                <a:gridCol w="1920240"/>
+                <a:gridCol w="6400800">
+                  <a:extLst>
+                    <a:ext uri="{9D8B030D-6E8A-4147-A177-3AD203B41FA5}">
+                      <a16:colId xmlns:a16="http://schemas.microsoft.com/office/drawing/2014/main" val="20000"/>
+                    </a:ext>
+                  </a:extLst>
+                </a:gridCol>
+                <a:gridCol w="5029200">
+                  <a:extLst>
+                    <a:ext uri="{9D8B030D-6E8A-4147-A177-3AD203B41FA5}">
+                      <a16:colId xmlns:a16="http://schemas.microsoft.com/office/drawing/2014/main" val="20001"/>
+                    </a:ext>
+                  </a:extLst>
+                </a:gridCol>
+                <a:gridCol w="3474720">
+                  <a:extLst>
+                    <a:ext uri="{9D8B030D-6E8A-4147-A177-3AD203B41FA5}">
+                      <a16:colId xmlns:a16="http://schemas.microsoft.com/office/drawing/2014/main" val="20002"/>
+                    </a:ext>
+                  </a:extLst>
+                </a:gridCol>
+                <a:gridCol w="1554480">
+                  <a:extLst>
+                    <a:ext uri="{9D8B030D-6E8A-4147-A177-3AD203B41FA5}">
+                      <a16:colId xmlns:a16="http://schemas.microsoft.com/office/drawing/2014/main" val="20003"/>
+                    </a:ext>
+                  </a:extLst>
+                </a:gridCol>
+                <a:gridCol w="2011680">
+                  <a:extLst>
+                    <a:ext uri="{9D8B030D-6E8A-4147-A177-3AD203B41FA5}">
+                      <a16:colId xmlns:a16="http://schemas.microsoft.com/office/drawing/2014/main" val="20004"/>
+                    </a:ext>
+                  </a:extLst>
+                </a:gridCol>
+                <a:gridCol w="3474720">
+                  <a:extLst>
+                    <a:ext uri="{9D8B030D-6E8A-4147-A177-3AD203B41FA5}">
+                      <a16:colId xmlns:a16="http://schemas.microsoft.com/office/drawing/2014/main" val="20005"/>
+                    </a:ext>
+                  </a:extLst>
+                </a:gridCol>
+                <a:gridCol w="1554480">
+                  <a:extLst>
+                    <a:ext uri="{9D8B030D-6E8A-4147-A177-3AD203B41FA5}">
+                      <a16:colId xmlns:a16="http://schemas.microsoft.com/office/drawing/2014/main" val="20006"/>
+                    </a:ext>
+                  </a:extLst>
+                </a:gridCol>
+                <a:gridCol w="2093976">
+                  <a:extLst>
+                    <a:ext uri="{9D8B030D-6E8A-4147-A177-3AD203B41FA5}">
+                      <a16:colId xmlns:a16="http://schemas.microsoft.com/office/drawing/2014/main" val="20007"/>
+                    </a:ext>
+                  </a:extLst>
+                </a:gridCol>
               </a:tblGrid>
-              <a:tr h="548640">
+              <a:tr h="530352">
                 <a:tc rowSpan="2">
                   <a:txBody>
                     <a:bodyPr/>
@@ -4472,6 +4482,41 @@
                       <a:r>
                         <a:rPr lang="en-US" sz="2800" b="1" dirty="0"/>
                         <a:t>Term</a:t>
+                      </a:r>
+                      <a:endParaRPr lang="en-US" sz="2800" dirty="0"/>
+                    </a:p>
+                  </a:txBody>
+                  <a:tcPr marL="60000" marR="60000" marT="18000" marB="18000" anchor="ctr">
+                    <a:lnL>
+                      <a:noFill/>
+                    </a:lnL>
+                    <a:lnR>
+                      <a:noFill/>
+                    </a:lnR>
+                    <a:lnT w="19050" cap="flat" cmpd="sng" algn="ctr">
+                      <a:solidFill>
+                        <a:srgbClr val="000000"/>
+                      </a:solidFill>
+                      <a:prstDash val="solid"/>
+                      <a:round/>
+                    </a:lnT>
+                    <a:lnB>
+                      <a:noFill/>
+                    </a:lnB>
+                    <a:solidFill>
+                      <a:srgbClr val="D9D9D9"/>
+                    </a:solidFill>
+                  </a:tcPr>
+                </a:tc>
+                <a:tc rowSpan="2">
+                  <a:txBody>
+                    <a:bodyPr/>
+                    <a:lstStyle/>
+                    <a:p>
+                      <a:pPr algn="l"/>
+                      <a:r>
+                        <a:rPr lang="en-US" sz="2800" b="1" dirty="0"/>
+                        <a:t>Model</a:t>
                       </a:r>
                       <a:endParaRPr lang="en-US" sz="2800" dirty="0"/>
                     </a:p>
@@ -4692,8 +4737,44 @@
                     </a:solidFill>
                   </a:tcPr>
                 </a:tc>
+                <a:extLst>
+                  <a:ext uri="{0D108BD9-81ED-4DB2-BD59-A6C34878D82A}">
+                    <a16:rowId xmlns:a16="http://schemas.microsoft.com/office/drawing/2014/main" val="10000"/>
+                  </a:ext>
+                </a:extLst>
               </a:tr>
-              <a:tr h="548640">
+              <a:tr h="530352">
+                <a:tc vMerge="1">
+                  <a:txBody>
+                    <a:bodyPr/>
+                    <a:lstStyle/>
+                    <a:p>
+                      <a:pPr algn="ctr"/>
+                      <a:endParaRPr lang="en-US" sz="2800" dirty="0"/>
+                    </a:p>
+                  </a:txBody>
+                  <a:tcPr marL="60000" marR="60000" marT="18000" marB="18000" anchor="ctr">
+                    <a:lnL>
+                      <a:noFill/>
+                    </a:lnL>
+                    <a:lnR>
+                      <a:noFill/>
+                    </a:lnR>
+                    <a:lnT>
+                      <a:noFill/>
+                    </a:lnT>
+                    <a:lnB w="12700" cap="flat" cmpd="sng" algn="ctr">
+                      <a:solidFill>
+                        <a:srgbClr val="000000"/>
+                      </a:solidFill>
+                      <a:prstDash val="solid"/>
+                      <a:round/>
+                    </a:lnB>
+                    <a:solidFill>
+                      <a:srgbClr val="D9D9D9"/>
+                    </a:solidFill>
+                  </a:tcPr>
+                </a:tc>
                 <a:tc vMerge="1">
                   <a:txBody>
                     <a:bodyPr/>
@@ -4935,197 +5016,13 @@
                     </a:solidFill>
                   </a:tcPr>
                 </a:tc>
+                <a:extLst>
+                  <a:ext uri="{0D108BD9-81ED-4DB2-BD59-A6C34878D82A}">
+                    <a16:rowId xmlns:a16="http://schemas.microsoft.com/office/drawing/2014/main" val="10001"/>
+                  </a:ext>
+                </a:extLst>
               </a:tr>
-              <a:tr h="548640">
-                <a:tc gridSpan="7">
-                  <a:txBody>
-                    <a:bodyPr/>
-                    <a:lstStyle/>
-                    <a:p>
-                      <a:pPr algn="l"/>
-                      <a:r>
-                        <a:rPr lang="en-US" sz="2800" b="1" dirty="0"/>
-                        <a:t>Marginal associations (one term per model, n = 68)</a:t>
-                      </a:r>
-                      <a:endParaRPr lang="en-US" sz="2800" dirty="0"/>
-                    </a:p>
-                  </a:txBody>
-                  <a:tcPr marL="60000" marR="60000" marT="18000" marB="18000" anchor="ctr">
-                    <a:lnL>
-                      <a:noFill/>
-                    </a:lnL>
-                    <a:lnR>
-                      <a:noFill/>
-                    </a:lnR>
-                    <a:lnT>
-                      <a:noFill/>
-                    </a:lnT>
-                    <a:lnB>
-                      <a:noFill/>
-                    </a:lnB>
-                    <a:solidFill>
-                      <a:srgbClr val="EFEFEF"/>
-                    </a:solidFill>
-                  </a:tcPr>
-                </a:tc>
-                <a:tc hMerge="1">
-                  <a:txBody>
-                    <a:bodyPr/>
-                    <a:lstStyle/>
-                    <a:p>
-                      <a:endParaRPr lang="en-US" sz="2800" dirty="0"/>
-                    </a:p>
-                  </a:txBody>
-                  <a:tcPr marL="60000" marR="60000" marT="18000" marB="18000" anchor="ctr">
-                    <a:lnL>
-                      <a:noFill/>
-                    </a:lnL>
-                    <a:lnR>
-                      <a:noFill/>
-                    </a:lnR>
-                    <a:lnT>
-                      <a:noFill/>
-                    </a:lnT>
-                    <a:lnB>
-                      <a:noFill/>
-                    </a:lnB>
-                    <a:solidFill>
-                      <a:srgbClr val="EFEFEF"/>
-                    </a:solidFill>
-                  </a:tcPr>
-                </a:tc>
-                <a:tc hMerge="1">
-                  <a:txBody>
-                    <a:bodyPr/>
-                    <a:lstStyle/>
-                    <a:p>
-                      <a:endParaRPr lang="en-US" sz="2800" dirty="0"/>
-                    </a:p>
-                  </a:txBody>
-                  <a:tcPr marL="60000" marR="60000" marT="18000" marB="18000" anchor="ctr">
-                    <a:lnL>
-                      <a:noFill/>
-                    </a:lnL>
-                    <a:lnR>
-                      <a:noFill/>
-                    </a:lnR>
-                    <a:lnT>
-                      <a:noFill/>
-                    </a:lnT>
-                    <a:lnB>
-                      <a:noFill/>
-                    </a:lnB>
-                    <a:solidFill>
-                      <a:srgbClr val="EFEFEF"/>
-                    </a:solidFill>
-                  </a:tcPr>
-                </a:tc>
-                <a:tc hMerge="1">
-                  <a:txBody>
-                    <a:bodyPr/>
-                    <a:lstStyle/>
-                    <a:p>
-                      <a:endParaRPr lang="en-US" sz="2800" dirty="0"/>
-                    </a:p>
-                  </a:txBody>
-                  <a:tcPr marL="60000" marR="60000" marT="18000" marB="18000" anchor="ctr">
-                    <a:lnL>
-                      <a:noFill/>
-                    </a:lnL>
-                    <a:lnR>
-                      <a:noFill/>
-                    </a:lnR>
-                    <a:lnT>
-                      <a:noFill/>
-                    </a:lnT>
-                    <a:lnB>
-                      <a:noFill/>
-                    </a:lnB>
-                    <a:solidFill>
-                      <a:srgbClr val="EFEFEF"/>
-                    </a:solidFill>
-                  </a:tcPr>
-                </a:tc>
-                <a:tc hMerge="1">
-                  <a:txBody>
-                    <a:bodyPr/>
-                    <a:lstStyle/>
-                    <a:p>
-                      <a:endParaRPr lang="en-US" sz="2800" dirty="0"/>
-                    </a:p>
-                  </a:txBody>
-                  <a:tcPr marL="60000" marR="60000" marT="18000" marB="18000" anchor="ctr">
-                    <a:lnL>
-                      <a:noFill/>
-                    </a:lnL>
-                    <a:lnR>
-                      <a:noFill/>
-                    </a:lnR>
-                    <a:lnT>
-                      <a:noFill/>
-                    </a:lnT>
-                    <a:lnB>
-                      <a:noFill/>
-                    </a:lnB>
-                    <a:solidFill>
-                      <a:srgbClr val="EFEFEF"/>
-                    </a:solidFill>
-                  </a:tcPr>
-                </a:tc>
-                <a:tc hMerge="1">
-                  <a:txBody>
-                    <a:bodyPr/>
-                    <a:lstStyle/>
-                    <a:p>
-                      <a:endParaRPr lang="en-US" sz="2800" dirty="0"/>
-                    </a:p>
-                  </a:txBody>
-                  <a:tcPr marL="60000" marR="60000" marT="18000" marB="18000" anchor="ctr">
-                    <a:lnL>
-                      <a:noFill/>
-                    </a:lnL>
-                    <a:lnR>
-                      <a:noFill/>
-                    </a:lnR>
-                    <a:lnT>
-                      <a:noFill/>
-                    </a:lnT>
-                    <a:lnB>
-                      <a:noFill/>
-                    </a:lnB>
-                    <a:solidFill>
-                      <a:srgbClr val="EFEFEF"/>
-                    </a:solidFill>
-                  </a:tcPr>
-                </a:tc>
-                <a:tc hMerge="1">
-                  <a:txBody>
-                    <a:bodyPr/>
-                    <a:lstStyle/>
-                    <a:p>
-                      <a:endParaRPr lang="en-US" sz="2800" dirty="0"/>
-                    </a:p>
-                  </a:txBody>
-                  <a:tcPr marL="60000" marR="60000" marT="18000" marB="18000" anchor="ctr">
-                    <a:lnL>
-                      <a:noFill/>
-                    </a:lnL>
-                    <a:lnR>
-                      <a:noFill/>
-                    </a:lnR>
-                    <a:lnT>
-                      <a:noFill/>
-                    </a:lnT>
-                    <a:lnB>
-                      <a:noFill/>
-                    </a:lnB>
-                    <a:solidFill>
-                      <a:srgbClr val="EFEFEF"/>
-                    </a:solidFill>
-                  </a:tcPr>
-                </a:tc>
-              </a:tr>
-              <a:tr h="548640">
+              <a:tr h="530352">
                 <a:tc>
                   <a:txBody>
                     <a:bodyPr/>
@@ -5136,7 +5033,34 @@
                         <a:rPr lang="en-US" sz="2800" dirty="0"/>
                         <a:t>Treatment (FLOX/nivolumab vs FLOX)</a:t>
                       </a:r>
-                      <a:endParaRPr lang="en-US" sz="2800" dirty="0"/>
+                    </a:p>
+                  </a:txBody>
+                  <a:tcPr marL="60000" marR="60000" marT="18000" marB="18000" anchor="ctr">
+                    <a:lnL>
+                      <a:noFill/>
+                    </a:lnL>
+                    <a:lnR>
+                      <a:noFill/>
+                    </a:lnR>
+                    <a:lnT>
+                      <a:noFill/>
+                    </a:lnT>
+                    <a:lnB>
+                      <a:noFill/>
+                    </a:lnB>
+                    <a:noFill/>
+                  </a:tcPr>
+                </a:tc>
+                <a:tc>
+                  <a:txBody>
+                    <a:bodyPr/>
+                    <a:lstStyle/>
+                    <a:p>
+                      <a:pPr algn="l"/>
+                      <a:r>
+                        <a:rPr lang="en-US" sz="2800" dirty="0"/>
+                        <a:t>Univariable</a:t>
+                      </a:r>
                     </a:p>
                   </a:txBody>
                   <a:tcPr marL="60000" marR="60000" marT="18000" marB="18000" anchor="ctr">
@@ -5165,7 +5089,6 @@
                         <a:rPr lang="en-US" sz="2800" dirty="0"/>
                         <a:t>0.96 (0.58–1.61)</a:t>
                       </a:r>
-                      <a:endParaRPr lang="en-US" sz="2800" dirty="0"/>
                     </a:p>
                   </a:txBody>
                   <a:tcPr marL="60000" marR="60000" marT="18000" marB="18000" anchor="ctr">
@@ -5175,8 +5098,14 @@
                     <a:lnR>
                       <a:noFill/>
                     </a:lnR>
-                    <a:lnT>
-                      <a:noFill/>
+                    <a:lnT w="12700" cap="flat" cmpd="sng" algn="ctr">
+                      <a:solidFill>
+                        <a:srgbClr val="000000"/>
+                      </a:solidFill>
+                      <a:prstDash val="solid"/>
+                      <a:round/>
+                      <a:headEnd type="none" w="med" len="med"/>
+                      <a:tailEnd type="none" w="med" len="med"/>
                     </a:lnT>
                     <a:lnB>
                       <a:noFill/>
@@ -5194,7 +5123,6 @@
                         <a:rPr lang="en-US" sz="2800" dirty="0"/>
                         <a:t>0.87</a:t>
                       </a:r>
-                      <a:endParaRPr lang="en-US" sz="2800" dirty="0"/>
                     </a:p>
                   </a:txBody>
                   <a:tcPr marL="60000" marR="60000" marT="18000" marB="18000" anchor="ctr">
@@ -5204,8 +5132,14 @@
                     <a:lnR>
                       <a:noFill/>
                     </a:lnR>
-                    <a:lnT>
-                      <a:noFill/>
+                    <a:lnT w="12700" cap="flat" cmpd="sng" algn="ctr">
+                      <a:solidFill>
+                        <a:srgbClr val="000000"/>
+                      </a:solidFill>
+                      <a:prstDash val="solid"/>
+                      <a:round/>
+                      <a:headEnd type="none" w="med" len="med"/>
+                      <a:tailEnd type="none" w="med" len="med"/>
                     </a:lnT>
                     <a:lnB>
                       <a:noFill/>
@@ -5223,7 +5157,6 @@
                         <a:rPr lang="en-US" sz="2800" dirty="0"/>
                         <a:t>–</a:t>
                       </a:r>
-                      <a:endParaRPr lang="en-US" sz="2800" dirty="0"/>
                     </a:p>
                   </a:txBody>
                   <a:tcPr marL="60000" marR="60000" marT="18000" marB="18000" anchor="ctr">
@@ -5233,8 +5166,14 @@
                     <a:lnR>
                       <a:noFill/>
                     </a:lnR>
-                    <a:lnT>
-                      <a:noFill/>
+                    <a:lnT w="12700" cap="flat" cmpd="sng" algn="ctr">
+                      <a:solidFill>
+                        <a:srgbClr val="000000"/>
+                      </a:solidFill>
+                      <a:prstDash val="solid"/>
+                      <a:round/>
+                      <a:headEnd type="none" w="med" len="med"/>
+                      <a:tailEnd type="none" w="med" len="med"/>
                     </a:lnT>
                     <a:lnB>
                       <a:noFill/>
@@ -5252,7 +5191,6 @@
                         <a:rPr lang="en-US" sz="2800" dirty="0"/>
                         <a:t>0.80 (0.49–1.33)</a:t>
                       </a:r>
-                      <a:endParaRPr lang="en-US" sz="2800" dirty="0"/>
                     </a:p>
                   </a:txBody>
                   <a:tcPr marL="60000" marR="60000" marT="18000" marB="18000" anchor="ctr">
@@ -5262,8 +5200,14 @@
                     <a:lnR>
                       <a:noFill/>
                     </a:lnR>
-                    <a:lnT>
-                      <a:noFill/>
+                    <a:lnT w="12700" cap="flat" cmpd="sng" algn="ctr">
+                      <a:solidFill>
+                        <a:srgbClr val="000000"/>
+                      </a:solidFill>
+                      <a:prstDash val="solid"/>
+                      <a:round/>
+                      <a:headEnd type="none" w="med" len="med"/>
+                      <a:tailEnd type="none" w="med" len="med"/>
                     </a:lnT>
                     <a:lnB>
                       <a:noFill/>
@@ -5281,7 +5225,6 @@
                         <a:rPr lang="en-US" sz="2800" dirty="0"/>
                         <a:t>0.39</a:t>
                       </a:r>
-                      <a:endParaRPr lang="en-US" sz="2800" dirty="0"/>
                     </a:p>
                   </a:txBody>
                   <a:tcPr marL="60000" marR="60000" marT="18000" marB="18000" anchor="ctr">
@@ -5291,8 +5234,14 @@
                     <a:lnR>
                       <a:noFill/>
                     </a:lnR>
-                    <a:lnT>
-                      <a:noFill/>
+                    <a:lnT w="12700" cap="flat" cmpd="sng" algn="ctr">
+                      <a:solidFill>
+                        <a:srgbClr val="000000"/>
+                      </a:solidFill>
+                      <a:prstDash val="solid"/>
+                      <a:round/>
+                      <a:headEnd type="none" w="med" len="med"/>
+                      <a:tailEnd type="none" w="med" len="med"/>
                     </a:lnT>
                     <a:lnB>
                       <a:noFill/>
@@ -5310,7 +5259,6 @@
                         <a:rPr lang="en-US" sz="2800" dirty="0"/>
                         <a:t>–</a:t>
                       </a:r>
-                      <a:endParaRPr lang="en-US" sz="2800" dirty="0"/>
                     </a:p>
                   </a:txBody>
                   <a:tcPr marL="60000" marR="60000" marT="18000" marB="18000" anchor="ctr">
@@ -5320,8 +5268,14 @@
                     <a:lnR>
                       <a:noFill/>
                     </a:lnR>
-                    <a:lnT>
-                      <a:noFill/>
+                    <a:lnT w="12700" cap="flat" cmpd="sng" algn="ctr">
+                      <a:solidFill>
+                        <a:srgbClr val="000000"/>
+                      </a:solidFill>
+                      <a:prstDash val="solid"/>
+                      <a:round/>
+                      <a:headEnd type="none" w="med" len="med"/>
+                      <a:tailEnd type="none" w="med" len="med"/>
                     </a:lnT>
                     <a:lnB>
                       <a:noFill/>
@@ -5329,8 +5283,13 @@
                     <a:noFill/>
                   </a:tcPr>
                 </a:tc>
+                <a:extLst>
+                  <a:ext uri="{0D108BD9-81ED-4DB2-BD59-A6C34878D82A}">
+                    <a16:rowId xmlns:a16="http://schemas.microsoft.com/office/drawing/2014/main" val="10002"/>
+                  </a:ext>
+                </a:extLst>
               </a:tr>
-              <a:tr h="548640">
+              <a:tr h="530352">
                 <a:tc>
                   <a:txBody>
                     <a:bodyPr/>
@@ -5341,7 +5300,34 @@
                         <a:rPr lang="en-US" sz="2800" dirty="0"/>
                         <a:t>CRP &lt;5 mg/L at week 4</a:t>
                       </a:r>
-                      <a:endParaRPr lang="en-US" sz="2800" dirty="0"/>
+                    </a:p>
+                  </a:txBody>
+                  <a:tcPr marL="60000" marR="60000" marT="18000" marB="18000" anchor="ctr">
+                    <a:lnL>
+                      <a:noFill/>
+                    </a:lnL>
+                    <a:lnR>
+                      <a:noFill/>
+                    </a:lnR>
+                    <a:lnT>
+                      <a:noFill/>
+                    </a:lnT>
+                    <a:lnB>
+                      <a:noFill/>
+                    </a:lnB>
+                    <a:noFill/>
+                  </a:tcPr>
+                </a:tc>
+                <a:tc>
+                  <a:txBody>
+                    <a:bodyPr/>
+                    <a:lstStyle/>
+                    <a:p>
+                      <a:pPr algn="l"/>
+                      <a:r>
+                        <a:rPr lang="en-US" sz="2800" dirty="0"/>
+                        <a:t>Univariable (prognostic)</a:t>
+                      </a:r>
                     </a:p>
                   </a:txBody>
                   <a:tcPr marL="60000" marR="60000" marT="18000" marB="18000" anchor="ctr">
@@ -5370,7 +5356,6 @@
                         <a:rPr lang="en-US" sz="2800" dirty="0"/>
                         <a:t>0.49 (0.27–0.84)</a:t>
                       </a:r>
-                      <a:endParaRPr lang="en-US" sz="2800" dirty="0"/>
                     </a:p>
                   </a:txBody>
                   <a:tcPr marL="60000" marR="60000" marT="18000" marB="18000" anchor="ctr">
@@ -5399,7 +5384,6 @@
                         <a:rPr lang="en-US" sz="2800" dirty="0"/>
                         <a:t>0.009</a:t>
                       </a:r>
-                      <a:endParaRPr lang="en-US" sz="2800" dirty="0"/>
                     </a:p>
                   </a:txBody>
                   <a:tcPr marL="60000" marR="60000" marT="18000" marB="18000" anchor="ctr">
@@ -5428,7 +5412,6 @@
                         <a:rPr lang="en-US" sz="2800" dirty="0"/>
                         <a:t>–</a:t>
                       </a:r>
-                      <a:endParaRPr lang="en-US" sz="2800" dirty="0"/>
                     </a:p>
                   </a:txBody>
                   <a:tcPr marL="60000" marR="60000" marT="18000" marB="18000" anchor="ctr">
@@ -5457,7 +5440,6 @@
                         <a:rPr lang="en-US" sz="2800" dirty="0"/>
                         <a:t>0.41 (0.23–0.71)</a:t>
                       </a:r>
-                      <a:endParaRPr lang="en-US" sz="2800" dirty="0"/>
                     </a:p>
                   </a:txBody>
                   <a:tcPr marL="60000" marR="60000" marT="18000" marB="18000" anchor="ctr">
@@ -5486,7 +5468,6 @@
                         <a:rPr lang="en-US" sz="2800" dirty="0"/>
                         <a:t>0.001</a:t>
                       </a:r>
-                      <a:endParaRPr lang="en-US" sz="2800" dirty="0"/>
                     </a:p>
                   </a:txBody>
                   <a:tcPr marL="60000" marR="60000" marT="18000" marB="18000" anchor="ctr">
@@ -5515,7 +5496,6 @@
                         <a:rPr lang="en-US" sz="2800" dirty="0"/>
                         <a:t>–</a:t>
                       </a:r>
-                      <a:endParaRPr lang="en-US" sz="2800" dirty="0"/>
                     </a:p>
                   </a:txBody>
                   <a:tcPr marL="60000" marR="60000" marT="18000" marB="18000" anchor="ctr">
@@ -5534,8 +5514,13 @@
                     <a:noFill/>
                   </a:tcPr>
                 </a:tc>
+                <a:extLst>
+                  <a:ext uri="{0D108BD9-81ED-4DB2-BD59-A6C34878D82A}">
+                    <a16:rowId xmlns:a16="http://schemas.microsoft.com/office/drawing/2014/main" val="10003"/>
+                  </a:ext>
+                </a:extLst>
               </a:tr>
-              <a:tr h="548640">
+              <a:tr h="530352">
                 <a:tc>
                   <a:txBody>
                     <a:bodyPr/>
@@ -5544,7 +5529,7 @@
                       <a:pPr algn="l"/>
                       <a:r>
                         <a:rPr lang="en-US" sz="2800" dirty="0"/>
-                        <a:t xml:space="preserve">TMB ≥9 mut/Mb or </a:t>
+                        <a:t>TMB ≥9 mut/Mb or </a:t>
                       </a:r>
                       <a:r>
                         <a:rPr lang="en-US" sz="2800" i="1" dirty="0"/>
@@ -5552,9 +5537,36 @@
                       </a:r>
                       <a:r>
                         <a:rPr lang="en-US" sz="2800" dirty="0"/>
-                        <a:t xml:space="preserve"> V600E</a:t>
+                        <a:t> V600E</a:t>
                       </a:r>
-                      <a:endParaRPr lang="en-US" sz="2800" dirty="0"/>
+                    </a:p>
+                  </a:txBody>
+                  <a:tcPr marL="60000" marR="60000" marT="18000" marB="18000" anchor="ctr">
+                    <a:lnL>
+                      <a:noFill/>
+                    </a:lnL>
+                    <a:lnR>
+                      <a:noFill/>
+                    </a:lnR>
+                    <a:lnT>
+                      <a:noFill/>
+                    </a:lnT>
+                    <a:lnB>
+                      <a:noFill/>
+                    </a:lnB>
+                    <a:noFill/>
+                  </a:tcPr>
+                </a:tc>
+                <a:tc>
+                  <a:txBody>
+                    <a:bodyPr/>
+                    <a:lstStyle/>
+                    <a:p>
+                      <a:pPr algn="l"/>
+                      <a:r>
+                        <a:rPr lang="en-US" sz="2800" dirty="0"/>
+                        <a:t>Univariable (prognostic)</a:t>
+                      </a:r>
                     </a:p>
                   </a:txBody>
                   <a:tcPr marL="60000" marR="60000" marT="18000" marB="18000" anchor="ctr">
@@ -5583,7 +5595,6 @@
                         <a:rPr lang="en-US" sz="2800" dirty="0"/>
                         <a:t>0.68 (0.40–1.13)</a:t>
                       </a:r>
-                      <a:endParaRPr lang="en-US" sz="2800" dirty="0"/>
                     </a:p>
                   </a:txBody>
                   <a:tcPr marL="60000" marR="60000" marT="18000" marB="18000" anchor="ctr">
@@ -5612,7 +5623,6 @@
                         <a:rPr lang="en-US" sz="2800" dirty="0"/>
                         <a:t>0.14</a:t>
                       </a:r>
-                      <a:endParaRPr lang="en-US" sz="2800" dirty="0"/>
                     </a:p>
                   </a:txBody>
                   <a:tcPr marL="60000" marR="60000" marT="18000" marB="18000" anchor="ctr">
@@ -5641,7 +5651,6 @@
                         <a:rPr lang="en-US" sz="2800" dirty="0"/>
                         <a:t>–</a:t>
                       </a:r>
-                      <a:endParaRPr lang="en-US" sz="2800" dirty="0"/>
                     </a:p>
                   </a:txBody>
                   <a:tcPr marL="60000" marR="60000" marT="18000" marB="18000" anchor="ctr">
@@ -5670,7 +5679,6 @@
                         <a:rPr lang="en-US" sz="2800" dirty="0"/>
                         <a:t>0.49 (0.28–0.84)</a:t>
                       </a:r>
-                      <a:endParaRPr lang="en-US" sz="2800" dirty="0"/>
                     </a:p>
                   </a:txBody>
                   <a:tcPr marL="60000" marR="60000" marT="18000" marB="18000" anchor="ctr">
@@ -5699,7 +5707,6 @@
                         <a:rPr lang="en-US" sz="2800" dirty="0"/>
                         <a:t>0.009</a:t>
                       </a:r>
-                      <a:endParaRPr lang="en-US" sz="2800" dirty="0"/>
                     </a:p>
                   </a:txBody>
                   <a:tcPr marL="60000" marR="60000" marT="18000" marB="18000" anchor="ctr">
@@ -5728,7 +5735,6 @@
                         <a:rPr lang="en-US" sz="2800" dirty="0"/>
                         <a:t>–</a:t>
                       </a:r>
-                      <a:endParaRPr lang="en-US" sz="2800" dirty="0"/>
                     </a:p>
                   </a:txBody>
                   <a:tcPr marL="60000" marR="60000" marT="18000" marB="18000" anchor="ctr">
@@ -5747,8 +5753,13 @@
                     <a:noFill/>
                   </a:tcPr>
                 </a:tc>
+                <a:extLst>
+                  <a:ext uri="{0D108BD9-81ED-4DB2-BD59-A6C34878D82A}">
+                    <a16:rowId xmlns:a16="http://schemas.microsoft.com/office/drawing/2014/main" val="10004"/>
+                  </a:ext>
+                </a:extLst>
               </a:tr>
-              <a:tr h="548640">
+              <a:tr h="530352">
                 <a:tc>
                   <a:txBody>
                     <a:bodyPr/>
@@ -5759,7 +5770,34 @@
                         <a:rPr lang="en-US" sz="2800" dirty="0"/>
                         <a:t>TLR ≥10% (week-9 landmark)†</a:t>
                       </a:r>
-                      <a:endParaRPr lang="en-US" sz="2800" dirty="0"/>
+                    </a:p>
+                  </a:txBody>
+                  <a:tcPr marL="60000" marR="60000" marT="18000" marB="18000" anchor="ctr">
+                    <a:lnL>
+                      <a:noFill/>
+                    </a:lnL>
+                    <a:lnR>
+                      <a:noFill/>
+                    </a:lnR>
+                    <a:lnT>
+                      <a:noFill/>
+                    </a:lnT>
+                    <a:lnB>
+                      <a:noFill/>
+                    </a:lnB>
+                    <a:noFill/>
+                  </a:tcPr>
+                </a:tc>
+                <a:tc>
+                  <a:txBody>
+                    <a:bodyPr/>
+                    <a:lstStyle/>
+                    <a:p>
+                      <a:pPr algn="l"/>
+                      <a:r>
+                        <a:rPr lang="en-US" sz="2800" dirty="0"/>
+                        <a:t>Univariable (prognostic)</a:t>
+                      </a:r>
                     </a:p>
                   </a:txBody>
                   <a:tcPr marL="60000" marR="60000" marT="18000" marB="18000" anchor="ctr">
@@ -5788,7 +5826,6 @@
                         <a:rPr lang="en-US" sz="2800" dirty="0"/>
                         <a:t>0.35 (0.21–0.61)</a:t>
                       </a:r>
-                      <a:endParaRPr lang="en-US" sz="2800" dirty="0"/>
                     </a:p>
                   </a:txBody>
                   <a:tcPr marL="60000" marR="60000" marT="18000" marB="18000" anchor="ctr">
@@ -5817,7 +5854,6 @@
                         <a:rPr lang="en-US" sz="2800" dirty="0"/>
                         <a:t>&lt;0.001</a:t>
                       </a:r>
-                      <a:endParaRPr lang="en-US" sz="2800" dirty="0"/>
                     </a:p>
                   </a:txBody>
                   <a:tcPr marL="60000" marR="60000" marT="18000" marB="18000" anchor="ctr">
@@ -5846,7 +5882,6 @@
                         <a:rPr lang="en-US" sz="2800" dirty="0"/>
                         <a:t>–</a:t>
                       </a:r>
-                      <a:endParaRPr lang="en-US" sz="2800" dirty="0"/>
                     </a:p>
                   </a:txBody>
                   <a:tcPr marL="60000" marR="60000" marT="18000" marB="18000" anchor="ctr">
@@ -5875,7 +5910,6 @@
                         <a:rPr lang="en-US" sz="2800" dirty="0"/>
                         <a:t>0.35 (0.20–0.63)</a:t>
                       </a:r>
-                      <a:endParaRPr lang="en-US" sz="2800" dirty="0"/>
                     </a:p>
                   </a:txBody>
                   <a:tcPr marL="60000" marR="60000" marT="18000" marB="18000" anchor="ctr">
@@ -5904,7 +5938,6 @@
                         <a:rPr lang="en-US" sz="2800" dirty="0"/>
                         <a:t>&lt;0.001</a:t>
                       </a:r>
-                      <a:endParaRPr lang="en-US" sz="2800" dirty="0"/>
                     </a:p>
                   </a:txBody>
                   <a:tcPr marL="60000" marR="60000" marT="18000" marB="18000" anchor="ctr">
@@ -5933,7 +5966,6 @@
                         <a:rPr lang="en-US" sz="2800" dirty="0"/>
                         <a:t>–</a:t>
                       </a:r>
-                      <a:endParaRPr lang="en-US" sz="2800" dirty="0"/>
                     </a:p>
                   </a:txBody>
                   <a:tcPr marL="60000" marR="60000" marT="18000" marB="18000" anchor="ctr">
@@ -5952,197 +5984,13 @@
                     <a:noFill/>
                   </a:tcPr>
                 </a:tc>
+                <a:extLst>
+                  <a:ext uri="{0D108BD9-81ED-4DB2-BD59-A6C34878D82A}">
+                    <a16:rowId xmlns:a16="http://schemas.microsoft.com/office/drawing/2014/main" val="10005"/>
+                  </a:ext>
+                </a:extLst>
               </a:tr>
-              <a:tr h="548640">
-                <a:tc gridSpan="7">
-                  <a:txBody>
-                    <a:bodyPr/>
-                    <a:lstStyle/>
-                    <a:p>
-                      <a:pPr algn="l"/>
-                      <a:r>
-                        <a:rPr lang="en-US" sz="2800" b="1" dirty="0"/>
-                        <a:t>Unified model: treatment × biomarker interactions (PLRT p)</a:t>
-                      </a:r>
-                      <a:endParaRPr lang="en-US" sz="2800" dirty="0"/>
-                    </a:p>
-                  </a:txBody>
-                  <a:tcPr marL="60000" marR="60000" marT="18000" marB="18000" anchor="ctr">
-                    <a:lnL>
-                      <a:noFill/>
-                    </a:lnL>
-                    <a:lnR>
-                      <a:noFill/>
-                    </a:lnR>
-                    <a:lnT>
-                      <a:noFill/>
-                    </a:lnT>
-                    <a:lnB>
-                      <a:noFill/>
-                    </a:lnB>
-                    <a:solidFill>
-                      <a:srgbClr val="EFEFEF"/>
-                    </a:solidFill>
-                  </a:tcPr>
-                </a:tc>
-                <a:tc hMerge="1">
-                  <a:txBody>
-                    <a:bodyPr/>
-                    <a:lstStyle/>
-                    <a:p>
-                      <a:endParaRPr lang="en-US" sz="2800" dirty="0"/>
-                    </a:p>
-                  </a:txBody>
-                  <a:tcPr marL="60000" marR="60000" marT="18000" marB="18000" anchor="ctr">
-                    <a:lnL>
-                      <a:noFill/>
-                    </a:lnL>
-                    <a:lnR>
-                      <a:noFill/>
-                    </a:lnR>
-                    <a:lnT>
-                      <a:noFill/>
-                    </a:lnT>
-                    <a:lnB>
-                      <a:noFill/>
-                    </a:lnB>
-                    <a:solidFill>
-                      <a:srgbClr val="EFEFEF"/>
-                    </a:solidFill>
-                  </a:tcPr>
-                </a:tc>
-                <a:tc hMerge="1">
-                  <a:txBody>
-                    <a:bodyPr/>
-                    <a:lstStyle/>
-                    <a:p>
-                      <a:endParaRPr lang="en-US" sz="2800" dirty="0"/>
-                    </a:p>
-                  </a:txBody>
-                  <a:tcPr marL="60000" marR="60000" marT="18000" marB="18000" anchor="ctr">
-                    <a:lnL>
-                      <a:noFill/>
-                    </a:lnL>
-                    <a:lnR>
-                      <a:noFill/>
-                    </a:lnR>
-                    <a:lnT>
-                      <a:noFill/>
-                    </a:lnT>
-                    <a:lnB>
-                      <a:noFill/>
-                    </a:lnB>
-                    <a:solidFill>
-                      <a:srgbClr val="EFEFEF"/>
-                    </a:solidFill>
-                  </a:tcPr>
-                </a:tc>
-                <a:tc hMerge="1">
-                  <a:txBody>
-                    <a:bodyPr/>
-                    <a:lstStyle/>
-                    <a:p>
-                      <a:endParaRPr lang="en-US" sz="2800" dirty="0"/>
-                    </a:p>
-                  </a:txBody>
-                  <a:tcPr marL="60000" marR="60000" marT="18000" marB="18000" anchor="ctr">
-                    <a:lnL>
-                      <a:noFill/>
-                    </a:lnL>
-                    <a:lnR>
-                      <a:noFill/>
-                    </a:lnR>
-                    <a:lnT>
-                      <a:noFill/>
-                    </a:lnT>
-                    <a:lnB>
-                      <a:noFill/>
-                    </a:lnB>
-                    <a:solidFill>
-                      <a:srgbClr val="EFEFEF"/>
-                    </a:solidFill>
-                  </a:tcPr>
-                </a:tc>
-                <a:tc hMerge="1">
-                  <a:txBody>
-                    <a:bodyPr/>
-                    <a:lstStyle/>
-                    <a:p>
-                      <a:endParaRPr lang="en-US" sz="2800" dirty="0"/>
-                    </a:p>
-                  </a:txBody>
-                  <a:tcPr marL="60000" marR="60000" marT="18000" marB="18000" anchor="ctr">
-                    <a:lnL>
-                      <a:noFill/>
-                    </a:lnL>
-                    <a:lnR>
-                      <a:noFill/>
-                    </a:lnR>
-                    <a:lnT>
-                      <a:noFill/>
-                    </a:lnT>
-                    <a:lnB>
-                      <a:noFill/>
-                    </a:lnB>
-                    <a:solidFill>
-                      <a:srgbClr val="EFEFEF"/>
-                    </a:solidFill>
-                  </a:tcPr>
-                </a:tc>
-                <a:tc hMerge="1">
-                  <a:txBody>
-                    <a:bodyPr/>
-                    <a:lstStyle/>
-                    <a:p>
-                      <a:endParaRPr lang="en-US" sz="2800" dirty="0"/>
-                    </a:p>
-                  </a:txBody>
-                  <a:tcPr marL="60000" marR="60000" marT="18000" marB="18000" anchor="ctr">
-                    <a:lnL>
-                      <a:noFill/>
-                    </a:lnL>
-                    <a:lnR>
-                      <a:noFill/>
-                    </a:lnR>
-                    <a:lnT>
-                      <a:noFill/>
-                    </a:lnT>
-                    <a:lnB>
-                      <a:noFill/>
-                    </a:lnB>
-                    <a:solidFill>
-                      <a:srgbClr val="EFEFEF"/>
-                    </a:solidFill>
-                  </a:tcPr>
-                </a:tc>
-                <a:tc hMerge="1">
-                  <a:txBody>
-                    <a:bodyPr/>
-                    <a:lstStyle/>
-                    <a:p>
-                      <a:endParaRPr lang="en-US" sz="2800" dirty="0"/>
-                    </a:p>
-                  </a:txBody>
-                  <a:tcPr marL="60000" marR="60000" marT="18000" marB="18000" anchor="ctr">
-                    <a:lnL>
-                      <a:noFill/>
-                    </a:lnL>
-                    <a:lnR>
-                      <a:noFill/>
-                    </a:lnR>
-                    <a:lnT>
-                      <a:noFill/>
-                    </a:lnT>
-                    <a:lnB>
-                      <a:noFill/>
-                    </a:lnB>
-                    <a:solidFill>
-                      <a:srgbClr val="EFEFEF"/>
-                    </a:solidFill>
-                  </a:tcPr>
-                </a:tc>
-              </a:tr>
-              <a:tr h="548640">
+              <a:tr h="530352">
                 <a:tc>
                   <a:txBody>
                     <a:bodyPr/>
@@ -6153,7 +6001,34 @@
                         <a:rPr lang="en-US" sz="2800" dirty="0"/>
                         <a:t>CRP × treatment</a:t>
                       </a:r>
-                      <a:endParaRPr lang="en-US" sz="2800" dirty="0"/>
+                    </a:p>
+                  </a:txBody>
+                  <a:tcPr marL="60000" marR="60000" marT="18000" marB="18000" anchor="ctr">
+                    <a:lnL>
+                      <a:noFill/>
+                    </a:lnL>
+                    <a:lnR>
+                      <a:noFill/>
+                    </a:lnR>
+                    <a:lnT>
+                      <a:noFill/>
+                    </a:lnT>
+                    <a:lnB>
+                      <a:noFill/>
+                    </a:lnB>
+                    <a:noFill/>
+                  </a:tcPr>
+                </a:tc>
+                <a:tc>
+                  <a:txBody>
+                    <a:bodyPr/>
+                    <a:lstStyle/>
+                    <a:p>
+                      <a:pPr algn="l"/>
+                      <a:r>
+                        <a:rPr lang="en-US" sz="2800" dirty="0"/>
+                        <a:t>Unified interaction model</a:t>
+                      </a:r>
                     </a:p>
                   </a:txBody>
                   <a:tcPr marL="60000" marR="60000" marT="18000" marB="18000" anchor="ctr">
@@ -6182,7 +6057,6 @@
                         <a:rPr lang="en-US" sz="2800" dirty="0"/>
                         <a:t>0.65 (0.19–2.60)</a:t>
                       </a:r>
-                      <a:endParaRPr lang="en-US" sz="2800" dirty="0"/>
                     </a:p>
                   </a:txBody>
                   <a:tcPr marL="60000" marR="60000" marT="18000" marB="18000" anchor="ctr">
@@ -6211,7 +6085,6 @@
                         <a:rPr lang="en-US" sz="2800" dirty="0"/>
                         <a:t>0.52</a:t>
                       </a:r>
-                      <a:endParaRPr lang="en-US" sz="2800" dirty="0"/>
                     </a:p>
                   </a:txBody>
                   <a:tcPr marL="60000" marR="60000" marT="18000" marB="18000" anchor="ctr">
@@ -6240,7 +6113,6 @@
                         <a:rPr lang="en-US" sz="2800" dirty="0"/>
                         <a:t>0.40</a:t>
                       </a:r>
-                      <a:endParaRPr lang="en-US" sz="2800" dirty="0"/>
                     </a:p>
                   </a:txBody>
                   <a:tcPr marL="60000" marR="60000" marT="18000" marB="18000" anchor="ctr">
@@ -6269,7 +6141,6 @@
                         <a:rPr lang="en-US" sz="2800" dirty="0"/>
                         <a:t>0.42 (0.11–1.68)</a:t>
                       </a:r>
-                      <a:endParaRPr lang="en-US" sz="2800" dirty="0"/>
                     </a:p>
                   </a:txBody>
                   <a:tcPr marL="60000" marR="60000" marT="18000" marB="18000" anchor="ctr">
@@ -6298,7 +6169,6 @@
                         <a:rPr lang="en-US" sz="2800" dirty="0"/>
                         <a:t>0.21</a:t>
                       </a:r>
-                      <a:endParaRPr lang="en-US" sz="2800" dirty="0"/>
                     </a:p>
                   </a:txBody>
                   <a:tcPr marL="60000" marR="60000" marT="18000" marB="18000" anchor="ctr">
@@ -6327,7 +6197,6 @@
                         <a:rPr lang="en-US" sz="2800" dirty="0"/>
                         <a:t>0.33</a:t>
                       </a:r>
-                      <a:endParaRPr lang="en-US" sz="2800" dirty="0"/>
                     </a:p>
                   </a:txBody>
                   <a:tcPr marL="60000" marR="60000" marT="18000" marB="18000" anchor="ctr">
@@ -6346,8 +6215,13 @@
                     <a:noFill/>
                   </a:tcPr>
                 </a:tc>
+                <a:extLst>
+                  <a:ext uri="{0D108BD9-81ED-4DB2-BD59-A6C34878D82A}">
+                    <a16:rowId xmlns:a16="http://schemas.microsoft.com/office/drawing/2014/main" val="10006"/>
+                  </a:ext>
+                </a:extLst>
               </a:tr>
-              <a:tr h="548640">
+              <a:tr h="530352">
                 <a:tc>
                   <a:txBody>
                     <a:bodyPr/>
@@ -6364,9 +6238,36 @@
                       </a:r>
                       <a:r>
                         <a:rPr lang="en-US" sz="2800" dirty="0"/>
-                        <a:t xml:space="preserve"> × treatment</a:t>
+                        <a:t> × treatment</a:t>
                       </a:r>
-                      <a:endParaRPr lang="en-US" sz="2800" dirty="0"/>
+                    </a:p>
+                  </a:txBody>
+                  <a:tcPr marL="60000" marR="60000" marT="18000" marB="18000" anchor="ctr">
+                    <a:lnL>
+                      <a:noFill/>
+                    </a:lnL>
+                    <a:lnR>
+                      <a:noFill/>
+                    </a:lnR>
+                    <a:lnT>
+                      <a:noFill/>
+                    </a:lnT>
+                    <a:lnB>
+                      <a:noFill/>
+                    </a:lnB>
+                    <a:noFill/>
+                  </a:tcPr>
+                </a:tc>
+                <a:tc>
+                  <a:txBody>
+                    <a:bodyPr/>
+                    <a:lstStyle/>
+                    <a:p>
+                      <a:pPr algn="l"/>
+                      <a:r>
+                        <a:rPr lang="en-US" sz="2800" dirty="0"/>
+                        <a:t>Unified interaction model</a:t>
+                      </a:r>
                     </a:p>
                   </a:txBody>
                   <a:tcPr marL="60000" marR="60000" marT="18000" marB="18000" anchor="ctr">
@@ -6395,7 +6296,6 @@
                         <a:rPr lang="en-US" sz="2800" dirty="0"/>
                         <a:t>0.95 (0.32–2.82)</a:t>
                       </a:r>
-                      <a:endParaRPr lang="en-US" sz="2800" dirty="0"/>
                     </a:p>
                   </a:txBody>
                   <a:tcPr marL="60000" marR="60000" marT="18000" marB="18000" anchor="ctr">
@@ -6424,7 +6324,6 @@
                         <a:rPr lang="en-US" sz="2800" dirty="0"/>
                         <a:t>0.92</a:t>
                       </a:r>
-                      <a:endParaRPr lang="en-US" sz="2800" dirty="0"/>
                     </a:p>
                   </a:txBody>
                   <a:tcPr marL="60000" marR="60000" marT="18000" marB="18000" anchor="ctr">
@@ -6453,7 +6352,6 @@
                         <a:rPr lang="en-US" sz="2800" dirty="0"/>
                         <a:t>0.86</a:t>
                       </a:r>
-                      <a:endParaRPr lang="en-US" sz="2800" dirty="0"/>
                     </a:p>
                   </a:txBody>
                   <a:tcPr marL="60000" marR="60000" marT="18000" marB="18000" anchor="ctr">
@@ -6482,7 +6380,6 @@
                         <a:rPr lang="en-US" sz="2800" dirty="0"/>
                         <a:t>0.66 (0.21–2.05)</a:t>
                       </a:r>
-                      <a:endParaRPr lang="en-US" sz="2800" dirty="0"/>
                     </a:p>
                   </a:txBody>
                   <a:tcPr marL="60000" marR="60000" marT="18000" marB="18000" anchor="ctr">
@@ -6511,7 +6408,6 @@
                         <a:rPr lang="en-US" sz="2800" dirty="0"/>
                         <a:t>0.47</a:t>
                       </a:r>
-                      <a:endParaRPr lang="en-US" sz="2800" dirty="0"/>
                     </a:p>
                   </a:txBody>
                   <a:tcPr marL="60000" marR="60000" marT="18000" marB="18000" anchor="ctr">
@@ -6540,7 +6436,6 @@
                         <a:rPr lang="en-US" sz="2800" dirty="0"/>
                         <a:t>0.51</a:t>
                       </a:r>
-                      <a:endParaRPr lang="en-US" sz="2800" dirty="0"/>
                     </a:p>
                   </a:txBody>
                   <a:tcPr marL="60000" marR="60000" marT="18000" marB="18000" anchor="ctr">
@@ -6559,197 +6454,13 @@
                     <a:noFill/>
                   </a:tcPr>
                 </a:tc>
+                <a:extLst>
+                  <a:ext uri="{0D108BD9-81ED-4DB2-BD59-A6C34878D82A}">
+                    <a16:rowId xmlns:a16="http://schemas.microsoft.com/office/drawing/2014/main" val="10007"/>
+                  </a:ext>
+                </a:extLst>
               </a:tr>
-              <a:tr h="548640">
-                <a:tc gridSpan="7">
-                  <a:txBody>
-                    <a:bodyPr/>
-                    <a:lstStyle/>
-                    <a:p>
-                      <a:pPr algn="l"/>
-                      <a:r>
-                        <a:rPr lang="en-US" sz="2800" b="1" dirty="0"/>
-                        <a:t>Exploratory TLR responder model (week-9 landmark, adjusted)†</a:t>
-                      </a:r>
-                      <a:endParaRPr lang="en-US" sz="2800" dirty="0"/>
-                    </a:p>
-                  </a:txBody>
-                  <a:tcPr marL="60000" marR="60000" marT="18000" marB="18000" anchor="ctr">
-                    <a:lnL>
-                      <a:noFill/>
-                    </a:lnL>
-                    <a:lnR>
-                      <a:noFill/>
-                    </a:lnR>
-                    <a:lnT>
-                      <a:noFill/>
-                    </a:lnT>
-                    <a:lnB>
-                      <a:noFill/>
-                    </a:lnB>
-                    <a:solidFill>
-                      <a:srgbClr val="EFEFEF"/>
-                    </a:solidFill>
-                  </a:tcPr>
-                </a:tc>
-                <a:tc hMerge="1">
-                  <a:txBody>
-                    <a:bodyPr/>
-                    <a:lstStyle/>
-                    <a:p>
-                      <a:endParaRPr lang="en-US" sz="2800" dirty="0"/>
-                    </a:p>
-                  </a:txBody>
-                  <a:tcPr marL="60000" marR="60000" marT="18000" marB="18000" anchor="ctr">
-                    <a:lnL>
-                      <a:noFill/>
-                    </a:lnL>
-                    <a:lnR>
-                      <a:noFill/>
-                    </a:lnR>
-                    <a:lnT>
-                      <a:noFill/>
-                    </a:lnT>
-                    <a:lnB>
-                      <a:noFill/>
-                    </a:lnB>
-                    <a:solidFill>
-                      <a:srgbClr val="EFEFEF"/>
-                    </a:solidFill>
-                  </a:tcPr>
-                </a:tc>
-                <a:tc hMerge="1">
-                  <a:txBody>
-                    <a:bodyPr/>
-                    <a:lstStyle/>
-                    <a:p>
-                      <a:endParaRPr lang="en-US" sz="2800" dirty="0"/>
-                    </a:p>
-                  </a:txBody>
-                  <a:tcPr marL="60000" marR="60000" marT="18000" marB="18000" anchor="ctr">
-                    <a:lnL>
-                      <a:noFill/>
-                    </a:lnL>
-                    <a:lnR>
-                      <a:noFill/>
-                    </a:lnR>
-                    <a:lnT>
-                      <a:noFill/>
-                    </a:lnT>
-                    <a:lnB>
-                      <a:noFill/>
-                    </a:lnB>
-                    <a:solidFill>
-                      <a:srgbClr val="EFEFEF"/>
-                    </a:solidFill>
-                  </a:tcPr>
-                </a:tc>
-                <a:tc hMerge="1">
-                  <a:txBody>
-                    <a:bodyPr/>
-                    <a:lstStyle/>
-                    <a:p>
-                      <a:endParaRPr lang="en-US" sz="2800" dirty="0"/>
-                    </a:p>
-                  </a:txBody>
-                  <a:tcPr marL="60000" marR="60000" marT="18000" marB="18000" anchor="ctr">
-                    <a:lnL>
-                      <a:noFill/>
-                    </a:lnL>
-                    <a:lnR>
-                      <a:noFill/>
-                    </a:lnR>
-                    <a:lnT>
-                      <a:noFill/>
-                    </a:lnT>
-                    <a:lnB>
-                      <a:noFill/>
-                    </a:lnB>
-                    <a:solidFill>
-                      <a:srgbClr val="EFEFEF"/>
-                    </a:solidFill>
-                  </a:tcPr>
-                </a:tc>
-                <a:tc hMerge="1">
-                  <a:txBody>
-                    <a:bodyPr/>
-                    <a:lstStyle/>
-                    <a:p>
-                      <a:endParaRPr lang="en-US" sz="2800" dirty="0"/>
-                    </a:p>
-                  </a:txBody>
-                  <a:tcPr marL="60000" marR="60000" marT="18000" marB="18000" anchor="ctr">
-                    <a:lnL>
-                      <a:noFill/>
-                    </a:lnL>
-                    <a:lnR>
-                      <a:noFill/>
-                    </a:lnR>
-                    <a:lnT>
-                      <a:noFill/>
-                    </a:lnT>
-                    <a:lnB>
-                      <a:noFill/>
-                    </a:lnB>
-                    <a:solidFill>
-                      <a:srgbClr val="EFEFEF"/>
-                    </a:solidFill>
-                  </a:tcPr>
-                </a:tc>
-                <a:tc hMerge="1">
-                  <a:txBody>
-                    <a:bodyPr/>
-                    <a:lstStyle/>
-                    <a:p>
-                      <a:endParaRPr lang="en-US" sz="2800" dirty="0"/>
-                    </a:p>
-                  </a:txBody>
-                  <a:tcPr marL="60000" marR="60000" marT="18000" marB="18000" anchor="ctr">
-                    <a:lnL>
-                      <a:noFill/>
-                    </a:lnL>
-                    <a:lnR>
-                      <a:noFill/>
-                    </a:lnR>
-                    <a:lnT>
-                      <a:noFill/>
-                    </a:lnT>
-                    <a:lnB>
-                      <a:noFill/>
-                    </a:lnB>
-                    <a:solidFill>
-                      <a:srgbClr val="EFEFEF"/>
-                    </a:solidFill>
-                  </a:tcPr>
-                </a:tc>
-                <a:tc hMerge="1">
-                  <a:txBody>
-                    <a:bodyPr/>
-                    <a:lstStyle/>
-                    <a:p>
-                      <a:endParaRPr lang="en-US" sz="2800" dirty="0"/>
-                    </a:p>
-                  </a:txBody>
-                  <a:tcPr marL="60000" marR="60000" marT="18000" marB="18000" anchor="ctr">
-                    <a:lnL>
-                      <a:noFill/>
-                    </a:lnL>
-                    <a:lnR>
-                      <a:noFill/>
-                    </a:lnR>
-                    <a:lnT>
-                      <a:noFill/>
-                    </a:lnT>
-                    <a:lnB>
-                      <a:noFill/>
-                    </a:lnB>
-                    <a:solidFill>
-                      <a:srgbClr val="EFEFEF"/>
-                    </a:solidFill>
-                  </a:tcPr>
-                </a:tc>
-              </a:tr>
-              <a:tr h="548640">
+              <a:tr h="530352">
                 <a:tc>
                   <a:txBody>
                     <a:bodyPr/>
@@ -6760,7 +6471,38 @@
                         <a:rPr lang="en-US" sz="2800" dirty="0"/>
                         <a:t>TLR × treatment</a:t>
                       </a:r>
-                      <a:endParaRPr lang="en-US" sz="2800" dirty="0"/>
+                    </a:p>
+                  </a:txBody>
+                  <a:tcPr marL="60000" marR="60000" marT="18000" marB="18000" anchor="ctr">
+                    <a:lnL>
+                      <a:noFill/>
+                    </a:lnL>
+                    <a:lnR>
+                      <a:noFill/>
+                    </a:lnR>
+                    <a:lnT>
+                      <a:noFill/>
+                    </a:lnT>
+                    <a:lnB w="19050" cap="flat" cmpd="sng" algn="ctr">
+                      <a:solidFill>
+                        <a:srgbClr val="000000"/>
+                      </a:solidFill>
+                      <a:prstDash val="solid"/>
+                      <a:round/>
+                    </a:lnB>
+                    <a:noFill/>
+                  </a:tcPr>
+                </a:tc>
+                <a:tc>
+                  <a:txBody>
+                    <a:bodyPr/>
+                    <a:lstStyle/>
+                    <a:p>
+                      <a:pPr algn="l"/>
+                      <a:r>
+                        <a:rPr lang="en-US" sz="2800" dirty="0"/>
+                        <a:t>Landmark responder model†</a:t>
+                      </a:r>
                     </a:p>
                   </a:txBody>
                   <a:tcPr marL="60000" marR="60000" marT="18000" marB="18000" anchor="ctr">
@@ -6793,7 +6535,6 @@
                         <a:rPr lang="en-US" sz="2800" dirty="0"/>
                         <a:t>2.47 (0.75–7.75)</a:t>
                       </a:r>
-                      <a:endParaRPr lang="en-US" sz="2800" dirty="0"/>
                     </a:p>
                   </a:txBody>
                   <a:tcPr marL="60000" marR="60000" marT="18000" marB="18000" anchor="ctr">
@@ -6826,7 +6567,6 @@
                         <a:rPr lang="en-US" sz="2800" dirty="0"/>
                         <a:t>0.14</a:t>
                       </a:r>
-                      <a:endParaRPr lang="en-US" sz="2800" dirty="0"/>
                     </a:p>
                   </a:txBody>
                   <a:tcPr marL="60000" marR="60000" marT="18000" marB="18000" anchor="ctr">
@@ -6859,7 +6599,6 @@
                         <a:rPr lang="en-US" sz="2800" dirty="0"/>
                         <a:t>–</a:t>
                       </a:r>
-                      <a:endParaRPr lang="en-US" sz="2800" dirty="0"/>
                     </a:p>
                   </a:txBody>
                   <a:tcPr marL="60000" marR="60000" marT="18000" marB="18000" anchor="ctr">
@@ -6892,7 +6631,6 @@
                         <a:rPr lang="en-US" sz="2800" dirty="0"/>
                         <a:t>1.88 (0.52–6.38)</a:t>
                       </a:r>
-                      <a:endParaRPr lang="en-US" sz="2800" dirty="0"/>
                     </a:p>
                   </a:txBody>
                   <a:tcPr marL="60000" marR="60000" marT="18000" marB="18000" anchor="ctr">
@@ -6925,7 +6663,6 @@
                         <a:rPr lang="en-US" sz="2800" dirty="0"/>
                         <a:t>0.33</a:t>
                       </a:r>
-                      <a:endParaRPr lang="en-US" sz="2800" dirty="0"/>
                     </a:p>
                   </a:txBody>
                   <a:tcPr marL="60000" marR="60000" marT="18000" marB="18000" anchor="ctr">
@@ -6958,7 +6695,6 @@
                         <a:rPr lang="en-US" sz="2800" dirty="0"/>
                         <a:t>–</a:t>
                       </a:r>
-                      <a:endParaRPr lang="en-US" sz="2800" dirty="0"/>
                     </a:p>
                   </a:txBody>
                   <a:tcPr marL="60000" marR="60000" marT="18000" marB="18000" anchor="ctr">
@@ -6981,6 +6717,11 @@
                     <a:noFill/>
                   </a:tcPr>
                 </a:tc>
+                <a:extLst>
+                  <a:ext uri="{0D108BD9-81ED-4DB2-BD59-A6C34878D82A}">
+                    <a16:rowId xmlns:a16="http://schemas.microsoft.com/office/drawing/2014/main" val="10008"/>
+                  </a:ext>
+                </a:extLst>
               </a:tr>
             </a:tbl>
           </a:graphicData>
@@ -6994,8 +6735,8 @@
         </p:nvSpPr>
         <p:spPr>
           <a:xfrm>
-            <a:off x="30056328" y="13103352"/>
-            <a:ext cx="20775168" cy="1874520"/>
+            <a:off x="12929616" y="25333452"/>
+            <a:ext cx="25594056" cy="1046988"/>
           </a:xfrm>
           <a:prstGeom prst="roundRect">
             <a:avLst/>
@@ -7026,106 +6767,93 @@
           </a:fontRef>
         </p:style>
         <p:txBody>
-          <a:bodyPr lIns="109728" rIns="109728" rtlCol="0" anchor="ctr">
+          <a:bodyPr lIns="109728" tIns="36576" rIns="109728" bIns="36576" rtlCol="0" anchor="ctr">
             <a:noAutofit/>
           </a:bodyPr>
           <a:lstStyle/>
           <a:p>
             <a:r>
-              <a:rPr lang="en-US" sz="2400" b="1" dirty="0"/>
-              <a:t xml:space="preserve">Unified model: </a:t>
-            </a:r>
-            <a:r>
-              <a:rPr lang="en-US" sz="2400" dirty="0"/>
+              <a:rPr lang="en-US" sz="2200" dirty="0"/>
+              <a:t>n = 68; p = penalized likelihood-ratio test. </a:t>
+            </a:r>
+            <a:r>
+              <a:rPr lang="en-US" sz="2200" b="1" dirty="0"/>
+              <a:t>Unified model: </a:t>
+            </a:r>
+            <a:r>
+              <a:rPr lang="en-US" sz="2200" dirty="0"/>
               <a:t>age + sex + treatment + CRP + TMB/</a:t>
             </a:r>
             <a:r>
-              <a:rPr lang="en-US" sz="2400" i="1" dirty="0"/>
+              <a:rPr lang="en-US" sz="2200" i="1" dirty="0"/>
               <a:t>BRAF</a:t>
             </a:r>
             <a:r>
-              <a:rPr lang="en-US" sz="2400" dirty="0"/>
-              <a:t xml:space="preserve"> + CRP × treatment + TMB/</a:t>
-            </a:r>
-            <a:r>
-              <a:rPr lang="en-US" sz="2400" i="1" dirty="0"/>
+              <a:rPr lang="en-US" sz="2200" dirty="0"/>
+              <a:t> + both treatment × biomarker interactions. </a:t>
+            </a:r>
+            <a:r>
+              <a:rPr lang="en-US" sz="2200" b="1" dirty="0"/>
+              <a:t>Ridge: </a:t>
+            </a:r>
+            <a:r>
+              <a:rPr lang="en-US" sz="2200" dirty="0"/>
+              <a:t>L2-penalized Cox, point estimates. </a:t>
+            </a:r>
+            <a:r>
+              <a:rPr lang="en-US" sz="2200" b="1" dirty="0"/>
+              <a:t>†</a:t>
+            </a:r>
+            <a:r>
+              <a:rPr lang="en-US" sz="2200" dirty="0"/>
+              <a:t>Week-9 landmark, TLR-classified patients (n = 65 OS, 60 PFS); the responder model adjusts for age, sex, CRP and TMB/</a:t>
+            </a:r>
+            <a:r>
+              <a:rPr lang="en-US" sz="2200" i="1" dirty="0"/>
               <a:t>BRAF</a:t>
             </a:r>
             <a:r>
-              <a:rPr lang="en-US" sz="2400" dirty="0"/>
-              <a:t xml:space="preserve"> × treatment; p = penalized likelihood-ratio test. </a:t>
-            </a:r>
-            <a:r>
-              <a:rPr lang="en-US" sz="2400" b="1" dirty="0"/>
-              <a:t xml:space="preserve">Ridge: </a:t>
-            </a:r>
-            <a:r>
-              <a:rPr lang="en-US" sz="2400" dirty="0"/>
-              <a:t xml:space="preserve">L2-penalized Cox regression (biomarker main effects penalized, 10-fold cross-validated lambda), point estimates only. </a:t>
-            </a:r>
-            <a:r>
-              <a:rPr lang="en-US" sz="2400" b="1" dirty="0"/>
-              <a:t>†</a:t>
-            </a:r>
-            <a:r>
-              <a:rPr lang="en-US" sz="2400" dirty="0"/>
-              <a:t>TLR-classified patients (n = 65); time measured from the week-9 landmark (OS cohort n = 65, PFS cohort n = 60). The responder model is adjusted for age, sex, CRP and TMB/</a:t>
-            </a:r>
-            <a:r>
-              <a:rPr lang="en-US" sz="2400" i="1" dirty="0"/>
-              <a:t>BRAF</a:t>
-            </a:r>
-            <a:r>
-              <a:rPr lang="en-US" sz="2400" dirty="0"/>
-              <a:t xml:space="preserve">; because TLR is measured after randomization, its interaction is a responder-stratified contrast, not a treatment-selection estimate. </a:t>
-            </a:r>
-            <a:r>
-              <a:rPr lang="en-US" sz="2400" b="1" dirty="0"/>
+              <a:rPr lang="en-US" sz="2200" dirty="0"/>
+              <a:t>; TLR is measured on treatment, so this is not a treatment-selection estimate. </a:t>
+            </a:r>
+            <a:r>
+              <a:rPr lang="en-US" sz="2200" b="1" dirty="0"/>
               <a:t>CI</a:t>
             </a:r>
             <a:r>
-              <a:rPr lang="en-US" sz="2400" dirty="0"/>
-              <a:t xml:space="preserve">, confidence interval; </a:t>
-            </a:r>
-            <a:r>
-              <a:rPr lang="en-US" sz="2400" b="1" dirty="0"/>
-              <a:t>CRP</a:t>
-            </a:r>
-            <a:r>
-              <a:rPr lang="en-US" sz="2400" dirty="0"/>
-              <a:t xml:space="preserve">, C-reactive protein; </a:t>
-            </a:r>
-            <a:r>
-              <a:rPr lang="en-US" sz="2400" b="1" dirty="0"/>
+              <a:rPr lang="en-US" sz="2200" dirty="0"/>
+              <a:t>, confidence interval; </a:t>
+            </a:r>
+            <a:r>
+              <a:rPr lang="en-US" sz="2200" b="1" dirty="0"/>
               <a:t>HR</a:t>
             </a:r>
             <a:r>
-              <a:rPr lang="en-US" sz="2400" dirty="0"/>
-              <a:t xml:space="preserve">, hazard ratio; </a:t>
-            </a:r>
-            <a:r>
-              <a:rPr lang="en-US" sz="2400" b="1" dirty="0"/>
+              <a:rPr lang="en-US" sz="2200" dirty="0"/>
+              <a:t>, hazard ratio; </a:t>
+            </a:r>
+            <a:r>
+              <a:rPr lang="en-US" sz="2200" b="1" dirty="0"/>
               <a:t>TLR</a:t>
             </a:r>
             <a:r>
-              <a:rPr lang="en-US" sz="2400" dirty="0"/>
-              <a:t xml:space="preserve">, tumor lesion reduction; </a:t>
-            </a:r>
-            <a:r>
-              <a:rPr lang="en-US" sz="2400" b="1" dirty="0"/>
+              <a:rPr lang="en-US" sz="2200" dirty="0"/>
+              <a:t>, tumor lesion reduction; </a:t>
+            </a:r>
+            <a:r>
+              <a:rPr lang="en-US" sz="2200" b="1" dirty="0"/>
               <a:t>TMB</a:t>
             </a:r>
             <a:r>
-              <a:rPr lang="en-US" sz="2400" dirty="0"/>
+              <a:rPr lang="en-US" sz="2200" dirty="0"/>
               <a:t>, tumor mutational burden.</a:t>
             </a:r>
-            <a:endParaRPr lang="en-US" sz="2400" dirty="0"/>
           </a:p>
         </p:txBody>
       </p:sp>
       <p:pic>
         <p:nvPicPr>
-          <p:cNvPr id="115" name="Figure 2 Kaplan-Meier" descr="Kaplan-Meier curves by biomarker status and treatment arm"/>
+          <p:cNvPr id="115" name="Figure 3 forest plot" descr="Forest plot of treatment by biomarker interaction hazard ratios"/>
           <p:cNvPicPr>
             <a:picLocks noChangeAspect="1"/>
           </p:cNvPicPr>
@@ -7139,8 +6867,8 @@
         </p:blipFill>
         <p:spPr>
           <a:xfrm>
-            <a:off x="30511496" y="15206472"/>
-            <a:ext cx="19864832" cy="11173968"/>
+            <a:off x="38889432" y="19883628"/>
+            <a:ext cx="11978640" cy="6400800"/>
           </a:xfrm>
           <a:prstGeom prst="rect">
             <a:avLst/>
@@ -7240,7 +6968,14 @@
             <a:pPr algn="ctr"/>
             <a:r>
               <a:rPr lang="en-US" sz="4400" b="1" dirty="0"/>
-              <a:t>In this causally structured exploratory analysis, biomarker signals in MSS/pMMR mCRC were predominantly prognostic rather than predictive. The CRP × treatment interaction for PFS warrants evaluation in adequately powered prospective studies. The causal framework offers a template for transparent post hoc biomarker analysis of phase-2 trials.</a:t>
+              <a:t>In this exploratory analysis, biomarker signals in MSS/pMMR mCRC were predominantly prognostic rather than predictive. </a:t>
+            </a:r>
+          </a:p>
+          <a:p>
+            <a:pPr algn="ctr"/>
+            <a:r>
+              <a:rPr lang="en-US" sz="4400" b="1" dirty="0"/>
+              <a:t>The CRP × treatment interaction for PFS is hypothesis-generating, and evaluation in adequately powered prospective studies could be considered.</a:t>
             </a:r>
           </a:p>
         </p:txBody>
@@ -7254,7 +6989,7 @@
           <p:nvPr/>
         </p:nvPicPr>
         <p:blipFill>
-          <a:blip r:embed="rId4"/>
+          <a:blip r:embed="rId6"/>
           <a:srcRect b="50329"/>
           <a:stretch>
             <a:fillRect/>
@@ -7294,15 +7029,15 @@
           <a:p>
             <a:r>
               <a:rPr lang="en-US" sz="2400" b="1" dirty="0"/>
-              <a:t xml:space="preserve">Disclosure: </a:t>
+              <a:t>Disclosure: </a:t>
             </a:r>
             <a:r>
               <a:rPr lang="en-US" sz="2400" dirty="0"/>
-              <a:t xml:space="preserve">B.P. Geisler has no potential conflicts of interest to declare. </a:t>
+              <a:t>B.P. Geisler has no potential conflicts of interest to declare. </a:t>
             </a:r>
             <a:r>
               <a:rPr lang="en-US" sz="2400" b="1" dirty="0"/>
-              <a:t xml:space="preserve">Funding: </a:t>
+              <a:t>Funding: </a:t>
             </a:r>
             <a:r>
               <a:rPr lang="en-US" sz="2400" dirty="0"/>
@@ -7335,7 +7070,7 @@
           <a:p>
             <a:r>
               <a:rPr lang="en-US" sz="4400" b="1" baseline="30000" dirty="0"/>
-              <a:t xml:space="preserve">@ </a:t>
+              <a:t>@ </a:t>
             </a:r>
             <a:r>
               <a:rPr lang="en-US" sz="4400" b="1" dirty="0"/>
@@ -7353,7 +7088,7 @@
           <p:nvPr/>
         </p:nvPicPr>
         <p:blipFill>
-          <a:blip r:embed="rId3"/>
+          <a:blip r:embed="rId7"/>
           <a:stretch>
             <a:fillRect/>
           </a:stretch>

--- a/outputs/vignettes/poster_ESMO.pptx
+++ b/outputs/vignettes/poster_ESMO.pptx
@@ -110,12 +110,12 @@
   <p:extLst>
     <p:ext uri="{EFAFB233-063F-42B5-8137-9DF3F51BA10A}">
       <p15:sldGuideLst xmlns:p15="http://schemas.microsoft.com/office/powerpoint/2012/main">
-        <p15:guide id="2" pos="16101" userDrawn="1">
+        <p15:guide id="2" pos="206" userDrawn="1">
           <p15:clr>
             <a:srgbClr val="A4A3A4"/>
           </p15:clr>
         </p15:guide>
-        <p15:guide id="3" orient="horz" pos="19255" userDrawn="1">
+        <p15:guide id="3" orient="horz" pos="12322" userDrawn="1">
           <p15:clr>
             <a:srgbClr val="A4A3A4"/>
           </p15:clr>
@@ -208,7 +208,7 @@
           <a:p>
             <a:fld id="{89CEAEC2-C692-4B46-978F-109B22A150D2}" type="datetimeFigureOut">
               <a:rPr lang="en-US" smtClean="0"/>
-              <a:t>9/22/2026</a:t>
+              <a:t>9/23/2026</a:t>
             </a:fld>
             <a:endParaRPr lang="en-US" dirty="0"/>
           </a:p>
@@ -703,7 +703,7 @@
           <a:p>
             <a:fld id="{EDF32165-6009-0A44-BE1F-48670E89FB19}" type="datetimeFigureOut">
               <a:rPr lang="en-US" smtClean="0"/>
-              <a:t>9/22/2026</a:t>
+              <a:t>9/23/2026</a:t>
             </a:fld>
             <a:endParaRPr lang="en-US" dirty="0"/>
           </a:p>
@@ -873,7 +873,7 @@
           <a:p>
             <a:fld id="{EDF32165-6009-0A44-BE1F-48670E89FB19}" type="datetimeFigureOut">
               <a:rPr lang="en-US" smtClean="0"/>
-              <a:t>9/22/2026</a:t>
+              <a:t>9/23/2026</a:t>
             </a:fld>
             <a:endParaRPr lang="en-US" dirty="0"/>
           </a:p>
@@ -1053,7 +1053,7 @@
           <a:p>
             <a:fld id="{EDF32165-6009-0A44-BE1F-48670E89FB19}" type="datetimeFigureOut">
               <a:rPr lang="en-US" smtClean="0"/>
-              <a:t>9/22/2026</a:t>
+              <a:t>9/23/2026</a:t>
             </a:fld>
             <a:endParaRPr lang="en-US" dirty="0"/>
           </a:p>
@@ -1223,7 +1223,7 @@
           <a:p>
             <a:fld id="{EDF32165-6009-0A44-BE1F-48670E89FB19}" type="datetimeFigureOut">
               <a:rPr lang="en-US" smtClean="0"/>
-              <a:t>9/22/2026</a:t>
+              <a:t>9/23/2026</a:t>
             </a:fld>
             <a:endParaRPr lang="en-US" dirty="0"/>
           </a:p>
@@ -1469,7 +1469,7 @@
           <a:p>
             <a:fld id="{EDF32165-6009-0A44-BE1F-48670E89FB19}" type="datetimeFigureOut">
               <a:rPr lang="en-US" smtClean="0"/>
-              <a:t>9/22/2026</a:t>
+              <a:t>9/23/2026</a:t>
             </a:fld>
             <a:endParaRPr lang="en-US" dirty="0"/>
           </a:p>
@@ -1701,7 +1701,7 @@
           <a:p>
             <a:fld id="{EDF32165-6009-0A44-BE1F-48670E89FB19}" type="datetimeFigureOut">
               <a:rPr lang="en-US" smtClean="0"/>
-              <a:t>9/22/2026</a:t>
+              <a:t>9/23/2026</a:t>
             </a:fld>
             <a:endParaRPr lang="en-US" dirty="0"/>
           </a:p>
@@ -2068,7 +2068,7 @@
           <a:p>
             <a:fld id="{EDF32165-6009-0A44-BE1F-48670E89FB19}" type="datetimeFigureOut">
               <a:rPr lang="en-US" smtClean="0"/>
-              <a:t>9/22/2026</a:t>
+              <a:t>9/23/2026</a:t>
             </a:fld>
             <a:endParaRPr lang="en-US" dirty="0"/>
           </a:p>
@@ -2186,7 +2186,7 @@
           <a:p>
             <a:fld id="{EDF32165-6009-0A44-BE1F-48670E89FB19}" type="datetimeFigureOut">
               <a:rPr lang="en-US" smtClean="0"/>
-              <a:t>9/22/2026</a:t>
+              <a:t>9/23/2026</a:t>
             </a:fld>
             <a:endParaRPr lang="en-US" dirty="0"/>
           </a:p>
@@ -2281,7 +2281,7 @@
           <a:p>
             <a:fld id="{EDF32165-6009-0A44-BE1F-48670E89FB19}" type="datetimeFigureOut">
               <a:rPr lang="en-US" smtClean="0"/>
-              <a:t>9/22/2026</a:t>
+              <a:t>9/23/2026</a:t>
             </a:fld>
             <a:endParaRPr lang="en-US" dirty="0"/>
           </a:p>
@@ -2558,7 +2558,7 @@
           <a:p>
             <a:fld id="{EDF32165-6009-0A44-BE1F-48670E89FB19}" type="datetimeFigureOut">
               <a:rPr lang="en-US" smtClean="0"/>
-              <a:t>9/22/2026</a:t>
+              <a:t>9/23/2026</a:t>
             </a:fld>
             <a:endParaRPr lang="en-US" dirty="0"/>
           </a:p>
@@ -2814,7 +2814,7 @@
           <a:p>
             <a:fld id="{EDF32165-6009-0A44-BE1F-48670E89FB19}" type="datetimeFigureOut">
               <a:rPr lang="en-US" smtClean="0"/>
-              <a:t>9/22/2026</a:t>
+              <a:t>9/23/2026</a:t>
             </a:fld>
             <a:endParaRPr lang="en-US" dirty="0"/>
           </a:p>
@@ -3027,7 +3027,7 @@
           <a:p>
             <a:fld id="{EDF32165-6009-0A44-BE1F-48670E89FB19}" type="datetimeFigureOut">
               <a:rPr lang="en-US" smtClean="0"/>
-              <a:t>9/22/2026</a:t>
+              <a:t>9/23/2026</a:t>
             </a:fld>
             <a:endParaRPr lang="en-US" dirty="0"/>
           </a:p>
@@ -3432,6 +3432,30 @@
           <a:chExt cx="0" cy="0"/>
         </a:xfrm>
       </p:grpSpPr>
+      <p:pic>
+        <p:nvPicPr>
+          <p:cNvPr id="108" name="Figure 1 DAG" descr="Directed acyclic graph of the assumed relationships between treatment, CRP, TMB/BRAF, age/sex and survival"/>
+          <p:cNvPicPr>
+            <a:picLocks noChangeAspect="1"/>
+          </p:cNvPicPr>
+          <p:nvPr/>
+        </p:nvPicPr>
+        <p:blipFill>
+          <a:blip r:embed="rId3"/>
+          <a:stretch>
+            <a:fillRect/>
+          </a:stretch>
+        </p:blipFill>
+        <p:spPr>
+          <a:xfrm>
+            <a:off x="2468880" y="19740592"/>
+            <a:ext cx="7863840" cy="5392347"/>
+          </a:xfrm>
+          <a:prstGeom prst="rect">
+            <a:avLst/>
+          </a:prstGeom>
+        </p:spPr>
+      </p:pic>
       <p:sp>
         <p:nvSpPr>
           <p:cNvPr id="101" name="Title box"/>
@@ -3731,7 +3755,7 @@
         </p:nvSpPr>
         <p:spPr>
           <a:xfrm>
-            <a:off x="283464" y="4471416"/>
+            <a:off x="316121" y="4471416"/>
             <a:ext cx="12188952" cy="987552"/>
           </a:xfrm>
           <a:prstGeom prst="roundRect">
@@ -3821,8 +3845,8 @@
         </p:nvSpPr>
         <p:spPr>
           <a:xfrm>
-            <a:off x="365760" y="5751576"/>
-            <a:ext cx="12106656" cy="4572000"/>
+            <a:off x="365760" y="5751575"/>
+            <a:ext cx="12106656" cy="4579441"/>
           </a:xfrm>
           <a:prstGeom prst="roundRect">
             <a:avLst/>
@@ -3880,7 +3904,7 @@
             </a:pPr>
             <a:r>
               <a:rPr lang="en-US" sz="3200" dirty="0"/>
-              <a:t>METIMMOX (randomized phase 2; NCT03388190, EudraCT 2017-001845-29): alternating FLOX + nivolumab vs FLOX alone; identical progression-free survival (PFS).</a:t>
+              <a:t>METIMMOX (randomized phase 2; NCT03388190): alternating oxaliplatin-based chemotherapy (FLOX) + nivolumab vs FLOX alone; identical PFS.</a:t>
             </a:r>
           </a:p>
           <a:p>
@@ -3914,7 +3938,7 @@
         </p:nvSpPr>
         <p:spPr>
           <a:xfrm>
-            <a:off x="283464" y="10597896"/>
+            <a:off x="316121" y="10716372"/>
             <a:ext cx="12188952" cy="978408"/>
           </a:xfrm>
           <a:prstGeom prst="roundRect">
@@ -3959,8 +3983,8 @@
         </p:nvSpPr>
         <p:spPr>
           <a:xfrm>
-            <a:off x="329184" y="11832336"/>
-            <a:ext cx="12143232" cy="14548104"/>
+            <a:off x="329184" y="11964666"/>
+            <a:ext cx="12143232" cy="14089203"/>
           </a:xfrm>
           <a:prstGeom prst="roundRect">
             <a:avLst/>
@@ -4052,7 +4076,7 @@
             </a:pPr>
             <a:r>
               <a:rPr lang="en-US" sz="3600" dirty="0"/>
-              <a:t>Per endpoint (PFS, overall survival [OS]): one Firth-corrected Cox model with age, sex, treatment, biomarker main effects and treatment × biomarker interactions (</a:t>
+              <a:t>Per endpoint (PFS, OS): one Firth-corrected Cox model with age, sex, treatment, biomarker main effects and treatment × biomarker interactions (</a:t>
             </a:r>
             <a:r>
               <a:rPr lang="en-US" sz="3600" b="1" dirty="0"/>
@@ -4060,7 +4084,7 @@
             </a:r>
             <a:r>
               <a:rPr lang="en-US" sz="3600" dirty="0"/>
-              <a:t>); profile-likelihood 95% CIs, penalized likelihood-ratio tests (PLRT).</a:t>
+              <a:t>); profile-likelihood 95% CIs, PLRT.</a:t>
             </a:r>
           </a:p>
           <a:p>
@@ -4078,30 +4102,6 @@
           </a:p>
         </p:txBody>
       </p:sp>
-      <p:pic>
-        <p:nvPicPr>
-          <p:cNvPr id="108" name="Figure 1 DAG" descr="Directed acyclic graph of the assumed relationships between treatment, CRP, TMB/BRAF, age/sex and survival"/>
-          <p:cNvPicPr>
-            <a:picLocks noChangeAspect="1"/>
-          </p:cNvPicPr>
-          <p:nvPr/>
-        </p:nvPicPr>
-        <p:blipFill>
-          <a:blip r:embed="rId3"/>
-          <a:stretch>
-            <a:fillRect/>
-          </a:stretch>
-        </p:blipFill>
-        <p:spPr>
-          <a:xfrm>
-            <a:off x="2468880" y="20165133"/>
-            <a:ext cx="7863840" cy="5392347"/>
-          </a:xfrm>
-          <a:prstGeom prst="rect">
-            <a:avLst/>
-          </a:prstGeom>
-        </p:spPr>
-      </p:pic>
       <p:sp>
         <p:nvSpPr>
           <p:cNvPr id="109" name="Figure 1 caption"/>
@@ -4110,7 +4110,7 @@
         </p:nvSpPr>
         <p:spPr>
           <a:xfrm>
-            <a:off x="822960" y="25557480"/>
+            <a:off x="822960" y="25132939"/>
             <a:ext cx="11155680" cy="777240"/>
           </a:xfrm>
           <a:prstGeom prst="rect">
@@ -4401,7 +4401,7 @@
           <p:nvPr>
             <p:extLst>
               <p:ext uri="{D42A27DB-BD31-4B8C-83A1-F6EECF244321}">
-                <p14:modId xmlns:p14="http://schemas.microsoft.com/office/powerpoint/2010/main" val="580684924"/>
+                <p14:modId xmlns:p14="http://schemas.microsoft.com/office/powerpoint/2010/main" val="485809887"/>
               </p:ext>
             </p:extLst>
           </p:nvPr>
@@ -6773,80 +6773,51 @@
           <a:lstStyle/>
           <a:p>
             <a:r>
-              <a:rPr lang="en-US" sz="2200" dirty="0"/>
-              <a:t>n = 68; p = penalized likelihood-ratio test. </a:t>
-            </a:r>
-            <a:r>
-              <a:rPr lang="en-US" sz="2200" b="1" dirty="0"/>
+              <a:rPr lang="en-US" sz="2400" dirty="0"/>
+              <a:t>n = 68; p = PLRT. </a:t>
+            </a:r>
+            <a:r>
+              <a:rPr lang="en-US" sz="2400" b="1" dirty="0"/>
               <a:t>Unified model: </a:t>
             </a:r>
             <a:r>
-              <a:rPr lang="en-US" sz="2200" dirty="0"/>
+              <a:rPr lang="en-US" sz="2400" dirty="0"/>
               <a:t>age + sex + treatment + CRP + TMB/</a:t>
             </a:r>
             <a:r>
-              <a:rPr lang="en-US" sz="2200" i="1" dirty="0"/>
+              <a:rPr lang="en-US" sz="2400" i="1" dirty="0"/>
               <a:t>BRAF</a:t>
             </a:r>
             <a:r>
-              <a:rPr lang="en-US" sz="2200" dirty="0"/>
+              <a:rPr lang="en-US" sz="2400" dirty="0"/>
               <a:t> + both treatment × biomarker interactions. </a:t>
             </a:r>
             <a:r>
-              <a:rPr lang="en-US" sz="2200" b="1" dirty="0"/>
+              <a:rPr lang="en-US" sz="2400" b="1" dirty="0"/>
               <a:t>Ridge: </a:t>
             </a:r>
             <a:r>
-              <a:rPr lang="en-US" sz="2200" dirty="0"/>
+              <a:rPr lang="en-US" sz="2400" dirty="0"/>
               <a:t>L2-penalized Cox, point estimates. </a:t>
             </a:r>
-            <a:r>
-              <a:rPr lang="en-US" sz="2200" b="1" dirty="0"/>
+            <a:br>
+              <a:rPr lang="en-US" sz="2400" dirty="0"/>
+            </a:br>
+            <a:r>
+              <a:rPr lang="en-US" sz="2400" b="1" dirty="0"/>
               <a:t>†</a:t>
             </a:r>
             <a:r>
-              <a:rPr lang="en-US" sz="2200" dirty="0"/>
+              <a:rPr lang="en-US" sz="2400" dirty="0"/>
               <a:t>Week-9 landmark, TLR-classified patients (n = 65 OS, 60 PFS); the responder model adjusts for age, sex, CRP and TMB/</a:t>
             </a:r>
             <a:r>
-              <a:rPr lang="en-US" sz="2200" i="1" dirty="0"/>
+              <a:rPr lang="en-US" sz="2400" i="1" dirty="0"/>
               <a:t>BRAF</a:t>
             </a:r>
             <a:r>
-              <a:rPr lang="en-US" sz="2200" dirty="0"/>
-              <a:t>; TLR is measured on treatment, so this is not a treatment-selection estimate. </a:t>
-            </a:r>
-            <a:r>
-              <a:rPr lang="en-US" sz="2200" b="1" dirty="0"/>
-              <a:t>CI</a:t>
-            </a:r>
-            <a:r>
-              <a:rPr lang="en-US" sz="2200" dirty="0"/>
-              <a:t>, confidence interval; </a:t>
-            </a:r>
-            <a:r>
-              <a:rPr lang="en-US" sz="2200" b="1" dirty="0"/>
-              <a:t>HR</a:t>
-            </a:r>
-            <a:r>
-              <a:rPr lang="en-US" sz="2200" dirty="0"/>
-              <a:t>, hazard ratio; </a:t>
-            </a:r>
-            <a:r>
-              <a:rPr lang="en-US" sz="2200" b="1" dirty="0"/>
-              <a:t>TLR</a:t>
-            </a:r>
-            <a:r>
-              <a:rPr lang="en-US" sz="2200" dirty="0"/>
-              <a:t>, tumor lesion reduction; </a:t>
-            </a:r>
-            <a:r>
-              <a:rPr lang="en-US" sz="2200" b="1" dirty="0"/>
-              <a:t>TMB</a:t>
-            </a:r>
-            <a:r>
-              <a:rPr lang="en-US" sz="2200" dirty="0"/>
-              <a:t>, tumor mutational burden.</a:t>
+              <a:rPr lang="en-US" sz="2400" dirty="0"/>
+              <a:t>; TLR is measured on treatment, so this is not a treatment-selection estimate.</a:t>
             </a:r>
           </a:p>
         </p:txBody>
@@ -6883,8 +6854,8 @@
         </p:nvSpPr>
         <p:spPr>
           <a:xfrm>
-            <a:off x="365760" y="26654760"/>
-            <a:ext cx="50502312" cy="868680"/>
+            <a:off x="12931775" y="26654760"/>
+            <a:ext cx="37936297" cy="1046989"/>
           </a:xfrm>
           <a:prstGeom prst="roundRect">
             <a:avLst/>
@@ -6907,7 +6878,7 @@
           <a:p>
             <a:pPr algn="ctr"/>
             <a:r>
-              <a:rPr lang="en-US" sz="5400" b="1" dirty="0">
+              <a:rPr lang="en-US" sz="6600" b="1" dirty="0">
                 <a:solidFill>
                   <a:prstClr val="white"/>
                 </a:solidFill>
@@ -6928,8 +6899,8 @@
         </p:nvSpPr>
         <p:spPr>
           <a:xfrm>
-            <a:off x="365760" y="27706320"/>
-            <a:ext cx="50502312" cy="2011680"/>
+            <a:off x="12931776" y="27961047"/>
+            <a:ext cx="37936296" cy="1744676"/>
           </a:xfrm>
           <a:prstGeom prst="roundRect">
             <a:avLst/>
@@ -7041,7 +7012,7 @@
             </a:r>
             <a:r>
               <a:rPr lang="en-US" sz="2400" dirty="0"/>
-              <a:t>Study sponsored by European Union, Research Council of Norway, Norwegian Cancer Society, South-Eastern Regional Health Authority, and Bristol-Myers Squibb and Sigma2 AS (in-kind donations). Views and opinions expressed are, however, those of the authors only and do not necessarily reflect those of the European Union or the European Health and Digital Executive Agency (HaDEA).</a:t>
+              <a:t>Study sponsored by Horizon Europe (101094938; ASCERTAIN project, www.access2meds.eu), Research Council of Norway (296114), Norwegian Cancer Society (215613 and 245151), South-Eastern Regional Health Authority (2018054), and Bristol-Myers Squibb and Sigma2 AS (in-kind donations). Views and opinions expressed are, however, those of the authors only and do not necessarily reflect those of the European Union or the European Health and Digital Executive Agency (HaDEA).</a:t>
             </a:r>
           </a:p>
         </p:txBody>
@@ -7103,6 +7074,170 @@
           </a:prstGeom>
         </p:spPr>
       </p:pic>
+      <p:sp>
+        <p:nvSpPr>
+          <p:cNvPr id="3" name="Methods header">
+            <a:extLst>
+              <a:ext uri="{FF2B5EF4-FFF2-40B4-BE49-F238E27FC236}">
+                <a16:creationId xmlns:a16="http://schemas.microsoft.com/office/drawing/2014/main" id="{5A6E1F6F-0F4A-7E1A-3A27-3D274F09E741}"/>
+              </a:ext>
+            </a:extLst>
+          </p:cNvPr>
+          <p:cNvSpPr/>
+          <p:nvPr/>
+        </p:nvSpPr>
+        <p:spPr>
+          <a:xfrm>
+            <a:off x="365760" y="26692641"/>
+            <a:ext cx="12139313" cy="1047516"/>
+          </a:xfrm>
+          <a:prstGeom prst="roundRect">
+            <a:avLst/>
+          </a:prstGeom>
+          <a:solidFill>
+            <a:srgbClr val="0093C8"/>
+          </a:solidFill>
+          <a:ln w="12700" cap="flat" cmpd="sng" algn="ctr">
+            <a:solidFill>
+              <a:srgbClr val="0093C8"/>
+            </a:solidFill>
+            <a:prstDash val="solid"/>
+            <a:miter lim="800000"/>
+          </a:ln>
+          <a:effectLst/>
+        </p:spPr>
+        <p:txBody>
+          <a:bodyPr rtlCol="0" anchor="ctr"/>
+          <a:lstStyle/>
+          <a:p>
+            <a:pPr algn="ctr"/>
+            <a:r>
+              <a:rPr lang="en-US" sz="5400" b="1" dirty="0">
+                <a:solidFill>
+                  <a:prstClr val="white"/>
+                </a:solidFill>
+                <a:latin typeface="Calibri" panose="020F0502020204030204"/>
+              </a:rPr>
+              <a:t>Abbreviations</a:t>
+            </a:r>
+            <a:endParaRPr lang="en-US" sz="5400" b="1" dirty="0">
+              <a:solidFill>
+                <a:prstClr val="white"/>
+              </a:solidFill>
+              <a:latin typeface="Calibri" panose="020F0502020204030204"/>
+              <a:ea typeface="+mn-ea"/>
+              <a:cs typeface="+mn-cs"/>
+            </a:endParaRPr>
+          </a:p>
+        </p:txBody>
+      </p:sp>
+      <p:sp>
+        <p:nvSpPr>
+          <p:cNvPr id="4" name="Background box">
+            <a:extLst>
+              <a:ext uri="{FF2B5EF4-FFF2-40B4-BE49-F238E27FC236}">
+                <a16:creationId xmlns:a16="http://schemas.microsoft.com/office/drawing/2014/main" id="{62E96ED5-270A-4981-6405-CC98BDB881C6}"/>
+              </a:ext>
+            </a:extLst>
+          </p:cNvPr>
+          <p:cNvSpPr/>
+          <p:nvPr/>
+        </p:nvSpPr>
+        <p:spPr>
+          <a:xfrm>
+            <a:off x="329183" y="27949161"/>
+            <a:ext cx="12178729" cy="1756562"/>
+          </a:xfrm>
+          <a:prstGeom prst="roundRect">
+            <a:avLst/>
+          </a:prstGeom>
+          <a:solidFill>
+            <a:schemeClr val="lt1">
+              <a:alpha val="0"/>
+            </a:schemeClr>
+          </a:solidFill>
+          <a:ln w="28575">
+            <a:solidFill>
+              <a:srgbClr val="0093C8"/>
+            </a:solidFill>
+          </a:ln>
+        </p:spPr>
+        <p:style>
+          <a:lnRef idx="2">
+            <a:schemeClr val="accent1"/>
+          </a:lnRef>
+          <a:fillRef idx="1">
+            <a:schemeClr val="lt1"/>
+          </a:fillRef>
+          <a:effectRef idx="0">
+            <a:schemeClr val="accent1"/>
+          </a:effectRef>
+          <a:fontRef idx="minor">
+            <a:schemeClr val="dk1"/>
+          </a:fontRef>
+        </p:style>
+        <p:txBody>
+          <a:bodyPr rtlCol="0" anchor="ctr">
+            <a:noAutofit/>
+          </a:bodyPr>
+          <a:lstStyle/>
+          <a:p>
+            <a:pPr>
+              <a:spcAft>
+                <a:spcPts val="1200"/>
+              </a:spcAft>
+            </a:pPr>
+            <a:r>
+              <a:rPr lang="en-US" sz="3200" b="1" dirty="0"/>
+              <a:t>CRP</a:t>
+            </a:r>
+            <a:r>
+              <a:rPr lang="en-US" sz="3200" dirty="0"/>
+              <a:t>: C-reactive protein – </a:t>
+            </a:r>
+            <a:r>
+              <a:rPr lang="en-US" sz="3200" b="1" dirty="0"/>
+              <a:t>OS</a:t>
+            </a:r>
+            <a:r>
+              <a:rPr lang="en-US" sz="3200" dirty="0"/>
+              <a:t>: overall survival – </a:t>
+            </a:r>
+            <a:r>
+              <a:rPr lang="en-US" sz="3200" b="1" dirty="0"/>
+              <a:t>PFS</a:t>
+            </a:r>
+            <a:r>
+              <a:rPr lang="en-US" sz="3200" dirty="0"/>
+              <a:t>: progression-free survival – </a:t>
+            </a:r>
+            <a:r>
+              <a:rPr lang="en-US" sz="3200" b="1" dirty="0"/>
+              <a:t>PLRT</a:t>
+            </a:r>
+            <a:r>
+              <a:rPr lang="en-US" sz="3200" dirty="0"/>
+              <a:t>: penalized likelihood-ratio tests – </a:t>
+            </a:r>
+            <a:r>
+              <a:rPr lang="en-US" sz="3200" b="1" dirty="0"/>
+              <a:t>TLR</a:t>
+            </a:r>
+            <a:r>
+              <a:rPr lang="en-US" sz="3200" dirty="0"/>
+              <a:t>: target lesion reduction – </a:t>
+            </a:r>
+            <a:r>
+              <a:rPr lang="en-US" sz="3200" b="1" dirty="0"/>
+              <a:t>TMB</a:t>
+            </a:r>
+            <a:r>
+              <a:rPr lang="en-US" sz="3200" dirty="0"/>
+              <a:t>: tumor mutational burden</a:t>
+            </a:r>
+          </a:p>
+        </p:txBody>
+      </p:sp>
     </p:spTree>
   </p:cSld>
   <p:clrMapOvr>

--- a/outputs/vignettes/poster_ESMO.pptx
+++ b/outputs/vignettes/poster_ESMO.pptx
@@ -110,12 +110,12 @@
   <p:extLst>
     <p:ext uri="{EFAFB233-063F-42B5-8137-9DF3F51BA10A}">
       <p15:sldGuideLst xmlns:p15="http://schemas.microsoft.com/office/powerpoint/2012/main">
-        <p15:guide id="2" pos="206" userDrawn="1">
+        <p15:guide id="2" pos="16101" userDrawn="1">
           <p15:clr>
             <a:srgbClr val="A4A3A4"/>
           </p15:clr>
         </p15:guide>
-        <p15:guide id="3" orient="horz" pos="12322" userDrawn="1">
+        <p15:guide id="3" orient="horz" pos="19255" userDrawn="1">
           <p15:clr>
             <a:srgbClr val="A4A3A4"/>
           </p15:clr>
@@ -208,7 +208,7 @@
           <a:p>
             <a:fld id="{89CEAEC2-C692-4B46-978F-109B22A150D2}" type="datetimeFigureOut">
               <a:rPr lang="en-US" smtClean="0"/>
-              <a:t>9/23/2026</a:t>
+              <a:t>9/18/2026</a:t>
             </a:fld>
             <a:endParaRPr lang="en-US" dirty="0"/>
           </a:p>
@@ -703,7 +703,7 @@
           <a:p>
             <a:fld id="{EDF32165-6009-0A44-BE1F-48670E89FB19}" type="datetimeFigureOut">
               <a:rPr lang="en-US" smtClean="0"/>
-              <a:t>9/23/2026</a:t>
+              <a:t>9/18/2026</a:t>
             </a:fld>
             <a:endParaRPr lang="en-US" dirty="0"/>
           </a:p>
@@ -873,7 +873,7 @@
           <a:p>
             <a:fld id="{EDF32165-6009-0A44-BE1F-48670E89FB19}" type="datetimeFigureOut">
               <a:rPr lang="en-US" smtClean="0"/>
-              <a:t>9/23/2026</a:t>
+              <a:t>9/18/2026</a:t>
             </a:fld>
             <a:endParaRPr lang="en-US" dirty="0"/>
           </a:p>
@@ -1053,7 +1053,7 @@
           <a:p>
             <a:fld id="{EDF32165-6009-0A44-BE1F-48670E89FB19}" type="datetimeFigureOut">
               <a:rPr lang="en-US" smtClean="0"/>
-              <a:t>9/23/2026</a:t>
+              <a:t>9/18/2026</a:t>
             </a:fld>
             <a:endParaRPr lang="en-US" dirty="0"/>
           </a:p>
@@ -1223,7 +1223,7 @@
           <a:p>
             <a:fld id="{EDF32165-6009-0A44-BE1F-48670E89FB19}" type="datetimeFigureOut">
               <a:rPr lang="en-US" smtClean="0"/>
-              <a:t>9/23/2026</a:t>
+              <a:t>9/18/2026</a:t>
             </a:fld>
             <a:endParaRPr lang="en-US" dirty="0"/>
           </a:p>
@@ -1469,7 +1469,7 @@
           <a:p>
             <a:fld id="{EDF32165-6009-0A44-BE1F-48670E89FB19}" type="datetimeFigureOut">
               <a:rPr lang="en-US" smtClean="0"/>
-              <a:t>9/23/2026</a:t>
+              <a:t>9/18/2026</a:t>
             </a:fld>
             <a:endParaRPr lang="en-US" dirty="0"/>
           </a:p>
@@ -1701,7 +1701,7 @@
           <a:p>
             <a:fld id="{EDF32165-6009-0A44-BE1F-48670E89FB19}" type="datetimeFigureOut">
               <a:rPr lang="en-US" smtClean="0"/>
-              <a:t>9/23/2026</a:t>
+              <a:t>9/18/2026</a:t>
             </a:fld>
             <a:endParaRPr lang="en-US" dirty="0"/>
           </a:p>
@@ -2068,7 +2068,7 @@
           <a:p>
             <a:fld id="{EDF32165-6009-0A44-BE1F-48670E89FB19}" type="datetimeFigureOut">
               <a:rPr lang="en-US" smtClean="0"/>
-              <a:t>9/23/2026</a:t>
+              <a:t>9/18/2026</a:t>
             </a:fld>
             <a:endParaRPr lang="en-US" dirty="0"/>
           </a:p>
@@ -2186,7 +2186,7 @@
           <a:p>
             <a:fld id="{EDF32165-6009-0A44-BE1F-48670E89FB19}" type="datetimeFigureOut">
               <a:rPr lang="en-US" smtClean="0"/>
-              <a:t>9/23/2026</a:t>
+              <a:t>9/18/2026</a:t>
             </a:fld>
             <a:endParaRPr lang="en-US" dirty="0"/>
           </a:p>
@@ -2281,7 +2281,7 @@
           <a:p>
             <a:fld id="{EDF32165-6009-0A44-BE1F-48670E89FB19}" type="datetimeFigureOut">
               <a:rPr lang="en-US" smtClean="0"/>
-              <a:t>9/23/2026</a:t>
+              <a:t>9/18/2026</a:t>
             </a:fld>
             <a:endParaRPr lang="en-US" dirty="0"/>
           </a:p>
@@ -2558,7 +2558,7 @@
           <a:p>
             <a:fld id="{EDF32165-6009-0A44-BE1F-48670E89FB19}" type="datetimeFigureOut">
               <a:rPr lang="en-US" smtClean="0"/>
-              <a:t>9/23/2026</a:t>
+              <a:t>9/18/2026</a:t>
             </a:fld>
             <a:endParaRPr lang="en-US" dirty="0"/>
           </a:p>
@@ -2814,7 +2814,7 @@
           <a:p>
             <a:fld id="{EDF32165-6009-0A44-BE1F-48670E89FB19}" type="datetimeFigureOut">
               <a:rPr lang="en-US" smtClean="0"/>
-              <a:t>9/23/2026</a:t>
+              <a:t>9/18/2026</a:t>
             </a:fld>
             <a:endParaRPr lang="en-US" dirty="0"/>
           </a:p>
@@ -3027,7 +3027,7 @@
           <a:p>
             <a:fld id="{EDF32165-6009-0A44-BE1F-48670E89FB19}" type="datetimeFigureOut">
               <a:rPr lang="en-US" smtClean="0"/>
-              <a:t>9/23/2026</a:t>
+              <a:t>9/18/2026</a:t>
             </a:fld>
             <a:endParaRPr lang="en-US" dirty="0"/>
           </a:p>
@@ -3432,30 +3432,6 @@
           <a:chExt cx="0" cy="0"/>
         </a:xfrm>
       </p:grpSpPr>
-      <p:pic>
-        <p:nvPicPr>
-          <p:cNvPr id="108" name="Figure 1 DAG" descr="Directed acyclic graph of the assumed relationships between treatment, CRP, TMB/BRAF, age/sex and survival"/>
-          <p:cNvPicPr>
-            <a:picLocks noChangeAspect="1"/>
-          </p:cNvPicPr>
-          <p:nvPr/>
-        </p:nvPicPr>
-        <p:blipFill>
-          <a:blip r:embed="rId3"/>
-          <a:stretch>
-            <a:fillRect/>
-          </a:stretch>
-        </p:blipFill>
-        <p:spPr>
-          <a:xfrm>
-            <a:off x="2468880" y="19740592"/>
-            <a:ext cx="7863840" cy="5392347"/>
-          </a:xfrm>
-          <a:prstGeom prst="rect">
-            <a:avLst/>
-          </a:prstGeom>
-        </p:spPr>
-      </p:pic>
       <p:sp>
         <p:nvSpPr>
           <p:cNvPr id="101" name="Title box"/>
@@ -3507,17 +3483,21 @@
                 <a:latin typeface="Arial" panose="020B0604020202020204" pitchFamily="34" charset="0"/>
                 <a:cs typeface="Arial" panose="020B0604020202020204" pitchFamily="34" charset="0"/>
               </a:rPr>
-              <a:t>Biomarker signals in MSS/pMMR metastatic colorectal cancer (mCRC) are predominantly </a:t>
-            </a:r>
-          </a:p>
-          <a:p>
-            <a:pPr algn="ctr"/>
+              <a:t>Biomarker signals in MSS/pMMR metastatic colorectal cancer (mCRC) are predominantly prognostic, not predictive</a:t>
+            </a:r>
+          </a:p>
+          <a:p>
+            <a:pPr algn="ctr">
+              <a:spcAft>
+                <a:spcPts val="600"/>
+              </a:spcAft>
+            </a:pPr>
             <a:r>
               <a:rPr lang="en-US" sz="6000" b="1" dirty="0">
                 <a:latin typeface="Arial" panose="020B0604020202020204" pitchFamily="34" charset="0"/>
                 <a:cs typeface="Arial" panose="020B0604020202020204" pitchFamily="34" charset="0"/>
               </a:rPr>
-              <a:t>prognostic, not predictive – lessons from the randomized phase-2 METIMMOX trial</a:t>
+              <a:t>– lessons from the randomized phase-2 METIMMOX trial</a:t>
             </a:r>
           </a:p>
           <a:p>
@@ -3545,7 +3525,14 @@
                 <a:latin typeface="Arial" panose="020B0604020202020204" pitchFamily="34" charset="0"/>
                 <a:cs typeface="Arial" panose="020B0604020202020204" pitchFamily="34" charset="0"/>
               </a:rPr>
-              <a:t>, Megan Othus</a:t>
+              <a:t xml:space="preserve">, </a:t>
+            </a:r>
+            <a:r>
+              <a:rPr lang="en-US" sz="4400" dirty="0">
+                <a:latin typeface="Arial" panose="020B0604020202020204" pitchFamily="34" charset="0"/>
+                <a:cs typeface="Arial" panose="020B0604020202020204" pitchFamily="34" charset="0"/>
+              </a:rPr>
+              <a:t>Megan Othus</a:t>
             </a:r>
             <a:r>
               <a:rPr lang="en-US" sz="4400" baseline="30000" dirty="0">
@@ -3559,7 +3546,14 @@
                 <a:latin typeface="Arial" panose="020B0604020202020204" pitchFamily="34" charset="0"/>
                 <a:cs typeface="Arial" panose="020B0604020202020204" pitchFamily="34" charset="0"/>
               </a:rPr>
-              <a:t>, Sebastian Meltzer</a:t>
+              <a:t xml:space="preserve">, </a:t>
+            </a:r>
+            <a:r>
+              <a:rPr lang="en-US" sz="4400" dirty="0">
+                <a:latin typeface="Arial" panose="020B0604020202020204" pitchFamily="34" charset="0"/>
+                <a:cs typeface="Arial" panose="020B0604020202020204" pitchFamily="34" charset="0"/>
+              </a:rPr>
+              <a:t>Sebastian Meltzer</a:t>
             </a:r>
             <a:r>
               <a:rPr lang="en-US" sz="4400" baseline="30000" dirty="0">
@@ -3573,7 +3567,14 @@
                 <a:latin typeface="Arial" panose="020B0604020202020204" pitchFamily="34" charset="0"/>
                 <a:cs typeface="Arial" panose="020B0604020202020204" pitchFamily="34" charset="0"/>
               </a:rPr>
-              <a:t>, Paula A. Bousquet</a:t>
+              <a:t xml:space="preserve">, </a:t>
+            </a:r>
+            <a:r>
+              <a:rPr lang="en-US" sz="4400" dirty="0">
+                <a:latin typeface="Arial" panose="020B0604020202020204" pitchFamily="34" charset="0"/>
+                <a:cs typeface="Arial" panose="020B0604020202020204" pitchFamily="34" charset="0"/>
+              </a:rPr>
+              <a:t>Paula A. Bousquet</a:t>
             </a:r>
             <a:r>
               <a:rPr lang="en-US" sz="4400" baseline="30000" dirty="0">
@@ -3587,7 +3588,14 @@
                 <a:latin typeface="Arial" panose="020B0604020202020204" pitchFamily="34" charset="0"/>
                 <a:cs typeface="Arial" panose="020B0604020202020204" pitchFamily="34" charset="0"/>
               </a:rPr>
-              <a:t>, Emily A. Burger</a:t>
+              <a:t xml:space="preserve">, </a:t>
+            </a:r>
+            <a:r>
+              <a:rPr lang="en-US" sz="4400" dirty="0">
+                <a:latin typeface="Arial" panose="020B0604020202020204" pitchFamily="34" charset="0"/>
+                <a:cs typeface="Arial" panose="020B0604020202020204" pitchFamily="34" charset="0"/>
+              </a:rPr>
+              <a:t>Emily A. Burger</a:t>
             </a:r>
             <a:r>
               <a:rPr lang="en-US" sz="4400" baseline="30000" dirty="0">
@@ -3601,7 +3609,14 @@
                 <a:latin typeface="Arial" panose="020B0604020202020204" pitchFamily="34" charset="0"/>
                 <a:cs typeface="Arial" panose="020B0604020202020204" pitchFamily="34" charset="0"/>
               </a:rPr>
-              <a:t>, Eline Aas</a:t>
+              <a:t xml:space="preserve">, </a:t>
+            </a:r>
+            <a:r>
+              <a:rPr lang="en-US" sz="4400" dirty="0">
+                <a:latin typeface="Arial" panose="020B0604020202020204" pitchFamily="34" charset="0"/>
+                <a:cs typeface="Arial" panose="020B0604020202020204" pitchFamily="34" charset="0"/>
+              </a:rPr>
+              <a:t>Eline Aas</a:t>
             </a:r>
             <a:r>
               <a:rPr lang="en-US" sz="4400" baseline="30000" dirty="0">
@@ -3615,7 +3630,14 @@
                 <a:latin typeface="Arial" panose="020B0604020202020204" pitchFamily="34" charset="0"/>
                 <a:cs typeface="Arial" panose="020B0604020202020204" pitchFamily="34" charset="0"/>
               </a:rPr>
-              <a:t>, Anne H. Ree</a:t>
+              <a:t xml:space="preserve">, </a:t>
+            </a:r>
+            <a:r>
+              <a:rPr lang="en-US" sz="4400" dirty="0">
+                <a:latin typeface="Arial" panose="020B0604020202020204" pitchFamily="34" charset="0"/>
+                <a:cs typeface="Arial" panose="020B0604020202020204" pitchFamily="34" charset="0"/>
+              </a:rPr>
+              <a:t>Anne H. Ree</a:t>
             </a:r>
             <a:r>
               <a:rPr lang="en-US" sz="4400" baseline="30000" dirty="0">
@@ -3639,7 +3661,7 @@
                 <a:latin typeface="Arial" panose="020B0604020202020204" pitchFamily="34" charset="0"/>
                 <a:cs typeface="Arial" panose="020B0604020202020204" pitchFamily="34" charset="0"/>
               </a:rPr>
-              <a:t>Department of Health Management and Health Economics, University of Oslo, Oslo, Norway; </a:t>
+              <a:t xml:space="preserve">Department of Health Management and Health Economics, University of Oslo, Oslo, Norway; </a:t>
             </a:r>
             <a:r>
               <a:rPr lang="en-US" sz="3200" baseline="30000" dirty="0">
@@ -3653,7 +3675,7 @@
                 <a:latin typeface="Arial" panose="020B0604020202020204" pitchFamily="34" charset="0"/>
                 <a:cs typeface="Arial" panose="020B0604020202020204" pitchFamily="34" charset="0"/>
               </a:rPr>
-              <a:t>Department of Oncology, Akershus University Hospital, Lørenskog, Norway; </a:t>
+              <a:t xml:space="preserve">Department of Oncology, Akershus University Hospital, Lørenskog, Norway; </a:t>
             </a:r>
             <a:r>
               <a:rPr lang="en-US" sz="3200" baseline="30000" dirty="0">
@@ -3667,7 +3689,7 @@
                 <a:latin typeface="Arial" panose="020B0604020202020204" pitchFamily="34" charset="0"/>
                 <a:cs typeface="Arial" panose="020B0604020202020204" pitchFamily="34" charset="0"/>
               </a:rPr>
-              <a:t>Fred Hutchinson Cancer Center, Seattle WA, United States; </a:t>
+              <a:t xml:space="preserve">Fred Hutchinson Cancer Center, Seattle WA, United States; </a:t>
             </a:r>
             <a:r>
               <a:rPr lang="en-US" sz="3200" baseline="30000" dirty="0">
@@ -3681,7 +3703,7 @@
                 <a:latin typeface="Arial" panose="020B0604020202020204" pitchFamily="34" charset="0"/>
                 <a:cs typeface="Arial" panose="020B0604020202020204" pitchFamily="34" charset="0"/>
               </a:rPr>
-              <a:t>Center for Health Decision Science, Harvard T. H. Chan School of Public Health, Boston MA, United States; </a:t>
+              <a:t xml:space="preserve">Center for Health Decision Science, Harvard T. H. Chan School of Public Health, Boston MA, United States; </a:t>
             </a:r>
             <a:r>
               <a:rPr lang="en-US" sz="3200" baseline="30000" dirty="0">
@@ -3695,7 +3717,7 @@
                 <a:latin typeface="Arial" panose="020B0604020202020204" pitchFamily="34" charset="0"/>
                 <a:cs typeface="Arial" panose="020B0604020202020204" pitchFamily="34" charset="0"/>
               </a:rPr>
-              <a:t>Division for Health Services, Norwegian Institute of Public Health, Oslo, Norway; </a:t>
+              <a:t xml:space="preserve">Division for Health Services, Norwegian Institute of Public Health, Oslo, Norway; </a:t>
             </a:r>
             <a:r>
               <a:rPr lang="en-US" sz="3200" baseline="30000" dirty="0">
@@ -3755,7 +3777,7 @@
         </p:nvSpPr>
         <p:spPr>
           <a:xfrm>
-            <a:off x="316121" y="4471416"/>
+            <a:off x="283464" y="4471416"/>
             <a:ext cx="12188952" cy="987552"/>
           </a:xfrm>
           <a:prstGeom prst="roundRect">
@@ -3845,8 +3867,8 @@
         </p:nvSpPr>
         <p:spPr>
           <a:xfrm>
-            <a:off x="365760" y="5751575"/>
-            <a:ext cx="12106656" cy="4579441"/>
+            <a:off x="365760" y="5751576"/>
+            <a:ext cx="12106656" cy="4572000"/>
           </a:xfrm>
           <a:prstGeom prst="roundRect">
             <a:avLst/>
@@ -3893,6 +3915,7 @@
               <a:rPr lang="en-US" sz="3200" dirty="0"/>
               <a:t>Immune checkpoint blockade is ineffective in unselected MSS/pMMR mCRC.</a:t>
             </a:r>
+            <a:endParaRPr lang="en-US" sz="3200" dirty="0"/>
           </a:p>
           <a:p>
             <a:pPr marL="571500" indent="-571500">
@@ -3904,8 +3927,9 @@
             </a:pPr>
             <a:r>
               <a:rPr lang="en-US" sz="3200" dirty="0"/>
-              <a:t>METIMMOX (randomized phase 2; NCT03388190): alternating oxaliplatin-based chemotherapy (FLOX) + nivolumab vs FLOX alone; identical PFS.</a:t>
-            </a:r>
+              <a:t>METIMMOX (randomized phase 2; NCT03388190, EudraCT 2017-001845-29): alternating FLOX + nivolumab vs FLOX alone; identical progression-free survival (PFS).</a:t>
+            </a:r>
+            <a:endParaRPr lang="en-US" sz="3200" dirty="0"/>
           </a:p>
           <a:p>
             <a:pPr marL="571500" indent="-571500">
@@ -3927,6 +3951,7 @@
               <a:rPr lang="en-US" sz="3200" dirty="0"/>
               <a:t>, CRP, TLR) conflated prognostic and predictive effects; we separated them in one pre-specified interaction model per endpoint.</a:t>
             </a:r>
+            <a:endParaRPr lang="en-US" sz="3200" dirty="0"/>
           </a:p>
         </p:txBody>
       </p:sp>
@@ -3938,7 +3963,7 @@
         </p:nvSpPr>
         <p:spPr>
           <a:xfrm>
-            <a:off x="316121" y="10716372"/>
+            <a:off x="283464" y="10597896"/>
             <a:ext cx="12188952" cy="978408"/>
           </a:xfrm>
           <a:prstGeom prst="roundRect">
@@ -3983,8 +4008,8 @@
         </p:nvSpPr>
         <p:spPr>
           <a:xfrm>
-            <a:off x="329184" y="11964666"/>
-            <a:ext cx="12143232" cy="14089203"/>
+            <a:off x="329184" y="11832336"/>
+            <a:ext cx="12143232" cy="14548104"/>
           </a:xfrm>
           <a:prstGeom prst="roundRect">
             <a:avLst/>
@@ -4028,9 +4053,10 @@
               <a:buChar char="o"/>
             </a:pPr>
             <a:r>
-              <a:rPr lang="en-US" sz="3600" dirty="0"/>
-              <a:t>68 complete cases (59 deaths; 63 PFS events).</a:t>
-            </a:r>
+              <a:rPr lang="en-US" sz="3200" dirty="0"/>
+              <a:t>68 complete cases (59 deaths; 50 progression-or-death events; deaths &gt;16 weeks after the last scan censored for PFS).</a:t>
+            </a:r>
+            <a:endParaRPr lang="en-US" sz="3200" dirty="0"/>
           </a:p>
           <a:p>
             <a:pPr marL="571500" indent="-571500">
@@ -4041,17 +4067,18 @@
               <a:buChar char="o"/>
             </a:pPr>
             <a:r>
-              <a:rPr lang="en-US" sz="3600" dirty="0"/>
-              <a:t>Biomarkers before nivolumab: TMB ≥9 mut/Mb or </a:t>
-            </a:r>
-            <a:r>
-              <a:rPr lang="en-US" sz="3600" i="1" dirty="0"/>
+              <a:rPr lang="en-US" sz="3200" dirty="0"/>
+              <a:t xml:space="preserve">Biomarkers before nivolumab: TMB ≥9 mut/Mb or </a:t>
+            </a:r>
+            <a:r>
+              <a:rPr lang="en-US" sz="3200" i="1" dirty="0"/>
               <a:t>BRAF</a:t>
             </a:r>
             <a:r>
-              <a:rPr lang="en-US" sz="3600" dirty="0"/>
-              <a:t> V600E; CRP &lt;5 mg/L after 2 FLOX cycles common to both arms (by chance 47% vs 19% positive).</a:t>
-            </a:r>
+              <a:rPr lang="en-US" sz="3200" dirty="0"/>
+              <a:t xml:space="preserve"> V600E (baseline); CRP &lt;5 mg/L at week 4, after 2 FLOX cycles common to both arms (by chance 47% vs 19% positive).</a:t>
+            </a:r>
+            <a:endParaRPr lang="en-US" sz="3200" dirty="0"/>
           </a:p>
           <a:p>
             <a:pPr marL="571500" indent="-571500">
@@ -4062,9 +4089,10 @@
               <a:buChar char="o"/>
             </a:pPr>
             <a:r>
-              <a:rPr lang="en-US" sz="3600" dirty="0"/>
-              <a:t>TLR ≥10% at the first on-treatment CT: analyzed as intermediate endpoint with a week-9 landmark.</a:t>
-            </a:r>
+              <a:rPr lang="en-US" sz="3200" dirty="0"/>
+              <a:t>TLR ≥10% at the first on-treatment CT: intermediate endpoint (T → TLR → PFS), analyzed with a week-9 landmark.</a:t>
+            </a:r>
+            <a:endParaRPr lang="en-US" sz="3200" dirty="0"/>
           </a:p>
           <a:p>
             <a:pPr marL="571500" indent="-571500">
@@ -4075,17 +4103,18 @@
               <a:buChar char="o"/>
             </a:pPr>
             <a:r>
-              <a:rPr lang="en-US" sz="3600" dirty="0"/>
-              <a:t>Per endpoint (PFS, OS): one Firth-corrected Cox model with age, sex, treatment, biomarker main effects and treatment × biomarker interactions (</a:t>
-            </a:r>
-            <a:r>
-              <a:rPr lang="en-US" sz="3600" b="1" dirty="0"/>
+              <a:rPr lang="en-US" sz="3200" dirty="0"/>
+              <a:t>Per endpoint (PFS, overall survival [OS]): one Firth-corrected Cox model with age, sex, treatment, biomarker main effects and treatment × biomarker interactions (</a:t>
+            </a:r>
+            <a:r>
+              <a:rPr lang="en-US" sz="3200" b="1" dirty="0"/>
               <a:t>Figure 1</a:t>
             </a:r>
             <a:r>
-              <a:rPr lang="en-US" sz="3600" dirty="0"/>
-              <a:t>); profile-likelihood 95% CIs, PLRT.</a:t>
-            </a:r>
+              <a:rPr lang="en-US" sz="3200" dirty="0"/>
+              <a:t>); profile-likelihood 95% CIs, penalized likelihood-ratio tests (PLRT).</a:t>
+            </a:r>
+            <a:endParaRPr lang="en-US" sz="3200" dirty="0"/>
           </a:p>
           <a:p>
             <a:pPr marL="571500" indent="-571500">
@@ -4096,12 +4125,37 @@
               <a:buChar char="o"/>
             </a:pPr>
             <a:r>
-              <a:rPr lang="en-US" sz="3600" dirty="0"/>
-              <a:t>Ridge-penalized Cox as co-primary stability estimator.</a:t>
-            </a:r>
-          </a:p>
-        </p:txBody>
-      </p:sp>
+              <a:rPr lang="en-US" sz="3200" dirty="0"/>
+              <a:t>Stability check: ridge-penalized Cox shrinking the biomarker terms (cross-validated penalty).</a:t>
+            </a:r>
+            <a:endParaRPr lang="en-US" sz="3200" dirty="0"/>
+          </a:p>
+        </p:txBody>
+      </p:sp>
+      <p:pic>
+        <p:nvPicPr>
+          <p:cNvPr id="108" name="Figure 1 DAG" descr="Directed acyclic graph of the assumed relationships between treatment, CRP, TMB/BRAF, age/sex and survival"/>
+          <p:cNvPicPr>
+            <a:picLocks noChangeAspect="1"/>
+          </p:cNvPicPr>
+          <p:nvPr/>
+        </p:nvPicPr>
+        <p:blipFill>
+          <a:blip r:embed="rId7"/>
+          <a:stretch>
+            <a:fillRect/>
+          </a:stretch>
+        </p:blipFill>
+        <p:spPr>
+          <a:xfrm>
+            <a:off x="2468880" y="20165133"/>
+            <a:ext cx="7863840" cy="5392347"/>
+          </a:xfrm>
+          <a:prstGeom prst="rect">
+            <a:avLst/>
+          </a:prstGeom>
+        </p:spPr>
+      </p:pic>
       <p:sp>
         <p:nvSpPr>
           <p:cNvPr id="109" name="Figure 1 caption"/>
@@ -4110,7 +4164,7 @@
         </p:nvSpPr>
         <p:spPr>
           <a:xfrm>
-            <a:off x="822960" y="25132939"/>
+            <a:off x="822960" y="25557480"/>
             <a:ext cx="11155680" cy="777240"/>
           </a:xfrm>
           <a:prstGeom prst="rect">
@@ -4127,7 +4181,7 @@
             <a:pPr algn="ctr"/>
             <a:r>
               <a:rPr lang="en-US" sz="2400" b="1" dirty="0"/>
-              <a:t>Figure 1. Assumed relationships (DAG) behind the model. </a:t>
+              <a:t xml:space="preserve">Figure 1. Assumed relationships (DAG) behind the model. </a:t>
             </a:r>
             <a:r>
               <a:rPr lang="en-US" sz="2400" dirty="0"/>
@@ -4153,7 +4207,7 @@
           <p:nvPr/>
         </p:nvPicPr>
         <p:blipFill>
-          <a:blip r:embed="rId4"/>
+          <a:blip r:embed="rId5"/>
           <a:stretch>
             <a:fillRect/>
           </a:stretch>
@@ -4222,12 +4276,13 @@
             </a:pPr>
             <a:r>
               <a:rPr lang="en-US" sz="4000" b="1" dirty="0"/>
-              <a:t>No marginal treatment effect: </a:t>
+              <a:t xml:space="preserve">No marginal treatment effect: </a:t>
             </a:r>
             <a:r>
               <a:rPr lang="en-US" sz="4000" dirty="0"/>
-              <a:t>OS HR 0.96 (95% CI 0.58–1.61); PFS HR 0.80 (0.49–1.33).</a:t>
-            </a:r>
+              <a:t>OS HR 0.96 (95% CI 0.58–1.61); PFS HR 0.77 (0.44–1.38).</a:t>
+            </a:r>
+            <a:endParaRPr lang="en-US" sz="4000" dirty="0"/>
           </a:p>
           <a:p>
             <a:pPr marL="571500" indent="-571500">
@@ -4237,7 +4292,39 @@
               <a:buFont typeface="Courier New" panose="02070309020205020404" pitchFamily="49" charset="0"/>
               <a:buChar char="o"/>
             </a:pPr>
-            <a:endParaRPr lang="en-US" sz="2000" dirty="0"/>
+            <a:r>
+              <a:rPr lang="en-US" sz="4000" b="1" dirty="0"/>
+              <a:t xml:space="preserve">Prognostic: </a:t>
+            </a:r>
+            <a:r>
+              <a:rPr lang="en-US" sz="4000" dirty="0"/>
+              <a:t>CRP &lt;5 mg/L and TMB/</a:t>
+            </a:r>
+            <a:r>
+              <a:rPr lang="en-US" sz="4000" i="1" dirty="0"/>
+              <a:t>BRAF</a:t>
+            </a:r>
+            <a:r>
+              <a:rPr lang="en-US" sz="4000" dirty="0"/>
+              <a:t xml:space="preserve"> positivity were associated with longer PFS (HR 0.39 each) and, for CRP, longer OS (HR 0.49), regardless of treatment (</a:t>
+            </a:r>
+            <a:r>
+              <a:rPr lang="en-US" sz="4000" b="1" dirty="0"/>
+              <a:t>Table 1</a:t>
+            </a:r>
+            <a:r>
+              <a:rPr lang="en-US" sz="4000" dirty="0"/>
+              <a:t xml:space="preserve">, </a:t>
+            </a:r>
+            <a:r>
+              <a:rPr lang="en-US" sz="4000" b="1" dirty="0"/>
+              <a:t>Figure 2</a:t>
+            </a:r>
+            <a:r>
+              <a:rPr lang="en-US" sz="4000" dirty="0"/>
+              <a:t>).</a:t>
+            </a:r>
+            <a:endParaRPr lang="en-US" sz="4000" dirty="0"/>
           </a:p>
           <a:p>
             <a:pPr marL="571500" indent="-571500">
@@ -4249,58 +4336,7 @@
             </a:pPr>
             <a:r>
               <a:rPr lang="en-US" sz="4000" b="1" dirty="0"/>
-              <a:t>Prognostic: </a:t>
-            </a:r>
-            <a:r>
-              <a:rPr lang="en-US" sz="4000" dirty="0"/>
-              <a:t>CRP &lt;5 mg/L and TMB/</a:t>
-            </a:r>
-            <a:r>
-              <a:rPr lang="en-US" sz="4000" i="1" dirty="0"/>
-              <a:t>BRAF</a:t>
-            </a:r>
-            <a:r>
-              <a:rPr lang="en-US" sz="4000" dirty="0"/>
-              <a:t> positivity were associated with longer PFS (HR 0.41 and 0.49) and, for CRP, longer OS (HR 0.49), regardless of treatment (</a:t>
-            </a:r>
-            <a:r>
-              <a:rPr lang="en-US" sz="4000" b="1" dirty="0"/>
-              <a:t>Table 1</a:t>
-            </a:r>
-            <a:r>
-              <a:rPr lang="en-US" sz="4000" dirty="0"/>
-              <a:t>, </a:t>
-            </a:r>
-            <a:r>
-              <a:rPr lang="en-US" sz="4000" b="1" dirty="0"/>
-              <a:t>Figure 2</a:t>
-            </a:r>
-            <a:r>
-              <a:rPr lang="en-US" sz="4000" dirty="0"/>
-              <a:t>).</a:t>
-            </a:r>
-          </a:p>
-          <a:p>
-            <a:pPr marL="571500" indent="-571500">
-              <a:spcAft>
-                <a:spcPts val="1600"/>
-              </a:spcAft>
-              <a:buFont typeface="Courier New" panose="02070309020205020404" pitchFamily="49" charset="0"/>
-              <a:buChar char="o"/>
-            </a:pPr>
-            <a:endParaRPr lang="en-US" sz="2000" dirty="0"/>
-          </a:p>
-          <a:p>
-            <a:pPr marL="571500" indent="-571500">
-              <a:spcAft>
-                <a:spcPts val="1600"/>
-              </a:spcAft>
-              <a:buFont typeface="Courier New" panose="02070309020205020404" pitchFamily="49" charset="0"/>
-              <a:buChar char="o"/>
-            </a:pPr>
-            <a:r>
-              <a:rPr lang="en-US" sz="4000" b="1" dirty="0"/>
-              <a:t>Not predictive: </a:t>
+              <a:t xml:space="preserve">Not predictive: </a:t>
             </a:r>
             <a:r>
               <a:rPr lang="en-US" sz="4000" dirty="0"/>
@@ -4312,18 +4348,9 @@
             </a:r>
             <a:r>
               <a:rPr lang="en-US" sz="4000" dirty="0"/>
-              <a:t>). Most consistent signal: CRP × treatment for PFS, HR 0.42 (0.11–1.68), p = 0.21, ridge HR 0.33; attenuated for OS (HR 0.65).</a:t>
-            </a:r>
-          </a:p>
-          <a:p>
-            <a:pPr marL="571500" indent="-571500">
-              <a:spcAft>
-                <a:spcPts val="1600"/>
-              </a:spcAft>
-              <a:buFont typeface="Courier New" panose="02070309020205020404" pitchFamily="49" charset="0"/>
-              <a:buChar char="o"/>
-            </a:pPr>
-            <a:endParaRPr lang="en-US" sz="2000" dirty="0"/>
+              <a:t>). Largest signal: CRP × treatment for PFS, HR 0.26 (0.06–1.34), p = 0.10, but it shrinks toward 1 under ridge (HR 0.66) and is weaker for OS (HR 0.65).</a:t>
+            </a:r>
+            <a:endParaRPr lang="en-US" sz="4000" dirty="0"/>
           </a:p>
           <a:p>
             <a:pPr marL="571500" indent="-571500">
@@ -4335,27 +4362,13 @@
             </a:pPr>
             <a:r>
               <a:rPr lang="en-US" sz="4000" b="1" dirty="0"/>
-              <a:t>TLR: </a:t>
+              <a:t xml:space="preserve">TLR: </a:t>
             </a:r>
             <a:r>
               <a:rPr lang="en-US" sz="4000" dirty="0"/>
-              <a:t>strongly prognostic for both endpoints (landmark HR 0.35), but more frequent with FLOX alone (76% vs 53%) and with an interaction HR &gt;1</a:t>
-            </a:r>
-            <a:r>
-              <a:rPr lang="en-US" sz="4000"/>
-              <a:t>: </a:t>
-            </a:r>
-            <a:br>
-              <a:rPr lang="en-US" sz="4000"/>
-            </a:br>
-            <a:r>
-              <a:rPr lang="en-US" sz="4000"/>
-              <a:t>a </a:t>
-            </a:r>
-            <a:r>
-              <a:rPr lang="en-US" sz="4000" dirty="0"/>
-              <a:t>marker of chemotherapy-responsive disease, not of nivolumab benefit.</a:t>
-            </a:r>
+              <a:t>strongly prognostic (landmark HR 0.35 OS, 0.21 PFS), but more frequent with FLOX alone (76% vs 53%), with inconsistent interactions (HR 2.47 OS, 0.88 PFS): a marker of chemotherapy-responsive disease, not of nivolumab benefit.</a:t>
+            </a:r>
+            <a:endParaRPr lang="en-US" sz="4000" dirty="0"/>
           </a:p>
         </p:txBody>
       </p:sp>
@@ -4383,7 +4396,7 @@
           <a:p>
             <a:r>
               <a:rPr lang="en-US" sz="2800" b="1" dirty="0"/>
-              <a:t>Table 1. </a:t>
+              <a:t xml:space="preserve">Table 1. </a:t>
             </a:r>
             <a:r>
               <a:rPr lang="en-US" sz="2800" dirty="0"/>
@@ -4398,13 +4411,7 @@
           <p:cNvGraphicFramePr>
             <a:graphicFrameLocks noGrp="1"/>
           </p:cNvGraphicFramePr>
-          <p:nvPr>
-            <p:extLst>
-              <p:ext uri="{D42A27DB-BD31-4B8C-83A1-F6EECF244321}">
-                <p14:modId xmlns:p14="http://schemas.microsoft.com/office/powerpoint/2010/main" val="485809887"/>
-              </p:ext>
-            </p:extLst>
-          </p:nvPr>
+          <p:nvPr/>
         </p:nvGraphicFramePr>
         <p:xfrm>
           <a:off x="12929616" y="20487132"/>
@@ -4415,62 +4422,14 @@
             <a:tbl>
               <a:tblPr firstRow="1" bandRow="1"/>
               <a:tblGrid>
-                <a:gridCol w="6400800">
-                  <a:extLst>
-                    <a:ext uri="{9D8B030D-6E8A-4147-A177-3AD203B41FA5}">
-                      <a16:colId xmlns:a16="http://schemas.microsoft.com/office/drawing/2014/main" val="20000"/>
-                    </a:ext>
-                  </a:extLst>
-                </a:gridCol>
-                <a:gridCol w="5029200">
-                  <a:extLst>
-                    <a:ext uri="{9D8B030D-6E8A-4147-A177-3AD203B41FA5}">
-                      <a16:colId xmlns:a16="http://schemas.microsoft.com/office/drawing/2014/main" val="20001"/>
-                    </a:ext>
-                  </a:extLst>
-                </a:gridCol>
-                <a:gridCol w="3474720">
-                  <a:extLst>
-                    <a:ext uri="{9D8B030D-6E8A-4147-A177-3AD203B41FA5}">
-                      <a16:colId xmlns:a16="http://schemas.microsoft.com/office/drawing/2014/main" val="20002"/>
-                    </a:ext>
-                  </a:extLst>
-                </a:gridCol>
-                <a:gridCol w="1554480">
-                  <a:extLst>
-                    <a:ext uri="{9D8B030D-6E8A-4147-A177-3AD203B41FA5}">
-                      <a16:colId xmlns:a16="http://schemas.microsoft.com/office/drawing/2014/main" val="20003"/>
-                    </a:ext>
-                  </a:extLst>
-                </a:gridCol>
-                <a:gridCol w="2011680">
-                  <a:extLst>
-                    <a:ext uri="{9D8B030D-6E8A-4147-A177-3AD203B41FA5}">
-                      <a16:colId xmlns:a16="http://schemas.microsoft.com/office/drawing/2014/main" val="20004"/>
-                    </a:ext>
-                  </a:extLst>
-                </a:gridCol>
-                <a:gridCol w="3474720">
-                  <a:extLst>
-                    <a:ext uri="{9D8B030D-6E8A-4147-A177-3AD203B41FA5}">
-                      <a16:colId xmlns:a16="http://schemas.microsoft.com/office/drawing/2014/main" val="20005"/>
-                    </a:ext>
-                  </a:extLst>
-                </a:gridCol>
-                <a:gridCol w="1554480">
-                  <a:extLst>
-                    <a:ext uri="{9D8B030D-6E8A-4147-A177-3AD203B41FA5}">
-                      <a16:colId xmlns:a16="http://schemas.microsoft.com/office/drawing/2014/main" val="20006"/>
-                    </a:ext>
-                  </a:extLst>
-                </a:gridCol>
-                <a:gridCol w="2093976">
-                  <a:extLst>
-                    <a:ext uri="{9D8B030D-6E8A-4147-A177-3AD203B41FA5}">
-                      <a16:colId xmlns:a16="http://schemas.microsoft.com/office/drawing/2014/main" val="20007"/>
-                    </a:ext>
-                  </a:extLst>
-                </a:gridCol>
+                <a:gridCol w="6400800"/>
+                <a:gridCol w="5029200"/>
+                <a:gridCol w="3474720"/>
+                <a:gridCol w="1554480"/>
+                <a:gridCol w="2011680"/>
+                <a:gridCol w="3474720"/>
+                <a:gridCol w="1554480"/>
+                <a:gridCol w="2093976"/>
               </a:tblGrid>
               <a:tr h="530352">
                 <a:tc rowSpan="2">
@@ -4737,11 +4696,6 @@
                     </a:solidFill>
                   </a:tcPr>
                 </a:tc>
-                <a:extLst>
-                  <a:ext uri="{0D108BD9-81ED-4DB2-BD59-A6C34878D82A}">
-                    <a16:rowId xmlns:a16="http://schemas.microsoft.com/office/drawing/2014/main" val="10000"/>
-                  </a:ext>
-                </a:extLst>
               </a:tr>
               <a:tr h="530352">
                 <a:tc vMerge="1">
@@ -5016,11 +4970,6 @@
                     </a:solidFill>
                   </a:tcPr>
                 </a:tc>
-                <a:extLst>
-                  <a:ext uri="{0D108BD9-81ED-4DB2-BD59-A6C34878D82A}">
-                    <a16:rowId xmlns:a16="http://schemas.microsoft.com/office/drawing/2014/main" val="10001"/>
-                  </a:ext>
-                </a:extLst>
               </a:tr>
               <a:tr h="530352">
                 <a:tc>
@@ -5033,6 +4982,7 @@
                         <a:rPr lang="en-US" sz="2800" dirty="0"/>
                         <a:t>Treatment (FLOX/nivolumab vs FLOX)</a:t>
                       </a:r>
+                      <a:endParaRPr lang="en-US" sz="2800" dirty="0"/>
                     </a:p>
                   </a:txBody>
                   <a:tcPr marL="60000" marR="60000" marT="18000" marB="18000" anchor="ctr">
@@ -5061,6 +5011,7 @@
                         <a:rPr lang="en-US" sz="2800" dirty="0"/>
                         <a:t>Univariable</a:t>
                       </a:r>
+                      <a:endParaRPr lang="en-US" sz="2800" dirty="0"/>
                     </a:p>
                   </a:txBody>
                   <a:tcPr marL="60000" marR="60000" marT="18000" marB="18000" anchor="ctr">
@@ -5089,6 +5040,7 @@
                         <a:rPr lang="en-US" sz="2800" dirty="0"/>
                         <a:t>0.96 (0.58–1.61)</a:t>
                       </a:r>
+                      <a:endParaRPr lang="en-US" sz="2800" dirty="0"/>
                     </a:p>
                   </a:txBody>
                   <a:tcPr marL="60000" marR="60000" marT="18000" marB="18000" anchor="ctr">
@@ -5098,14 +5050,8 @@
                     <a:lnR>
                       <a:noFill/>
                     </a:lnR>
-                    <a:lnT w="12700" cap="flat" cmpd="sng" algn="ctr">
-                      <a:solidFill>
-                        <a:srgbClr val="000000"/>
-                      </a:solidFill>
-                      <a:prstDash val="solid"/>
-                      <a:round/>
-                      <a:headEnd type="none" w="med" len="med"/>
-                      <a:tailEnd type="none" w="med" len="med"/>
+                    <a:lnT>
+                      <a:noFill/>
                     </a:lnT>
                     <a:lnB>
                       <a:noFill/>
@@ -5123,6 +5069,7 @@
                         <a:rPr lang="en-US" sz="2800" dirty="0"/>
                         <a:t>0.87</a:t>
                       </a:r>
+                      <a:endParaRPr lang="en-US" sz="2800" dirty="0"/>
                     </a:p>
                   </a:txBody>
                   <a:tcPr marL="60000" marR="60000" marT="18000" marB="18000" anchor="ctr">
@@ -5132,14 +5079,8 @@
                     <a:lnR>
                       <a:noFill/>
                     </a:lnR>
-                    <a:lnT w="12700" cap="flat" cmpd="sng" algn="ctr">
-                      <a:solidFill>
-                        <a:srgbClr val="000000"/>
-                      </a:solidFill>
-                      <a:prstDash val="solid"/>
-                      <a:round/>
-                      <a:headEnd type="none" w="med" len="med"/>
-                      <a:tailEnd type="none" w="med" len="med"/>
+                    <a:lnT>
+                      <a:noFill/>
                     </a:lnT>
                     <a:lnB>
                       <a:noFill/>
@@ -5157,6 +5098,7 @@
                         <a:rPr lang="en-US" sz="2800" dirty="0"/>
                         <a:t>–</a:t>
                       </a:r>
+                      <a:endParaRPr lang="en-US" sz="2800" dirty="0"/>
                     </a:p>
                   </a:txBody>
                   <a:tcPr marL="60000" marR="60000" marT="18000" marB="18000" anchor="ctr">
@@ -5166,14 +5108,8 @@
                     <a:lnR>
                       <a:noFill/>
                     </a:lnR>
-                    <a:lnT w="12700" cap="flat" cmpd="sng" algn="ctr">
-                      <a:solidFill>
-                        <a:srgbClr val="000000"/>
-                      </a:solidFill>
-                      <a:prstDash val="solid"/>
-                      <a:round/>
-                      <a:headEnd type="none" w="med" len="med"/>
-                      <a:tailEnd type="none" w="med" len="med"/>
+                    <a:lnT>
+                      <a:noFill/>
                     </a:lnT>
                     <a:lnB>
                       <a:noFill/>
@@ -5189,8 +5125,9 @@
                       <a:pPr algn="ctr"/>
                       <a:r>
                         <a:rPr lang="en-US" sz="2800" dirty="0"/>
-                        <a:t>0.80 (0.49–1.33)</a:t>
+                        <a:t>0.77 (0.44–1.38)</a:t>
                       </a:r>
+                      <a:endParaRPr lang="en-US" sz="2800" dirty="0"/>
                     </a:p>
                   </a:txBody>
                   <a:tcPr marL="60000" marR="60000" marT="18000" marB="18000" anchor="ctr">
@@ -5200,14 +5137,8 @@
                     <a:lnR>
                       <a:noFill/>
                     </a:lnR>
-                    <a:lnT w="12700" cap="flat" cmpd="sng" algn="ctr">
-                      <a:solidFill>
-                        <a:srgbClr val="000000"/>
-                      </a:solidFill>
-                      <a:prstDash val="solid"/>
-                      <a:round/>
-                      <a:headEnd type="none" w="med" len="med"/>
-                      <a:tailEnd type="none" w="med" len="med"/>
+                    <a:lnT>
+                      <a:noFill/>
                     </a:lnT>
                     <a:lnB>
                       <a:noFill/>
@@ -5223,8 +5154,9 @@
                       <a:pPr algn="ctr"/>
                       <a:r>
                         <a:rPr lang="en-US" sz="2800" dirty="0"/>
-                        <a:t>0.39</a:t>
+                        <a:t>0.38</a:t>
                       </a:r>
+                      <a:endParaRPr lang="en-US" sz="2800" dirty="0"/>
                     </a:p>
                   </a:txBody>
                   <a:tcPr marL="60000" marR="60000" marT="18000" marB="18000" anchor="ctr">
@@ -5234,14 +5166,8 @@
                     <a:lnR>
                       <a:noFill/>
                     </a:lnR>
-                    <a:lnT w="12700" cap="flat" cmpd="sng" algn="ctr">
-                      <a:solidFill>
-                        <a:srgbClr val="000000"/>
-                      </a:solidFill>
-                      <a:prstDash val="solid"/>
-                      <a:round/>
-                      <a:headEnd type="none" w="med" len="med"/>
-                      <a:tailEnd type="none" w="med" len="med"/>
+                    <a:lnT>
+                      <a:noFill/>
                     </a:lnT>
                     <a:lnB>
                       <a:noFill/>
@@ -5259,6 +5185,7 @@
                         <a:rPr lang="en-US" sz="2800" dirty="0"/>
                         <a:t>–</a:t>
                       </a:r>
+                      <a:endParaRPr lang="en-US" sz="2800" dirty="0"/>
                     </a:p>
                   </a:txBody>
                   <a:tcPr marL="60000" marR="60000" marT="18000" marB="18000" anchor="ctr">
@@ -5268,14 +5195,8 @@
                     <a:lnR>
                       <a:noFill/>
                     </a:lnR>
-                    <a:lnT w="12700" cap="flat" cmpd="sng" algn="ctr">
-                      <a:solidFill>
-                        <a:srgbClr val="000000"/>
-                      </a:solidFill>
-                      <a:prstDash val="solid"/>
-                      <a:round/>
-                      <a:headEnd type="none" w="med" len="med"/>
-                      <a:tailEnd type="none" w="med" len="med"/>
+                    <a:lnT>
+                      <a:noFill/>
                     </a:lnT>
                     <a:lnB>
                       <a:noFill/>
@@ -5283,11 +5204,6 @@
                     <a:noFill/>
                   </a:tcPr>
                 </a:tc>
-                <a:extLst>
-                  <a:ext uri="{0D108BD9-81ED-4DB2-BD59-A6C34878D82A}">
-                    <a16:rowId xmlns:a16="http://schemas.microsoft.com/office/drawing/2014/main" val="10002"/>
-                  </a:ext>
-                </a:extLst>
               </a:tr>
               <a:tr h="530352">
                 <a:tc>
@@ -5300,6 +5216,7 @@
                         <a:rPr lang="en-US" sz="2800" dirty="0"/>
                         <a:t>CRP &lt;5 mg/L at week 4</a:t>
                       </a:r>
+                      <a:endParaRPr lang="en-US" sz="2800" dirty="0"/>
                     </a:p>
                   </a:txBody>
                   <a:tcPr marL="60000" marR="60000" marT="18000" marB="18000" anchor="ctr">
@@ -5328,6 +5245,7 @@
                         <a:rPr lang="en-US" sz="2800" dirty="0"/>
                         <a:t>Univariable (prognostic)</a:t>
                       </a:r>
+                      <a:endParaRPr lang="en-US" sz="2800" dirty="0"/>
                     </a:p>
                   </a:txBody>
                   <a:tcPr marL="60000" marR="60000" marT="18000" marB="18000" anchor="ctr">
@@ -5356,6 +5274,7 @@
                         <a:rPr lang="en-US" sz="2800" dirty="0"/>
                         <a:t>0.49 (0.27–0.84)</a:t>
                       </a:r>
+                      <a:endParaRPr lang="en-US" sz="2800" dirty="0"/>
                     </a:p>
                   </a:txBody>
                   <a:tcPr marL="60000" marR="60000" marT="18000" marB="18000" anchor="ctr">
@@ -5384,6 +5303,7 @@
                         <a:rPr lang="en-US" sz="2800" dirty="0"/>
                         <a:t>0.009</a:t>
                       </a:r>
+                      <a:endParaRPr lang="en-US" sz="2800" dirty="0"/>
                     </a:p>
                   </a:txBody>
                   <a:tcPr marL="60000" marR="60000" marT="18000" marB="18000" anchor="ctr">
@@ -5412,6 +5332,7 @@
                         <a:rPr lang="en-US" sz="2800" dirty="0"/>
                         <a:t>–</a:t>
                       </a:r>
+                      <a:endParaRPr lang="en-US" sz="2800" dirty="0"/>
                     </a:p>
                   </a:txBody>
                   <a:tcPr marL="60000" marR="60000" marT="18000" marB="18000" anchor="ctr">
@@ -5438,8 +5359,9 @@
                       <a:pPr algn="ctr"/>
                       <a:r>
                         <a:rPr lang="en-US" sz="2800" dirty="0"/>
-                        <a:t>0.41 (0.23–0.71)</a:t>
+                        <a:t>0.39 (0.20–0.73)</a:t>
                       </a:r>
+                      <a:endParaRPr lang="en-US" sz="2800" dirty="0"/>
                     </a:p>
                   </a:txBody>
                   <a:tcPr marL="60000" marR="60000" marT="18000" marB="18000" anchor="ctr">
@@ -5466,8 +5388,9 @@
                       <a:pPr algn="ctr"/>
                       <a:r>
                         <a:rPr lang="en-US" sz="2800" dirty="0"/>
-                        <a:t>0.001</a:t>
+                        <a:t>0.003</a:t>
                       </a:r>
+                      <a:endParaRPr lang="en-US" sz="2800" dirty="0"/>
                     </a:p>
                   </a:txBody>
                   <a:tcPr marL="60000" marR="60000" marT="18000" marB="18000" anchor="ctr">
@@ -5496,6 +5419,7 @@
                         <a:rPr lang="en-US" sz="2800" dirty="0"/>
                         <a:t>–</a:t>
                       </a:r>
+                      <a:endParaRPr lang="en-US" sz="2800" dirty="0"/>
                     </a:p>
                   </a:txBody>
                   <a:tcPr marL="60000" marR="60000" marT="18000" marB="18000" anchor="ctr">
@@ -5514,11 +5438,6 @@
                     <a:noFill/>
                   </a:tcPr>
                 </a:tc>
-                <a:extLst>
-                  <a:ext uri="{0D108BD9-81ED-4DB2-BD59-A6C34878D82A}">
-                    <a16:rowId xmlns:a16="http://schemas.microsoft.com/office/drawing/2014/main" val="10003"/>
-                  </a:ext>
-                </a:extLst>
               </a:tr>
               <a:tr h="530352">
                 <a:tc>
@@ -5529,7 +5448,7 @@
                       <a:pPr algn="l"/>
                       <a:r>
                         <a:rPr lang="en-US" sz="2800" dirty="0"/>
-                        <a:t>TMB ≥9 mut/Mb or </a:t>
+                        <a:t xml:space="preserve">TMB ≥9 mut/Mb or </a:t>
                       </a:r>
                       <a:r>
                         <a:rPr lang="en-US" sz="2800" i="1" dirty="0"/>
@@ -5537,8 +5456,9 @@
                       </a:r>
                       <a:r>
                         <a:rPr lang="en-US" sz="2800" dirty="0"/>
-                        <a:t> V600E</a:t>
+                        <a:t xml:space="preserve"> V600E</a:t>
                       </a:r>
+                      <a:endParaRPr lang="en-US" sz="2800" dirty="0"/>
                     </a:p>
                   </a:txBody>
                   <a:tcPr marL="60000" marR="60000" marT="18000" marB="18000" anchor="ctr">
@@ -5567,6 +5487,7 @@
                         <a:rPr lang="en-US" sz="2800" dirty="0"/>
                         <a:t>Univariable (prognostic)</a:t>
                       </a:r>
+                      <a:endParaRPr lang="en-US" sz="2800" dirty="0"/>
                     </a:p>
                   </a:txBody>
                   <a:tcPr marL="60000" marR="60000" marT="18000" marB="18000" anchor="ctr">
@@ -5595,6 +5516,7 @@
                         <a:rPr lang="en-US" sz="2800" dirty="0"/>
                         <a:t>0.68 (0.40–1.13)</a:t>
                       </a:r>
+                      <a:endParaRPr lang="en-US" sz="2800" dirty="0"/>
                     </a:p>
                   </a:txBody>
                   <a:tcPr marL="60000" marR="60000" marT="18000" marB="18000" anchor="ctr">
@@ -5623,6 +5545,7 @@
                         <a:rPr lang="en-US" sz="2800" dirty="0"/>
                         <a:t>0.14</a:t>
                       </a:r>
+                      <a:endParaRPr lang="en-US" sz="2800" dirty="0"/>
                     </a:p>
                   </a:txBody>
                   <a:tcPr marL="60000" marR="60000" marT="18000" marB="18000" anchor="ctr">
@@ -5651,6 +5574,7 @@
                         <a:rPr lang="en-US" sz="2800" dirty="0"/>
                         <a:t>–</a:t>
                       </a:r>
+                      <a:endParaRPr lang="en-US" sz="2800" dirty="0"/>
                     </a:p>
                   </a:txBody>
                   <a:tcPr marL="60000" marR="60000" marT="18000" marB="18000" anchor="ctr">
@@ -5677,8 +5601,9 @@
                       <a:pPr algn="ctr"/>
                       <a:r>
                         <a:rPr lang="en-US" sz="2800" dirty="0"/>
-                        <a:t>0.49 (0.28–0.84)</a:t>
+                        <a:t>0.39 (0.21–0.73)</a:t>
                       </a:r>
+                      <a:endParaRPr lang="en-US" sz="2800" dirty="0"/>
                     </a:p>
                   </a:txBody>
                   <a:tcPr marL="60000" marR="60000" marT="18000" marB="18000" anchor="ctr">
@@ -5705,8 +5630,9 @@
                       <a:pPr algn="ctr"/>
                       <a:r>
                         <a:rPr lang="en-US" sz="2800" dirty="0"/>
-                        <a:t>0.009</a:t>
+                        <a:t>0.003</a:t>
                       </a:r>
+                      <a:endParaRPr lang="en-US" sz="2800" dirty="0"/>
                     </a:p>
                   </a:txBody>
                   <a:tcPr marL="60000" marR="60000" marT="18000" marB="18000" anchor="ctr">
@@ -5735,6 +5661,7 @@
                         <a:rPr lang="en-US" sz="2800" dirty="0"/>
                         <a:t>–</a:t>
                       </a:r>
+                      <a:endParaRPr lang="en-US" sz="2800" dirty="0"/>
                     </a:p>
                   </a:txBody>
                   <a:tcPr marL="60000" marR="60000" marT="18000" marB="18000" anchor="ctr">
@@ -5753,11 +5680,6 @@
                     <a:noFill/>
                   </a:tcPr>
                 </a:tc>
-                <a:extLst>
-                  <a:ext uri="{0D108BD9-81ED-4DB2-BD59-A6C34878D82A}">
-                    <a16:rowId xmlns:a16="http://schemas.microsoft.com/office/drawing/2014/main" val="10004"/>
-                  </a:ext>
-                </a:extLst>
               </a:tr>
               <a:tr h="530352">
                 <a:tc>
@@ -5770,6 +5692,7 @@
                         <a:rPr lang="en-US" sz="2800" dirty="0"/>
                         <a:t>TLR ≥10% (week-9 landmark)†</a:t>
                       </a:r>
+                      <a:endParaRPr lang="en-US" sz="2800" dirty="0"/>
                     </a:p>
                   </a:txBody>
                   <a:tcPr marL="60000" marR="60000" marT="18000" marB="18000" anchor="ctr">
@@ -5798,6 +5721,7 @@
                         <a:rPr lang="en-US" sz="2800" dirty="0"/>
                         <a:t>Univariable (prognostic)</a:t>
                       </a:r>
+                      <a:endParaRPr lang="en-US" sz="2800" dirty="0"/>
                     </a:p>
                   </a:txBody>
                   <a:tcPr marL="60000" marR="60000" marT="18000" marB="18000" anchor="ctr">
@@ -5826,6 +5750,7 @@
                         <a:rPr lang="en-US" sz="2800" dirty="0"/>
                         <a:t>0.35 (0.21–0.61)</a:t>
                       </a:r>
+                      <a:endParaRPr lang="en-US" sz="2800" dirty="0"/>
                     </a:p>
                   </a:txBody>
                   <a:tcPr marL="60000" marR="60000" marT="18000" marB="18000" anchor="ctr">
@@ -5854,6 +5779,7 @@
                         <a:rPr lang="en-US" sz="2800" dirty="0"/>
                         <a:t>&lt;0.001</a:t>
                       </a:r>
+                      <a:endParaRPr lang="en-US" sz="2800" dirty="0"/>
                     </a:p>
                   </a:txBody>
                   <a:tcPr marL="60000" marR="60000" marT="18000" marB="18000" anchor="ctr">
@@ -5882,6 +5808,7 @@
                         <a:rPr lang="en-US" sz="2800" dirty="0"/>
                         <a:t>–</a:t>
                       </a:r>
+                      <a:endParaRPr lang="en-US" sz="2800" dirty="0"/>
                     </a:p>
                   </a:txBody>
                   <a:tcPr marL="60000" marR="60000" marT="18000" marB="18000" anchor="ctr">
@@ -5908,8 +5835,9 @@
                       <a:pPr algn="ctr"/>
                       <a:r>
                         <a:rPr lang="en-US" sz="2800" dirty="0"/>
-                        <a:t>0.35 (0.20–0.63)</a:t>
+                        <a:t>0.21 (0.11–0.42)</a:t>
                       </a:r>
+                      <a:endParaRPr lang="en-US" sz="2800" dirty="0"/>
                     </a:p>
                   </a:txBody>
                   <a:tcPr marL="60000" marR="60000" marT="18000" marB="18000" anchor="ctr">
@@ -5938,6 +5866,7 @@
                         <a:rPr lang="en-US" sz="2800" dirty="0"/>
                         <a:t>&lt;0.001</a:t>
                       </a:r>
+                      <a:endParaRPr lang="en-US" sz="2800" dirty="0"/>
                     </a:p>
                   </a:txBody>
                   <a:tcPr marL="60000" marR="60000" marT="18000" marB="18000" anchor="ctr">
@@ -5966,6 +5895,7 @@
                         <a:rPr lang="en-US" sz="2800" dirty="0"/>
                         <a:t>–</a:t>
                       </a:r>
+                      <a:endParaRPr lang="en-US" sz="2800" dirty="0"/>
                     </a:p>
                   </a:txBody>
                   <a:tcPr marL="60000" marR="60000" marT="18000" marB="18000" anchor="ctr">
@@ -5984,11 +5914,6 @@
                     <a:noFill/>
                   </a:tcPr>
                 </a:tc>
-                <a:extLst>
-                  <a:ext uri="{0D108BD9-81ED-4DB2-BD59-A6C34878D82A}">
-                    <a16:rowId xmlns:a16="http://schemas.microsoft.com/office/drawing/2014/main" val="10005"/>
-                  </a:ext>
-                </a:extLst>
               </a:tr>
               <a:tr h="530352">
                 <a:tc>
@@ -6001,6 +5926,7 @@
                         <a:rPr lang="en-US" sz="2800" dirty="0"/>
                         <a:t>CRP × treatment</a:t>
                       </a:r>
+                      <a:endParaRPr lang="en-US" sz="2800" dirty="0"/>
                     </a:p>
                   </a:txBody>
                   <a:tcPr marL="60000" marR="60000" marT="18000" marB="18000" anchor="ctr">
@@ -6029,6 +5955,7 @@
                         <a:rPr lang="en-US" sz="2800" dirty="0"/>
                         <a:t>Unified interaction model</a:t>
                       </a:r>
+                      <a:endParaRPr lang="en-US" sz="2800" dirty="0"/>
                     </a:p>
                   </a:txBody>
                   <a:tcPr marL="60000" marR="60000" marT="18000" marB="18000" anchor="ctr">
@@ -6057,6 +5984,7 @@
                         <a:rPr lang="en-US" sz="2800" dirty="0"/>
                         <a:t>0.65 (0.19–2.60)</a:t>
                       </a:r>
+                      <a:endParaRPr lang="en-US" sz="2800" dirty="0"/>
                     </a:p>
                   </a:txBody>
                   <a:tcPr marL="60000" marR="60000" marT="18000" marB="18000" anchor="ctr">
@@ -6085,6 +6013,7 @@
                         <a:rPr lang="en-US" sz="2800" dirty="0"/>
                         <a:t>0.52</a:t>
                       </a:r>
+                      <a:endParaRPr lang="en-US" sz="2800" dirty="0"/>
                     </a:p>
                   </a:txBody>
                   <a:tcPr marL="60000" marR="60000" marT="18000" marB="18000" anchor="ctr">
@@ -6111,8 +6040,9 @@
                       <a:pPr algn="ctr"/>
                       <a:r>
                         <a:rPr lang="en-US" sz="2800" dirty="0"/>
-                        <a:t>0.40</a:t>
+                        <a:t>0.80</a:t>
                       </a:r>
+                      <a:endParaRPr lang="en-US" sz="2800" dirty="0"/>
                     </a:p>
                   </a:txBody>
                   <a:tcPr marL="60000" marR="60000" marT="18000" marB="18000" anchor="ctr">
@@ -6139,8 +6069,9 @@
                       <a:pPr algn="ctr"/>
                       <a:r>
                         <a:rPr lang="en-US" sz="2800" dirty="0"/>
-                        <a:t>0.42 (0.11–1.68)</a:t>
+                        <a:t>0.26 (0.06–1.34)</a:t>
                       </a:r>
+                      <a:endParaRPr lang="en-US" sz="2800" dirty="0"/>
                     </a:p>
                   </a:txBody>
                   <a:tcPr marL="60000" marR="60000" marT="18000" marB="18000" anchor="ctr">
@@ -6167,8 +6098,9 @@
                       <a:pPr algn="ctr"/>
                       <a:r>
                         <a:rPr lang="en-US" sz="2800" dirty="0"/>
-                        <a:t>0.21</a:t>
+                        <a:t>0.10</a:t>
                       </a:r>
+                      <a:endParaRPr lang="en-US" sz="2800" dirty="0"/>
                     </a:p>
                   </a:txBody>
                   <a:tcPr marL="60000" marR="60000" marT="18000" marB="18000" anchor="ctr">
@@ -6195,8 +6127,9 @@
                       <a:pPr algn="ctr"/>
                       <a:r>
                         <a:rPr lang="en-US" sz="2800" dirty="0"/>
-                        <a:t>0.33</a:t>
+                        <a:t>0.66</a:t>
                       </a:r>
+                      <a:endParaRPr lang="en-US" sz="2800" dirty="0"/>
                     </a:p>
                   </a:txBody>
                   <a:tcPr marL="60000" marR="60000" marT="18000" marB="18000" anchor="ctr">
@@ -6215,11 +6148,6 @@
                     <a:noFill/>
                   </a:tcPr>
                 </a:tc>
-                <a:extLst>
-                  <a:ext uri="{0D108BD9-81ED-4DB2-BD59-A6C34878D82A}">
-                    <a16:rowId xmlns:a16="http://schemas.microsoft.com/office/drawing/2014/main" val="10006"/>
-                  </a:ext>
-                </a:extLst>
               </a:tr>
               <a:tr h="530352">
                 <a:tc>
@@ -6238,8 +6166,9 @@
                       </a:r>
                       <a:r>
                         <a:rPr lang="en-US" sz="2800" dirty="0"/>
-                        <a:t> × treatment</a:t>
+                        <a:t xml:space="preserve"> × treatment</a:t>
                       </a:r>
+                      <a:endParaRPr lang="en-US" sz="2800" dirty="0"/>
                     </a:p>
                   </a:txBody>
                   <a:tcPr marL="60000" marR="60000" marT="18000" marB="18000" anchor="ctr">
@@ -6268,6 +6197,7 @@
                         <a:rPr lang="en-US" sz="2800" dirty="0"/>
                         <a:t>Unified interaction model</a:t>
                       </a:r>
+                      <a:endParaRPr lang="en-US" sz="2800" dirty="0"/>
                     </a:p>
                   </a:txBody>
                   <a:tcPr marL="60000" marR="60000" marT="18000" marB="18000" anchor="ctr">
@@ -6296,6 +6226,7 @@
                         <a:rPr lang="en-US" sz="2800" dirty="0"/>
                         <a:t>0.95 (0.32–2.82)</a:t>
                       </a:r>
+                      <a:endParaRPr lang="en-US" sz="2800" dirty="0"/>
                     </a:p>
                   </a:txBody>
                   <a:tcPr marL="60000" marR="60000" marT="18000" marB="18000" anchor="ctr">
@@ -6324,6 +6255,7 @@
                         <a:rPr lang="en-US" sz="2800" dirty="0"/>
                         <a:t>0.92</a:t>
                       </a:r>
+                      <a:endParaRPr lang="en-US" sz="2800" dirty="0"/>
                     </a:p>
                   </a:txBody>
                   <a:tcPr marL="60000" marR="60000" marT="18000" marB="18000" anchor="ctr">
@@ -6350,8 +6282,9 @@
                       <a:pPr algn="ctr"/>
                       <a:r>
                         <a:rPr lang="en-US" sz="2800" dirty="0"/>
-                        <a:t>0.86</a:t>
+                        <a:t>0.91</a:t>
                       </a:r>
+                      <a:endParaRPr lang="en-US" sz="2800" dirty="0"/>
                     </a:p>
                   </a:txBody>
                   <a:tcPr marL="60000" marR="60000" marT="18000" marB="18000" anchor="ctr">
@@ -6378,8 +6311,9 @@
                       <a:pPr algn="ctr"/>
                       <a:r>
                         <a:rPr lang="en-US" sz="2800" dirty="0"/>
-                        <a:t>0.66 (0.21–2.05)</a:t>
+                        <a:t>0.65 (0.18–2.41)</a:t>
                       </a:r>
+                      <a:endParaRPr lang="en-US" sz="2800" dirty="0"/>
                     </a:p>
                   </a:txBody>
                   <a:tcPr marL="60000" marR="60000" marT="18000" marB="18000" anchor="ctr">
@@ -6406,8 +6340,9 @@
                       <a:pPr algn="ctr"/>
                       <a:r>
                         <a:rPr lang="en-US" sz="2800" dirty="0"/>
-                        <a:t>0.47</a:t>
+                        <a:t>0.52</a:t>
                       </a:r>
+                      <a:endParaRPr lang="en-US" sz="2800" dirty="0"/>
                     </a:p>
                   </a:txBody>
                   <a:tcPr marL="60000" marR="60000" marT="18000" marB="18000" anchor="ctr">
@@ -6434,8 +6369,9 @@
                       <a:pPr algn="ctr"/>
                       <a:r>
                         <a:rPr lang="en-US" sz="2800" dirty="0"/>
-                        <a:t>0.51</a:t>
+                        <a:t>0.74</a:t>
                       </a:r>
+                      <a:endParaRPr lang="en-US" sz="2800" dirty="0"/>
                     </a:p>
                   </a:txBody>
                   <a:tcPr marL="60000" marR="60000" marT="18000" marB="18000" anchor="ctr">
@@ -6454,11 +6390,6 @@
                     <a:noFill/>
                   </a:tcPr>
                 </a:tc>
-                <a:extLst>
-                  <a:ext uri="{0D108BD9-81ED-4DB2-BD59-A6C34878D82A}">
-                    <a16:rowId xmlns:a16="http://schemas.microsoft.com/office/drawing/2014/main" val="10007"/>
-                  </a:ext>
-                </a:extLst>
               </a:tr>
               <a:tr h="530352">
                 <a:tc>
@@ -6471,6 +6402,7 @@
                         <a:rPr lang="en-US" sz="2800" dirty="0"/>
                         <a:t>TLR × treatment</a:t>
                       </a:r>
+                      <a:endParaRPr lang="en-US" sz="2800" dirty="0"/>
                     </a:p>
                   </a:txBody>
                   <a:tcPr marL="60000" marR="60000" marT="18000" marB="18000" anchor="ctr">
@@ -6503,6 +6435,7 @@
                         <a:rPr lang="en-US" sz="2800" dirty="0"/>
                         <a:t>Landmark responder model†</a:t>
                       </a:r>
+                      <a:endParaRPr lang="en-US" sz="2800" dirty="0"/>
                     </a:p>
                   </a:txBody>
                   <a:tcPr marL="60000" marR="60000" marT="18000" marB="18000" anchor="ctr">
@@ -6535,6 +6468,7 @@
                         <a:rPr lang="en-US" sz="2800" dirty="0"/>
                         <a:t>2.47 (0.75–7.75)</a:t>
                       </a:r>
+                      <a:endParaRPr lang="en-US" sz="2800" dirty="0"/>
                     </a:p>
                   </a:txBody>
                   <a:tcPr marL="60000" marR="60000" marT="18000" marB="18000" anchor="ctr">
@@ -6567,6 +6501,7 @@
                         <a:rPr lang="en-US" sz="2800" dirty="0"/>
                         <a:t>0.14</a:t>
                       </a:r>
+                      <a:endParaRPr lang="en-US" sz="2800" dirty="0"/>
                     </a:p>
                   </a:txBody>
                   <a:tcPr marL="60000" marR="60000" marT="18000" marB="18000" anchor="ctr">
@@ -6597,8 +6532,9 @@
                       <a:pPr algn="ctr"/>
                       <a:r>
                         <a:rPr lang="en-US" sz="2800" dirty="0"/>
-                        <a:t>–</a:t>
+                        <a:t>1.13‡</a:t>
                       </a:r>
+                      <a:endParaRPr lang="en-US" sz="2800" dirty="0"/>
                     </a:p>
                   </a:txBody>
                   <a:tcPr marL="60000" marR="60000" marT="18000" marB="18000" anchor="ctr">
@@ -6629,8 +6565,9 @@
                       <a:pPr algn="ctr"/>
                       <a:r>
                         <a:rPr lang="en-US" sz="2800" dirty="0"/>
-                        <a:t>1.88 (0.52–6.38)</a:t>
+                        <a:t>0.88 (0.21–3.38)</a:t>
                       </a:r>
+                      <a:endParaRPr lang="en-US" sz="2800" dirty="0"/>
                     </a:p>
                   </a:txBody>
                   <a:tcPr marL="60000" marR="60000" marT="18000" marB="18000" anchor="ctr">
@@ -6661,8 +6598,9 @@
                       <a:pPr algn="ctr"/>
                       <a:r>
                         <a:rPr lang="en-US" sz="2800" dirty="0"/>
-                        <a:t>0.33</a:t>
+                        <a:t>0.85</a:t>
                       </a:r>
+                      <a:endParaRPr lang="en-US" sz="2800" dirty="0"/>
                     </a:p>
                   </a:txBody>
                   <a:tcPr marL="60000" marR="60000" marT="18000" marB="18000" anchor="ctr">
@@ -6693,8 +6631,9 @@
                       <a:pPr algn="ctr"/>
                       <a:r>
                         <a:rPr lang="en-US" sz="2800" dirty="0"/>
-                        <a:t>–</a:t>
+                        <a:t>0.63</a:t>
                       </a:r>
+                      <a:endParaRPr lang="en-US" sz="2800" dirty="0"/>
                     </a:p>
                   </a:txBody>
                   <a:tcPr marL="60000" marR="60000" marT="18000" marB="18000" anchor="ctr">
@@ -6717,11 +6656,6 @@
                     <a:noFill/>
                   </a:tcPr>
                 </a:tc>
-                <a:extLst>
-                  <a:ext uri="{0D108BD9-81ED-4DB2-BD59-A6C34878D82A}">
-                    <a16:rowId xmlns:a16="http://schemas.microsoft.com/office/drawing/2014/main" val="10008"/>
-                  </a:ext>
-                </a:extLst>
               </a:tr>
             </a:tbl>
           </a:graphicData>
@@ -6767,58 +6701,96 @@
           </a:fontRef>
         </p:style>
         <p:txBody>
-          <a:bodyPr lIns="109728" tIns="36576" rIns="109728" bIns="36576" rtlCol="0" anchor="ctr">
+          <a:bodyPr lIns="109728" rIns="109728" tIns="36576" bIns="36576" rtlCol="0" anchor="ctr">
             <a:noAutofit/>
           </a:bodyPr>
           <a:lstStyle/>
           <a:p>
             <a:r>
-              <a:rPr lang="en-US" sz="2400" dirty="0"/>
-              <a:t>n = 68; p = PLRT. </a:t>
-            </a:r>
-            <a:r>
-              <a:rPr lang="en-US" sz="2400" b="1" dirty="0"/>
-              <a:t>Unified model: </a:t>
-            </a:r>
-            <a:r>
-              <a:rPr lang="en-US" sz="2400" dirty="0"/>
+              <a:rPr lang="en-US" sz="2200" dirty="0"/>
+              <a:t xml:space="preserve">n = 68; p = penalized likelihood-ratio test. </a:t>
+            </a:r>
+            <a:r>
+              <a:rPr lang="en-US" sz="2200" b="1" dirty="0"/>
+              <a:t xml:space="preserve">Unified model: </a:t>
+            </a:r>
+            <a:r>
+              <a:rPr lang="en-US" sz="2200" dirty="0"/>
               <a:t>age + sex + treatment + CRP + TMB/</a:t>
             </a:r>
             <a:r>
-              <a:rPr lang="en-US" sz="2400" i="1" dirty="0"/>
+              <a:rPr lang="en-US" sz="2200" i="1" dirty="0"/>
               <a:t>BRAF</a:t>
             </a:r>
             <a:r>
-              <a:rPr lang="en-US" sz="2400" dirty="0"/>
-              <a:t> + both treatment × biomarker interactions. </a:t>
-            </a:r>
-            <a:r>
-              <a:rPr lang="en-US" sz="2400" b="1" dirty="0"/>
-              <a:t>Ridge: </a:t>
-            </a:r>
-            <a:r>
-              <a:rPr lang="en-US" sz="2400" dirty="0"/>
-              <a:t>L2-penalized Cox, point estimates. </a:t>
-            </a:r>
-            <a:br>
-              <a:rPr lang="en-US" sz="2400" dirty="0"/>
-            </a:br>
-            <a:r>
-              <a:rPr lang="en-US" sz="2400" b="1" dirty="0"/>
+              <a:rPr lang="en-US" sz="2200" dirty="0"/>
+              <a:t xml:space="preserve"> + both treatment × biomarker interactions. </a:t>
+            </a:r>
+            <a:r>
+              <a:rPr lang="en-US" sz="2200" b="1" dirty="0"/>
+              <a:t xml:space="preserve">Ridge: </a:t>
+            </a:r>
+            <a:r>
+              <a:rPr lang="en-US" sz="2200" dirty="0"/>
+              <a:t xml:space="preserve">L2-penalized Cox with cross-validated penalty on the biomarker (or TLR) main effects and interactions; point estimates. </a:t>
+            </a:r>
+            <a:r>
+              <a:rPr lang="en-US" sz="2200" b="1" dirty="0"/>
               <a:t>†</a:t>
             </a:r>
             <a:r>
-              <a:rPr lang="en-US" sz="2400" dirty="0"/>
-              <a:t>Week-9 landmark, TLR-classified patients (n = 65 OS, 60 PFS); the responder model adjusts for age, sex, CRP and TMB/</a:t>
-            </a:r>
-            <a:r>
-              <a:rPr lang="en-US" sz="2400" i="1" dirty="0"/>
+              <a:rPr lang="en-US" sz="2200" dirty="0"/>
+              <a:t>Week-9 landmark, TLR-classified patients (n = 65 OS, 56 PFS); the responder model adjusts for age, sex, CRP and TMB/</a:t>
+            </a:r>
+            <a:r>
+              <a:rPr lang="en-US" sz="2200" i="1" dirty="0"/>
               <a:t>BRAF</a:t>
             </a:r>
             <a:r>
-              <a:rPr lang="en-US" sz="2400" dirty="0"/>
-              <a:t>; TLR is measured on treatment, so this is not a treatment-selection estimate.</a:t>
-            </a:r>
+              <a:rPr lang="en-US" sz="2200" dirty="0"/>
+              <a:t xml:space="preserve">; TLR is measured on treatment, so this is not a treatment-selection estimate. </a:t>
+            </a:r>
+            <a:r>
+              <a:rPr lang="en-US" sz="2200" b="1" dirty="0"/>
+              <a:t>‡</a:t>
+            </a:r>
+            <a:r>
+              <a:rPr lang="en-US" sz="2200" dirty="0"/>
+              <a:t xml:space="preserve">0.92–1.80 across cross-validation splits. </a:t>
+            </a:r>
+            <a:r>
+              <a:rPr lang="en-US" sz="2200" b="1" dirty="0"/>
+              <a:t>CI</a:t>
+            </a:r>
+            <a:r>
+              <a:rPr lang="en-US" sz="2200" dirty="0"/>
+              <a:t xml:space="preserve">, confidence interval; </a:t>
+            </a:r>
+            <a:r>
+              <a:rPr lang="en-US" sz="2200" b="1" dirty="0"/>
+              <a:t>HR</a:t>
+            </a:r>
+            <a:r>
+              <a:rPr lang="en-US" sz="2200" dirty="0"/>
+              <a:t xml:space="preserve">, hazard ratio; </a:t>
+            </a:r>
+            <a:r>
+              <a:rPr lang="en-US" sz="2200" b="1" dirty="0"/>
+              <a:t>TLR</a:t>
+            </a:r>
+            <a:r>
+              <a:rPr lang="en-US" sz="2200" dirty="0"/>
+              <a:t xml:space="preserve">, target lesion reduction; </a:t>
+            </a:r>
+            <a:r>
+              <a:rPr lang="en-US" sz="2200" b="1" dirty="0"/>
+              <a:t>TMB</a:t>
+            </a:r>
+            <a:r>
+              <a:rPr lang="en-US" sz="2200" dirty="0"/>
+              <a:t>, tumor mutational burden.</a:t>
+            </a:r>
+            <a:endParaRPr lang="en-US" sz="2200" dirty="0"/>
           </a:p>
         </p:txBody>
       </p:sp>
@@ -6831,7 +6803,7 @@
           <p:nvPr/>
         </p:nvPicPr>
         <p:blipFill>
-          <a:blip r:embed="rId5"/>
+          <a:blip r:embed="rId6"/>
           <a:stretch>
             <a:fillRect/>
           </a:stretch>
@@ -6854,8 +6826,8 @@
         </p:nvSpPr>
         <p:spPr>
           <a:xfrm>
-            <a:off x="12931775" y="26654760"/>
-            <a:ext cx="37936297" cy="1046989"/>
+            <a:off x="365760" y="26654760"/>
+            <a:ext cx="50502312" cy="868680"/>
           </a:xfrm>
           <a:prstGeom prst="roundRect">
             <a:avLst/>
@@ -6878,7 +6850,7 @@
           <a:p>
             <a:pPr algn="ctr"/>
             <a:r>
-              <a:rPr lang="en-US" sz="6600" b="1" dirty="0">
+              <a:rPr lang="en-US" sz="5400" b="1" dirty="0">
                 <a:solidFill>
                   <a:prstClr val="white"/>
                 </a:solidFill>
@@ -6899,8 +6871,8 @@
         </p:nvSpPr>
         <p:spPr>
           <a:xfrm>
-            <a:off x="12931776" y="27961047"/>
-            <a:ext cx="37936296" cy="1744676"/>
+            <a:off x="365760" y="27706320"/>
+            <a:ext cx="50502312" cy="2011680"/>
           </a:xfrm>
           <a:prstGeom prst="roundRect">
             <a:avLst/>
@@ -6939,14 +6911,7 @@
             <a:pPr algn="ctr"/>
             <a:r>
               <a:rPr lang="en-US" sz="4400" b="1" dirty="0"/>
-              <a:t>In this exploratory analysis, biomarker signals in MSS/pMMR mCRC were predominantly prognostic rather than predictive. </a:t>
-            </a:r>
-          </a:p>
-          <a:p>
-            <a:pPr algn="ctr"/>
-            <a:r>
-              <a:rPr lang="en-US" sz="4400" b="1" dirty="0"/>
-              <a:t>The CRP × treatment interaction for PFS is hypothesis-generating, and evaluation in adequately powered prospective studies could be considered.</a:t>
+              <a:t>In this exploratory analysis, biomarker signals in MSS/pMMR mCRC were predominantly prognostic rather than predictive. The CRP × treatment interaction for PFS is hypothesis-generating and warrants evaluation in adequately powered prospective studies.</a:t>
             </a:r>
           </a:p>
         </p:txBody>
@@ -6960,7 +6925,7 @@
           <p:nvPr/>
         </p:nvPicPr>
         <p:blipFill>
-          <a:blip r:embed="rId6"/>
+          <a:blip r:embed="rId4"/>
           <a:srcRect b="50329"/>
           <a:stretch>
             <a:fillRect/>
@@ -7000,19 +6965,19 @@
           <a:p>
             <a:r>
               <a:rPr lang="en-US" sz="2400" b="1" dirty="0"/>
-              <a:t>Disclosure: </a:t>
+              <a:t xml:space="preserve">Disclosure: </a:t>
             </a:r>
             <a:r>
               <a:rPr lang="en-US" sz="2400" dirty="0"/>
-              <a:t>B.P. Geisler has no potential conflicts of interest to declare. </a:t>
+              <a:t xml:space="preserve">B.P. Geisler has no potential conflicts of interest to declare. </a:t>
             </a:r>
             <a:r>
               <a:rPr lang="en-US" sz="2400" b="1" dirty="0"/>
-              <a:t>Funding: </a:t>
+              <a:t xml:space="preserve">Funding: </a:t>
             </a:r>
             <a:r>
               <a:rPr lang="en-US" sz="2400" dirty="0"/>
-              <a:t>Study sponsored by Horizon Europe (101094938; ASCERTAIN project, www.access2meds.eu), Research Council of Norway (296114), Norwegian Cancer Society (215613 and 245151), South-Eastern Regional Health Authority (2018054), and Bristol-Myers Squibb and Sigma2 AS (in-kind donations). Views and opinions expressed are, however, those of the authors only and do not necessarily reflect those of the European Union or the European Health and Digital Executive Agency (HaDEA).</a:t>
+              <a:t>Study sponsored by European Union, Research Council of Norway, Norwegian Cancer Society, South-Eastern Regional Health Authority, and Bristol-Myers Squibb and Sigma2 AS (in-kind donations). Views and opinions expressed are, however, those of the authors only and do not necessarily reflect those of the European Union or the European Health and Digital Executive Agency (HaDEA).</a:t>
             </a:r>
           </a:p>
         </p:txBody>
@@ -7041,7 +7006,7 @@
           <a:p>
             <a:r>
               <a:rPr lang="en-US" sz="4400" b="1" baseline="30000" dirty="0"/>
-              <a:t>@ </a:t>
+              <a:t xml:space="preserve">@ </a:t>
             </a:r>
             <a:r>
               <a:rPr lang="en-US" sz="4400" b="1" dirty="0"/>
@@ -7059,7 +7024,7 @@
           <p:nvPr/>
         </p:nvPicPr>
         <p:blipFill>
-          <a:blip r:embed="rId7"/>
+          <a:blip r:embed="rId3"/>
           <a:stretch>
             <a:fillRect/>
           </a:stretch>
@@ -7074,170 +7039,6 @@
           </a:prstGeom>
         </p:spPr>
       </p:pic>
-      <p:sp>
-        <p:nvSpPr>
-          <p:cNvPr id="3" name="Methods header">
-            <a:extLst>
-              <a:ext uri="{FF2B5EF4-FFF2-40B4-BE49-F238E27FC236}">
-                <a16:creationId xmlns:a16="http://schemas.microsoft.com/office/drawing/2014/main" id="{5A6E1F6F-0F4A-7E1A-3A27-3D274F09E741}"/>
-              </a:ext>
-            </a:extLst>
-          </p:cNvPr>
-          <p:cNvSpPr/>
-          <p:nvPr/>
-        </p:nvSpPr>
-        <p:spPr>
-          <a:xfrm>
-            <a:off x="365760" y="26692641"/>
-            <a:ext cx="12139313" cy="1047516"/>
-          </a:xfrm>
-          <a:prstGeom prst="roundRect">
-            <a:avLst/>
-          </a:prstGeom>
-          <a:solidFill>
-            <a:srgbClr val="0093C8"/>
-          </a:solidFill>
-          <a:ln w="12700" cap="flat" cmpd="sng" algn="ctr">
-            <a:solidFill>
-              <a:srgbClr val="0093C8"/>
-            </a:solidFill>
-            <a:prstDash val="solid"/>
-            <a:miter lim="800000"/>
-          </a:ln>
-          <a:effectLst/>
-        </p:spPr>
-        <p:txBody>
-          <a:bodyPr rtlCol="0" anchor="ctr"/>
-          <a:lstStyle/>
-          <a:p>
-            <a:pPr algn="ctr"/>
-            <a:r>
-              <a:rPr lang="en-US" sz="5400" b="1" dirty="0">
-                <a:solidFill>
-                  <a:prstClr val="white"/>
-                </a:solidFill>
-                <a:latin typeface="Calibri" panose="020F0502020204030204"/>
-              </a:rPr>
-              <a:t>Abbreviations</a:t>
-            </a:r>
-            <a:endParaRPr lang="en-US" sz="5400" b="1" dirty="0">
-              <a:solidFill>
-                <a:prstClr val="white"/>
-              </a:solidFill>
-              <a:latin typeface="Calibri" panose="020F0502020204030204"/>
-              <a:ea typeface="+mn-ea"/>
-              <a:cs typeface="+mn-cs"/>
-            </a:endParaRPr>
-          </a:p>
-        </p:txBody>
-      </p:sp>
-      <p:sp>
-        <p:nvSpPr>
-          <p:cNvPr id="4" name="Background box">
-            <a:extLst>
-              <a:ext uri="{FF2B5EF4-FFF2-40B4-BE49-F238E27FC236}">
-                <a16:creationId xmlns:a16="http://schemas.microsoft.com/office/drawing/2014/main" id="{62E96ED5-270A-4981-6405-CC98BDB881C6}"/>
-              </a:ext>
-            </a:extLst>
-          </p:cNvPr>
-          <p:cNvSpPr/>
-          <p:nvPr/>
-        </p:nvSpPr>
-        <p:spPr>
-          <a:xfrm>
-            <a:off x="329183" y="27949161"/>
-            <a:ext cx="12178729" cy="1756562"/>
-          </a:xfrm>
-          <a:prstGeom prst="roundRect">
-            <a:avLst/>
-          </a:prstGeom>
-          <a:solidFill>
-            <a:schemeClr val="lt1">
-              <a:alpha val="0"/>
-            </a:schemeClr>
-          </a:solidFill>
-          <a:ln w="28575">
-            <a:solidFill>
-              <a:srgbClr val="0093C8"/>
-            </a:solidFill>
-          </a:ln>
-        </p:spPr>
-        <p:style>
-          <a:lnRef idx="2">
-            <a:schemeClr val="accent1"/>
-          </a:lnRef>
-          <a:fillRef idx="1">
-            <a:schemeClr val="lt1"/>
-          </a:fillRef>
-          <a:effectRef idx="0">
-            <a:schemeClr val="accent1"/>
-          </a:effectRef>
-          <a:fontRef idx="minor">
-            <a:schemeClr val="dk1"/>
-          </a:fontRef>
-        </p:style>
-        <p:txBody>
-          <a:bodyPr rtlCol="0" anchor="ctr">
-            <a:noAutofit/>
-          </a:bodyPr>
-          <a:lstStyle/>
-          <a:p>
-            <a:pPr>
-              <a:spcAft>
-                <a:spcPts val="1200"/>
-              </a:spcAft>
-            </a:pPr>
-            <a:r>
-              <a:rPr lang="en-US" sz="3200" b="1" dirty="0"/>
-              <a:t>CRP</a:t>
-            </a:r>
-            <a:r>
-              <a:rPr lang="en-US" sz="3200" dirty="0"/>
-              <a:t>: C-reactive protein – </a:t>
-            </a:r>
-            <a:r>
-              <a:rPr lang="en-US" sz="3200" b="1" dirty="0"/>
-              <a:t>OS</a:t>
-            </a:r>
-            <a:r>
-              <a:rPr lang="en-US" sz="3200" dirty="0"/>
-              <a:t>: overall survival – </a:t>
-            </a:r>
-            <a:r>
-              <a:rPr lang="en-US" sz="3200" b="1" dirty="0"/>
-              <a:t>PFS</a:t>
-            </a:r>
-            <a:r>
-              <a:rPr lang="en-US" sz="3200" dirty="0"/>
-              <a:t>: progression-free survival – </a:t>
-            </a:r>
-            <a:r>
-              <a:rPr lang="en-US" sz="3200" b="1" dirty="0"/>
-              <a:t>PLRT</a:t>
-            </a:r>
-            <a:r>
-              <a:rPr lang="en-US" sz="3200" dirty="0"/>
-              <a:t>: penalized likelihood-ratio tests – </a:t>
-            </a:r>
-            <a:r>
-              <a:rPr lang="en-US" sz="3200" b="1" dirty="0"/>
-              <a:t>TLR</a:t>
-            </a:r>
-            <a:r>
-              <a:rPr lang="en-US" sz="3200" dirty="0"/>
-              <a:t>: target lesion reduction – </a:t>
-            </a:r>
-            <a:r>
-              <a:rPr lang="en-US" sz="3200" b="1" dirty="0"/>
-              <a:t>TMB</a:t>
-            </a:r>
-            <a:r>
-              <a:rPr lang="en-US" sz="3200" dirty="0"/>
-              <a:t>: tumor mutational burden</a:t>
-            </a:r>
-          </a:p>
-        </p:txBody>
-      </p:sp>
     </p:spTree>
   </p:cSld>
   <p:clrMapOvr>

--- a/outputs/vignettes/poster_ESMO.pptx
+++ b/outputs/vignettes/poster_ESMO.pptx
@@ -208,7 +208,7 @@
           <a:p>
             <a:fld id="{89CEAEC2-C692-4B46-978F-109B22A150D2}" type="datetimeFigureOut">
               <a:rPr lang="en-US" smtClean="0"/>
-              <a:t>9/18/2026</a:t>
+              <a:t>9/28/2026</a:t>
             </a:fld>
             <a:endParaRPr lang="en-US" dirty="0"/>
           </a:p>
@@ -703,7 +703,7 @@
           <a:p>
             <a:fld id="{EDF32165-6009-0A44-BE1F-48670E89FB19}" type="datetimeFigureOut">
               <a:rPr lang="en-US" smtClean="0"/>
-              <a:t>9/18/2026</a:t>
+              <a:t>9/28/2026</a:t>
             </a:fld>
             <a:endParaRPr lang="en-US" dirty="0"/>
           </a:p>
@@ -873,7 +873,7 @@
           <a:p>
             <a:fld id="{EDF32165-6009-0A44-BE1F-48670E89FB19}" type="datetimeFigureOut">
               <a:rPr lang="en-US" smtClean="0"/>
-              <a:t>9/18/2026</a:t>
+              <a:t>9/28/2026</a:t>
             </a:fld>
             <a:endParaRPr lang="en-US" dirty="0"/>
           </a:p>
@@ -1053,7 +1053,7 @@
           <a:p>
             <a:fld id="{EDF32165-6009-0A44-BE1F-48670E89FB19}" type="datetimeFigureOut">
               <a:rPr lang="en-US" smtClean="0"/>
-              <a:t>9/18/2026</a:t>
+              <a:t>9/28/2026</a:t>
             </a:fld>
             <a:endParaRPr lang="en-US" dirty="0"/>
           </a:p>
@@ -1223,7 +1223,7 @@
           <a:p>
             <a:fld id="{EDF32165-6009-0A44-BE1F-48670E89FB19}" type="datetimeFigureOut">
               <a:rPr lang="en-US" smtClean="0"/>
-              <a:t>9/18/2026</a:t>
+              <a:t>9/28/2026</a:t>
             </a:fld>
             <a:endParaRPr lang="en-US" dirty="0"/>
           </a:p>
@@ -1469,7 +1469,7 @@
           <a:p>
             <a:fld id="{EDF32165-6009-0A44-BE1F-48670E89FB19}" type="datetimeFigureOut">
               <a:rPr lang="en-US" smtClean="0"/>
-              <a:t>9/18/2026</a:t>
+              <a:t>9/28/2026</a:t>
             </a:fld>
             <a:endParaRPr lang="en-US" dirty="0"/>
           </a:p>
@@ -1701,7 +1701,7 @@
           <a:p>
             <a:fld id="{EDF32165-6009-0A44-BE1F-48670E89FB19}" type="datetimeFigureOut">
               <a:rPr lang="en-US" smtClean="0"/>
-              <a:t>9/18/2026</a:t>
+              <a:t>9/28/2026</a:t>
             </a:fld>
             <a:endParaRPr lang="en-US" dirty="0"/>
           </a:p>
@@ -2068,7 +2068,7 @@
           <a:p>
             <a:fld id="{EDF32165-6009-0A44-BE1F-48670E89FB19}" type="datetimeFigureOut">
               <a:rPr lang="en-US" smtClean="0"/>
-              <a:t>9/18/2026</a:t>
+              <a:t>9/28/2026</a:t>
             </a:fld>
             <a:endParaRPr lang="en-US" dirty="0"/>
           </a:p>
@@ -2186,7 +2186,7 @@
           <a:p>
             <a:fld id="{EDF32165-6009-0A44-BE1F-48670E89FB19}" type="datetimeFigureOut">
               <a:rPr lang="en-US" smtClean="0"/>
-              <a:t>9/18/2026</a:t>
+              <a:t>9/28/2026</a:t>
             </a:fld>
             <a:endParaRPr lang="en-US" dirty="0"/>
           </a:p>
@@ -2281,7 +2281,7 @@
           <a:p>
             <a:fld id="{EDF32165-6009-0A44-BE1F-48670E89FB19}" type="datetimeFigureOut">
               <a:rPr lang="en-US" smtClean="0"/>
-              <a:t>9/18/2026</a:t>
+              <a:t>9/28/2026</a:t>
             </a:fld>
             <a:endParaRPr lang="en-US" dirty="0"/>
           </a:p>
@@ -2558,7 +2558,7 @@
           <a:p>
             <a:fld id="{EDF32165-6009-0A44-BE1F-48670E89FB19}" type="datetimeFigureOut">
               <a:rPr lang="en-US" smtClean="0"/>
-              <a:t>9/18/2026</a:t>
+              <a:t>9/28/2026</a:t>
             </a:fld>
             <a:endParaRPr lang="en-US" dirty="0"/>
           </a:p>
@@ -2814,7 +2814,7 @@
           <a:p>
             <a:fld id="{EDF32165-6009-0A44-BE1F-48670E89FB19}" type="datetimeFigureOut">
               <a:rPr lang="en-US" smtClean="0"/>
-              <a:t>9/18/2026</a:t>
+              <a:t>9/28/2026</a:t>
             </a:fld>
             <a:endParaRPr lang="en-US" dirty="0"/>
           </a:p>
@@ -3027,7 +3027,7 @@
           <a:p>
             <a:fld id="{EDF32165-6009-0A44-BE1F-48670E89FB19}" type="datetimeFigureOut">
               <a:rPr lang="en-US" smtClean="0"/>
-              <a:t>9/18/2026</a:t>
+              <a:t>9/28/2026</a:t>
             </a:fld>
             <a:endParaRPr lang="en-US" dirty="0"/>
           </a:p>
@@ -3483,21 +3483,17 @@
                 <a:latin typeface="Arial" panose="020B0604020202020204" pitchFamily="34" charset="0"/>
                 <a:cs typeface="Arial" panose="020B0604020202020204" pitchFamily="34" charset="0"/>
               </a:rPr>
-              <a:t>Biomarker signals in MSS/pMMR metastatic colorectal cancer (mCRC) are predominantly prognostic, not predictive</a:t>
-            </a:r>
-          </a:p>
-          <a:p>
-            <a:pPr algn="ctr">
-              <a:spcAft>
-                <a:spcPts val="600"/>
-              </a:spcAft>
-            </a:pPr>
+              <a:t>Biomarker signals in MSS/pMMR metastatic colorectal cancer (mCRC) are predominantly </a:t>
+            </a:r>
+          </a:p>
+          <a:p>
+            <a:pPr algn="ctr"/>
             <a:r>
               <a:rPr lang="en-US" sz="6000" b="1" dirty="0">
                 <a:latin typeface="Arial" panose="020B0604020202020204" pitchFamily="34" charset="0"/>
                 <a:cs typeface="Arial" panose="020B0604020202020204" pitchFamily="34" charset="0"/>
               </a:rPr>
-              <a:t>– lessons from the randomized phase-2 METIMMOX trial</a:t>
+              <a:t>prognostic, not predictive – lessons from the randomized phase-2 METIMMOX trial</a:t>
             </a:r>
           </a:p>
           <a:p>
@@ -3525,14 +3521,7 @@
                 <a:latin typeface="Arial" panose="020B0604020202020204" pitchFamily="34" charset="0"/>
                 <a:cs typeface="Arial" panose="020B0604020202020204" pitchFamily="34" charset="0"/>
               </a:rPr>
-              <a:t xml:space="preserve">, </a:t>
-            </a:r>
-            <a:r>
-              <a:rPr lang="en-US" sz="4400" dirty="0">
-                <a:latin typeface="Arial" panose="020B0604020202020204" pitchFamily="34" charset="0"/>
-                <a:cs typeface="Arial" panose="020B0604020202020204" pitchFamily="34" charset="0"/>
-              </a:rPr>
-              <a:t>Megan Othus</a:t>
+              <a:t>, Megan Othus</a:t>
             </a:r>
             <a:r>
               <a:rPr lang="en-US" sz="4400" baseline="30000" dirty="0">
@@ -3546,14 +3535,7 @@
                 <a:latin typeface="Arial" panose="020B0604020202020204" pitchFamily="34" charset="0"/>
                 <a:cs typeface="Arial" panose="020B0604020202020204" pitchFamily="34" charset="0"/>
               </a:rPr>
-              <a:t xml:space="preserve">, </a:t>
-            </a:r>
-            <a:r>
-              <a:rPr lang="en-US" sz="4400" dirty="0">
-                <a:latin typeface="Arial" panose="020B0604020202020204" pitchFamily="34" charset="0"/>
-                <a:cs typeface="Arial" panose="020B0604020202020204" pitchFamily="34" charset="0"/>
-              </a:rPr>
-              <a:t>Sebastian Meltzer</a:t>
+              <a:t>, Sebastian Meltzer</a:t>
             </a:r>
             <a:r>
               <a:rPr lang="en-US" sz="4400" baseline="30000" dirty="0">
@@ -3567,14 +3549,7 @@
                 <a:latin typeface="Arial" panose="020B0604020202020204" pitchFamily="34" charset="0"/>
                 <a:cs typeface="Arial" panose="020B0604020202020204" pitchFamily="34" charset="0"/>
               </a:rPr>
-              <a:t xml:space="preserve">, </a:t>
-            </a:r>
-            <a:r>
-              <a:rPr lang="en-US" sz="4400" dirty="0">
-                <a:latin typeface="Arial" panose="020B0604020202020204" pitchFamily="34" charset="0"/>
-                <a:cs typeface="Arial" panose="020B0604020202020204" pitchFamily="34" charset="0"/>
-              </a:rPr>
-              <a:t>Paula A. Bousquet</a:t>
+              <a:t>, Paula A. Bousquet</a:t>
             </a:r>
             <a:r>
               <a:rPr lang="en-US" sz="4400" baseline="30000" dirty="0">
@@ -3588,14 +3563,7 @@
                 <a:latin typeface="Arial" panose="020B0604020202020204" pitchFamily="34" charset="0"/>
                 <a:cs typeface="Arial" panose="020B0604020202020204" pitchFamily="34" charset="0"/>
               </a:rPr>
-              <a:t xml:space="preserve">, </a:t>
-            </a:r>
-            <a:r>
-              <a:rPr lang="en-US" sz="4400" dirty="0">
-                <a:latin typeface="Arial" panose="020B0604020202020204" pitchFamily="34" charset="0"/>
-                <a:cs typeface="Arial" panose="020B0604020202020204" pitchFamily="34" charset="0"/>
-              </a:rPr>
-              <a:t>Emily A. Burger</a:t>
+              <a:t>, Emily A. Burger</a:t>
             </a:r>
             <a:r>
               <a:rPr lang="en-US" sz="4400" baseline="30000" dirty="0">
@@ -3609,14 +3577,7 @@
                 <a:latin typeface="Arial" panose="020B0604020202020204" pitchFamily="34" charset="0"/>
                 <a:cs typeface="Arial" panose="020B0604020202020204" pitchFamily="34" charset="0"/>
               </a:rPr>
-              <a:t xml:space="preserve">, </a:t>
-            </a:r>
-            <a:r>
-              <a:rPr lang="en-US" sz="4400" dirty="0">
-                <a:latin typeface="Arial" panose="020B0604020202020204" pitchFamily="34" charset="0"/>
-                <a:cs typeface="Arial" panose="020B0604020202020204" pitchFamily="34" charset="0"/>
-              </a:rPr>
-              <a:t>Eline Aas</a:t>
+              <a:t>, Eline Aas</a:t>
             </a:r>
             <a:r>
               <a:rPr lang="en-US" sz="4400" baseline="30000" dirty="0">
@@ -3630,14 +3591,7 @@
                 <a:latin typeface="Arial" panose="020B0604020202020204" pitchFamily="34" charset="0"/>
                 <a:cs typeface="Arial" panose="020B0604020202020204" pitchFamily="34" charset="0"/>
               </a:rPr>
-              <a:t xml:space="preserve">, </a:t>
-            </a:r>
-            <a:r>
-              <a:rPr lang="en-US" sz="4400" dirty="0">
-                <a:latin typeface="Arial" panose="020B0604020202020204" pitchFamily="34" charset="0"/>
-                <a:cs typeface="Arial" panose="020B0604020202020204" pitchFamily="34" charset="0"/>
-              </a:rPr>
-              <a:t>Anne H. Ree</a:t>
+              <a:t>, Anne H. Ree</a:t>
             </a:r>
             <a:r>
               <a:rPr lang="en-US" sz="4400" baseline="30000" dirty="0">
@@ -3661,7 +3615,7 @@
                 <a:latin typeface="Arial" panose="020B0604020202020204" pitchFamily="34" charset="0"/>
                 <a:cs typeface="Arial" panose="020B0604020202020204" pitchFamily="34" charset="0"/>
               </a:rPr>
-              <a:t xml:space="preserve">Department of Health Management and Health Economics, University of Oslo, Oslo, Norway; </a:t>
+              <a:t>Department of Health Management and Health Economics, University of Oslo, Oslo, Norway; </a:t>
             </a:r>
             <a:r>
               <a:rPr lang="en-US" sz="3200" baseline="30000" dirty="0">
@@ -3675,7 +3629,7 @@
                 <a:latin typeface="Arial" panose="020B0604020202020204" pitchFamily="34" charset="0"/>
                 <a:cs typeface="Arial" panose="020B0604020202020204" pitchFamily="34" charset="0"/>
               </a:rPr>
-              <a:t xml:space="preserve">Department of Oncology, Akershus University Hospital, Lørenskog, Norway; </a:t>
+              <a:t>Department of Oncology, Akershus University Hospital, Lørenskog, Norway; </a:t>
             </a:r>
             <a:r>
               <a:rPr lang="en-US" sz="3200" baseline="30000" dirty="0">
@@ -3689,7 +3643,7 @@
                 <a:latin typeface="Arial" panose="020B0604020202020204" pitchFamily="34" charset="0"/>
                 <a:cs typeface="Arial" panose="020B0604020202020204" pitchFamily="34" charset="0"/>
               </a:rPr>
-              <a:t xml:space="preserve">Fred Hutchinson Cancer Center, Seattle WA, United States; </a:t>
+              <a:t>Fred Hutchinson Cancer Center, Seattle WA, United States; </a:t>
             </a:r>
             <a:r>
               <a:rPr lang="en-US" sz="3200" baseline="30000" dirty="0">
@@ -3703,7 +3657,7 @@
                 <a:latin typeface="Arial" panose="020B0604020202020204" pitchFamily="34" charset="0"/>
                 <a:cs typeface="Arial" panose="020B0604020202020204" pitchFamily="34" charset="0"/>
               </a:rPr>
-              <a:t xml:space="preserve">Center for Health Decision Science, Harvard T. H. Chan School of Public Health, Boston MA, United States; </a:t>
+              <a:t>Center for Health Decision Science, Harvard T. H. Chan School of Public Health, Boston MA, United States; </a:t>
             </a:r>
             <a:r>
               <a:rPr lang="en-US" sz="3200" baseline="30000" dirty="0">
@@ -3717,7 +3671,7 @@
                 <a:latin typeface="Arial" panose="020B0604020202020204" pitchFamily="34" charset="0"/>
                 <a:cs typeface="Arial" panose="020B0604020202020204" pitchFamily="34" charset="0"/>
               </a:rPr>
-              <a:t xml:space="preserve">Division for Health Services, Norwegian Institute of Public Health, Oslo, Norway; </a:t>
+              <a:t>Division for Health Services, Norwegian Institute of Public Health, Oslo, Norway; </a:t>
             </a:r>
             <a:r>
               <a:rPr lang="en-US" sz="3200" baseline="30000" dirty="0">
@@ -3915,7 +3869,6 @@
               <a:rPr lang="en-US" sz="3200" dirty="0"/>
               <a:t>Immune checkpoint blockade is ineffective in unselected MSS/pMMR mCRC.</a:t>
             </a:r>
-            <a:endParaRPr lang="en-US" sz="3200" dirty="0"/>
           </a:p>
           <a:p>
             <a:pPr marL="571500" indent="-571500">
@@ -3927,9 +3880,8 @@
             </a:pPr>
             <a:r>
               <a:rPr lang="en-US" sz="3200" dirty="0"/>
-              <a:t>METIMMOX (randomized phase 2; NCT03388190, EudraCT 2017-001845-29): alternating FLOX + nivolumab vs FLOX alone; identical progression-free survival (PFS).</a:t>
-            </a:r>
-            <a:endParaRPr lang="en-US" sz="3200" dirty="0"/>
+              <a:t>METIMMOX (randomized phase 2; NCT03388190): alternating oxaliplatin-based chemotherapy (FLOX) + nivolumab vs FLOX alone; identical PFS.</a:t>
+            </a:r>
           </a:p>
           <a:p>
             <a:pPr marL="571500" indent="-571500">
@@ -3951,7 +3903,6 @@
               <a:rPr lang="en-US" sz="3200" dirty="0"/>
               <a:t>, CRP, TLR) conflated prognostic and predictive effects; we separated them in one pre-specified interaction model per endpoint.</a:t>
             </a:r>
-            <a:endParaRPr lang="en-US" sz="3200" dirty="0"/>
           </a:p>
         </p:txBody>
       </p:sp>
@@ -4053,10 +4004,9 @@
               <a:buChar char="o"/>
             </a:pPr>
             <a:r>
-              <a:rPr lang="en-US" sz="3200" dirty="0"/>
-              <a:t>68 complete cases (59 deaths; 50 progression-or-death events; deaths &gt;16 weeks after the last scan censored for PFS).</a:t>
-            </a:r>
-            <a:endParaRPr lang="en-US" sz="3200" dirty="0"/>
+              <a:rPr lang="en-US" sz="3600" dirty="0"/>
+              <a:t>68 complete cases (59 deaths; 63 PFS events).</a:t>
+            </a:r>
           </a:p>
           <a:p>
             <a:pPr marL="571500" indent="-571500">
@@ -4067,18 +4017,17 @@
               <a:buChar char="o"/>
             </a:pPr>
             <a:r>
-              <a:rPr lang="en-US" sz="3200" dirty="0"/>
-              <a:t xml:space="preserve">Biomarkers before nivolumab: TMB ≥9 mut/Mb or </a:t>
-            </a:r>
-            <a:r>
-              <a:rPr lang="en-US" sz="3200" i="1" dirty="0"/>
+              <a:rPr lang="en-US" sz="3600" dirty="0"/>
+              <a:t>Biomarkers before nivolumab: TMB ≥9 mut/Mb or </a:t>
+            </a:r>
+            <a:r>
+              <a:rPr lang="en-US" sz="3600" i="1" dirty="0"/>
               <a:t>BRAF</a:t>
             </a:r>
             <a:r>
-              <a:rPr lang="en-US" sz="3200" dirty="0"/>
-              <a:t xml:space="preserve"> V600E (baseline); CRP &lt;5 mg/L at week 4, after 2 FLOX cycles common to both arms (by chance 47% vs 19% positive).</a:t>
-            </a:r>
-            <a:endParaRPr lang="en-US" sz="3200" dirty="0"/>
+              <a:rPr lang="en-US" sz="3600" dirty="0"/>
+              <a:t> V600E; CRP &lt;5 mg/L after 2 FLOX cycles common to both arms (by chance 47% vs 19% positive).</a:t>
+            </a:r>
           </a:p>
           <a:p>
             <a:pPr marL="571500" indent="-571500">
@@ -4089,10 +4038,9 @@
               <a:buChar char="o"/>
             </a:pPr>
             <a:r>
-              <a:rPr lang="en-US" sz="3200" dirty="0"/>
-              <a:t>TLR ≥10% at the first on-treatment CT: intermediate endpoint (T → TLR → PFS), analyzed with a week-9 landmark.</a:t>
-            </a:r>
-            <a:endParaRPr lang="en-US" sz="3200" dirty="0"/>
+              <a:rPr lang="en-US" sz="3600" dirty="0"/>
+              <a:t>TLR ≥10% at the first on-treatment CT: analyzed as intermediate endpoint with a week-9 landmark.</a:t>
+            </a:r>
           </a:p>
           <a:p>
             <a:pPr marL="571500" indent="-571500">
@@ -4103,18 +4051,17 @@
               <a:buChar char="o"/>
             </a:pPr>
             <a:r>
-              <a:rPr lang="en-US" sz="3200" dirty="0"/>
-              <a:t>Per endpoint (PFS, overall survival [OS]): one Firth-corrected Cox model with age, sex, treatment, biomarker main effects and treatment × biomarker interactions (</a:t>
-            </a:r>
-            <a:r>
-              <a:rPr lang="en-US" sz="3200" b="1" dirty="0"/>
+              <a:rPr lang="en-US" sz="3600" dirty="0"/>
+              <a:t>Per endpoint (PFS, OS): one Firth-corrected Cox model with age, sex, treatment, biomarker main effects and treatment × biomarker interactions (</a:t>
+            </a:r>
+            <a:r>
+              <a:rPr lang="en-US" sz="3600" b="1" dirty="0"/>
               <a:t>Figure 1</a:t>
             </a:r>
             <a:r>
-              <a:rPr lang="en-US" sz="3200" dirty="0"/>
-              <a:t>); profile-likelihood 95% CIs, penalized likelihood-ratio tests (PLRT).</a:t>
-            </a:r>
-            <a:endParaRPr lang="en-US" sz="3200" dirty="0"/>
+              <a:rPr lang="en-US" sz="3600" dirty="0"/>
+              <a:t>); profile-likelihood 95% CIs, PLRT.</a:t>
+            </a:r>
           </a:p>
           <a:p>
             <a:pPr marL="571500" indent="-571500">
@@ -4125,75 +4072,8 @@
               <a:buChar char="o"/>
             </a:pPr>
             <a:r>
-              <a:rPr lang="en-US" sz="3200" dirty="0"/>
-              <a:t>Stability check: ridge-penalized Cox shrinking the biomarker terms (cross-validated penalty).</a:t>
-            </a:r>
-            <a:endParaRPr lang="en-US" sz="3200" dirty="0"/>
-          </a:p>
-        </p:txBody>
-      </p:sp>
-      <p:pic>
-        <p:nvPicPr>
-          <p:cNvPr id="108" name="Figure 1 DAG" descr="Directed acyclic graph of the assumed relationships between treatment, CRP, TMB/BRAF, age/sex and survival"/>
-          <p:cNvPicPr>
-            <a:picLocks noChangeAspect="1"/>
-          </p:cNvPicPr>
-          <p:nvPr/>
-        </p:nvPicPr>
-        <p:blipFill>
-          <a:blip r:embed="rId7"/>
-          <a:stretch>
-            <a:fillRect/>
-          </a:stretch>
-        </p:blipFill>
-        <p:spPr>
-          <a:xfrm>
-            <a:off x="2468880" y="20165133"/>
-            <a:ext cx="7863840" cy="5392347"/>
-          </a:xfrm>
-          <a:prstGeom prst="rect">
-            <a:avLst/>
-          </a:prstGeom>
-        </p:spPr>
-      </p:pic>
-      <p:sp>
-        <p:nvSpPr>
-          <p:cNvPr id="109" name="Figure 1 caption"/>
-          <p:cNvSpPr txBox="1"/>
-          <p:nvPr/>
-        </p:nvSpPr>
-        <p:spPr>
-          <a:xfrm>
-            <a:off x="822960" y="25557480"/>
-            <a:ext cx="11155680" cy="777240"/>
-          </a:xfrm>
-          <a:prstGeom prst="rect">
-            <a:avLst/>
-          </a:prstGeom>
-          <a:noFill/>
-        </p:spPr>
-        <p:txBody>
-          <a:bodyPr wrap="square" rtlCol="0" anchor="t">
-            <a:noAutofit/>
-          </a:bodyPr>
-          <a:lstStyle/>
-          <a:p>
-            <a:pPr algn="ctr"/>
-            <a:r>
-              <a:rPr lang="en-US" sz="2400" b="1" dirty="0"/>
-              <a:t xml:space="preserve">Figure 1. Assumed relationships (DAG) behind the model. </a:t>
-            </a:r>
-            <a:r>
-              <a:rPr lang="en-US" sz="2400" dirty="0"/>
-              <a:t>Dashed arrow: treatment effect possibly modified by CRP and TMB/</a:t>
-            </a:r>
-            <a:r>
-              <a:rPr lang="en-US" sz="2400" i="1" dirty="0"/>
-              <a:t>BRAF</a:t>
-            </a:r>
-            <a:r>
-              <a:rPr lang="en-US" sz="2400" dirty="0"/>
-              <a:t>.</a:t>
+              <a:rPr lang="en-US" sz="3600" dirty="0"/>
+              <a:t>Ridge-penalized Cox as co-primary stability estimator.</a:t>
             </a:r>
           </a:p>
         </p:txBody>
@@ -4207,7 +4087,7 @@
           <p:nvPr/>
         </p:nvPicPr>
         <p:blipFill>
-          <a:blip r:embed="rId5"/>
+          <a:blip r:embed="rId3"/>
           <a:stretch>
             <a:fillRect/>
           </a:stretch>
@@ -4276,13 +4156,12 @@
             </a:pPr>
             <a:r>
               <a:rPr lang="en-US" sz="4000" b="1" dirty="0"/>
-              <a:t xml:space="preserve">No marginal treatment effect: </a:t>
+              <a:t>No marginal treatment effect: </a:t>
             </a:r>
             <a:r>
               <a:rPr lang="en-US" sz="4000" dirty="0"/>
               <a:t>OS HR 0.96 (95% CI 0.58–1.61); PFS HR 0.77 (0.44–1.38).</a:t>
             </a:r>
-            <a:endParaRPr lang="en-US" sz="4000" dirty="0"/>
           </a:p>
           <a:p>
             <a:pPr marL="571500" indent="-571500">
@@ -4292,39 +4171,7 @@
               <a:buFont typeface="Courier New" panose="02070309020205020404" pitchFamily="49" charset="0"/>
               <a:buChar char="o"/>
             </a:pPr>
-            <a:r>
-              <a:rPr lang="en-US" sz="4000" b="1" dirty="0"/>
-              <a:t xml:space="preserve">Prognostic: </a:t>
-            </a:r>
-            <a:r>
-              <a:rPr lang="en-US" sz="4000" dirty="0"/>
-              <a:t>CRP &lt;5 mg/L and TMB/</a:t>
-            </a:r>
-            <a:r>
-              <a:rPr lang="en-US" sz="4000" i="1" dirty="0"/>
-              <a:t>BRAF</a:t>
-            </a:r>
-            <a:r>
-              <a:rPr lang="en-US" sz="4000" dirty="0"/>
-              <a:t xml:space="preserve"> positivity were associated with longer PFS (HR 0.39 each) and, for CRP, longer OS (HR 0.49), regardless of treatment (</a:t>
-            </a:r>
-            <a:r>
-              <a:rPr lang="en-US" sz="4000" b="1" dirty="0"/>
-              <a:t>Table 1</a:t>
-            </a:r>
-            <a:r>
-              <a:rPr lang="en-US" sz="4000" dirty="0"/>
-              <a:t xml:space="preserve">, </a:t>
-            </a:r>
-            <a:r>
-              <a:rPr lang="en-US" sz="4000" b="1" dirty="0"/>
-              <a:t>Figure 2</a:t>
-            </a:r>
-            <a:r>
-              <a:rPr lang="en-US" sz="4000" dirty="0"/>
-              <a:t>).</a:t>
-            </a:r>
-            <a:endParaRPr lang="en-US" sz="4000" dirty="0"/>
+            <a:endParaRPr lang="en-US" sz="2000" dirty="0"/>
           </a:p>
           <a:p>
             <a:pPr marL="571500" indent="-571500">
@@ -4336,7 +4183,58 @@
             </a:pPr>
             <a:r>
               <a:rPr lang="en-US" sz="4000" b="1" dirty="0"/>
-              <a:t xml:space="preserve">Not predictive: </a:t>
+              <a:t>Prognostic: </a:t>
+            </a:r>
+            <a:r>
+              <a:rPr lang="en-US" sz="4000" dirty="0"/>
+              <a:t>CRP &lt;5 mg/L and TMB/</a:t>
+            </a:r>
+            <a:r>
+              <a:rPr lang="en-US" sz="4000" i="1" dirty="0"/>
+              <a:t>BRAF</a:t>
+            </a:r>
+            <a:r>
+              <a:rPr lang="en-US" sz="4000" dirty="0"/>
+              <a:t> positivity were associated with longer PFS (HR 0.39 each) and, for CRP, longer OS (HR 0.49), regardless of treatment (</a:t>
+            </a:r>
+            <a:r>
+              <a:rPr lang="en-US" sz="4000" b="1" dirty="0"/>
+              <a:t>Table 1</a:t>
+            </a:r>
+            <a:r>
+              <a:rPr lang="en-US" sz="4000" dirty="0"/>
+              <a:t>, </a:t>
+            </a:r>
+            <a:r>
+              <a:rPr lang="en-US" sz="4000" b="1" dirty="0"/>
+              <a:t>Figure 2</a:t>
+            </a:r>
+            <a:r>
+              <a:rPr lang="en-US" sz="4000" dirty="0"/>
+              <a:t>).</a:t>
+            </a:r>
+          </a:p>
+          <a:p>
+            <a:pPr marL="571500" indent="-571500">
+              <a:spcAft>
+                <a:spcPts val="1600"/>
+              </a:spcAft>
+              <a:buFont typeface="Courier New" panose="02070309020205020404" pitchFamily="49" charset="0"/>
+              <a:buChar char="o"/>
+            </a:pPr>
+            <a:endParaRPr lang="en-US" sz="2000" dirty="0"/>
+          </a:p>
+          <a:p>
+            <a:pPr marL="571500" indent="-571500">
+              <a:spcAft>
+                <a:spcPts val="1600"/>
+              </a:spcAft>
+              <a:buFont typeface="Courier New" panose="02070309020205020404" pitchFamily="49" charset="0"/>
+              <a:buChar char="o"/>
+            </a:pPr>
+            <a:r>
+              <a:rPr lang="en-US" sz="4000" b="1" dirty="0"/>
+              <a:t>Not predictive: </a:t>
             </a:r>
             <a:r>
               <a:rPr lang="en-US" sz="4000" dirty="0"/>
@@ -4350,7 +4248,16 @@
               <a:rPr lang="en-US" sz="4000" dirty="0"/>
               <a:t>). Largest signal: CRP × treatment for PFS, HR 0.26 (0.06–1.34), p = 0.10, but it shrinks toward 1 under ridge (HR 0.66) and is weaker for OS (HR 0.65).</a:t>
             </a:r>
-            <a:endParaRPr lang="en-US" sz="4000" dirty="0"/>
+          </a:p>
+          <a:p>
+            <a:pPr marL="571500" indent="-571500">
+              <a:spcAft>
+                <a:spcPts val="1600"/>
+              </a:spcAft>
+              <a:buFont typeface="Courier New" panose="02070309020205020404" pitchFamily="49" charset="0"/>
+              <a:buChar char="o"/>
+            </a:pPr>
+            <a:endParaRPr lang="en-US" sz="2000" dirty="0"/>
           </a:p>
           <a:p>
             <a:pPr marL="571500" indent="-571500">
@@ -4362,13 +4269,12 @@
             </a:pPr>
             <a:r>
               <a:rPr lang="en-US" sz="4000" b="1" dirty="0"/>
-              <a:t xml:space="preserve">TLR: </a:t>
+              <a:t>TLR: </a:t>
             </a:r>
             <a:r>
               <a:rPr lang="en-US" sz="4000" dirty="0"/>
               <a:t>strongly prognostic (landmark HR 0.35 OS, 0.21 PFS), but more frequent with FLOX alone (76% vs 53%), with inconsistent interactions (HR 2.47 OS, 0.88 PFS): a marker of chemotherapy-responsive disease, not of nivolumab benefit.</a:t>
             </a:r>
-            <a:endParaRPr lang="en-US" sz="4000" dirty="0"/>
           </a:p>
         </p:txBody>
       </p:sp>
@@ -4396,7 +4302,7 @@
           <a:p>
             <a:r>
               <a:rPr lang="en-US" sz="2800" b="1" dirty="0"/>
-              <a:t xml:space="preserve">Table 1. </a:t>
+              <a:t>Table 1. </a:t>
             </a:r>
             <a:r>
               <a:rPr lang="en-US" sz="2800" dirty="0"/>
@@ -4422,14 +4328,62 @@
             <a:tbl>
               <a:tblPr firstRow="1" bandRow="1"/>
               <a:tblGrid>
-                <a:gridCol w="6400800"/>
-                <a:gridCol w="5029200"/>
-                <a:gridCol w="3474720"/>
-                <a:gridCol w="1554480"/>
-                <a:gridCol w="2011680"/>
-                <a:gridCol w="3474720"/>
-                <a:gridCol w="1554480"/>
-                <a:gridCol w="2093976"/>
+                <a:gridCol w="6400800">
+                  <a:extLst>
+                    <a:ext uri="{9D8B030D-6E8A-4147-A177-3AD203B41FA5}">
+                      <a16:colId xmlns:a16="http://schemas.microsoft.com/office/drawing/2014/main" val="20000"/>
+                    </a:ext>
+                  </a:extLst>
+                </a:gridCol>
+                <a:gridCol w="5029200">
+                  <a:extLst>
+                    <a:ext uri="{9D8B030D-6E8A-4147-A177-3AD203B41FA5}">
+                      <a16:colId xmlns:a16="http://schemas.microsoft.com/office/drawing/2014/main" val="20001"/>
+                    </a:ext>
+                  </a:extLst>
+                </a:gridCol>
+                <a:gridCol w="3474720">
+                  <a:extLst>
+                    <a:ext uri="{9D8B030D-6E8A-4147-A177-3AD203B41FA5}">
+                      <a16:colId xmlns:a16="http://schemas.microsoft.com/office/drawing/2014/main" val="20002"/>
+                    </a:ext>
+                  </a:extLst>
+                </a:gridCol>
+                <a:gridCol w="1554480">
+                  <a:extLst>
+                    <a:ext uri="{9D8B030D-6E8A-4147-A177-3AD203B41FA5}">
+                      <a16:colId xmlns:a16="http://schemas.microsoft.com/office/drawing/2014/main" val="20003"/>
+                    </a:ext>
+                  </a:extLst>
+                </a:gridCol>
+                <a:gridCol w="2011680">
+                  <a:extLst>
+                    <a:ext uri="{9D8B030D-6E8A-4147-A177-3AD203B41FA5}">
+                      <a16:colId xmlns:a16="http://schemas.microsoft.com/office/drawing/2014/main" val="20004"/>
+                    </a:ext>
+                  </a:extLst>
+                </a:gridCol>
+                <a:gridCol w="3474720">
+                  <a:extLst>
+                    <a:ext uri="{9D8B030D-6E8A-4147-A177-3AD203B41FA5}">
+                      <a16:colId xmlns:a16="http://schemas.microsoft.com/office/drawing/2014/main" val="20005"/>
+                    </a:ext>
+                  </a:extLst>
+                </a:gridCol>
+                <a:gridCol w="1554480">
+                  <a:extLst>
+                    <a:ext uri="{9D8B030D-6E8A-4147-A177-3AD203B41FA5}">
+                      <a16:colId xmlns:a16="http://schemas.microsoft.com/office/drawing/2014/main" val="20006"/>
+                    </a:ext>
+                  </a:extLst>
+                </a:gridCol>
+                <a:gridCol w="2093976">
+                  <a:extLst>
+                    <a:ext uri="{9D8B030D-6E8A-4147-A177-3AD203B41FA5}">
+                      <a16:colId xmlns:a16="http://schemas.microsoft.com/office/drawing/2014/main" val="20007"/>
+                    </a:ext>
+                  </a:extLst>
+                </a:gridCol>
               </a:tblGrid>
               <a:tr h="530352">
                 <a:tc rowSpan="2">
@@ -4696,6 +4650,11 @@
                     </a:solidFill>
                   </a:tcPr>
                 </a:tc>
+                <a:extLst>
+                  <a:ext uri="{0D108BD9-81ED-4DB2-BD59-A6C34878D82A}">
+                    <a16:rowId xmlns:a16="http://schemas.microsoft.com/office/drawing/2014/main" val="10000"/>
+                  </a:ext>
+                </a:extLst>
               </a:tr>
               <a:tr h="530352">
                 <a:tc vMerge="1">
@@ -4970,6 +4929,11 @@
                     </a:solidFill>
                   </a:tcPr>
                 </a:tc>
+                <a:extLst>
+                  <a:ext uri="{0D108BD9-81ED-4DB2-BD59-A6C34878D82A}">
+                    <a16:rowId xmlns:a16="http://schemas.microsoft.com/office/drawing/2014/main" val="10001"/>
+                  </a:ext>
+                </a:extLst>
               </a:tr>
               <a:tr h="530352">
                 <a:tc>
@@ -4982,7 +4946,6 @@
                         <a:rPr lang="en-US" sz="2800" dirty="0"/>
                         <a:t>Treatment (FLOX/nivolumab vs FLOX)</a:t>
                       </a:r>
-                      <a:endParaRPr lang="en-US" sz="2800" dirty="0"/>
                     </a:p>
                   </a:txBody>
                   <a:tcPr marL="60000" marR="60000" marT="18000" marB="18000" anchor="ctr">
@@ -5011,7 +4974,6 @@
                         <a:rPr lang="en-US" sz="2800" dirty="0"/>
                         <a:t>Univariable</a:t>
                       </a:r>
-                      <a:endParaRPr lang="en-US" sz="2800" dirty="0"/>
                     </a:p>
                   </a:txBody>
                   <a:tcPr marL="60000" marR="60000" marT="18000" marB="18000" anchor="ctr">
@@ -5040,7 +5002,6 @@
                         <a:rPr lang="en-US" sz="2800" dirty="0"/>
                         <a:t>0.96 (0.58–1.61)</a:t>
                       </a:r>
-                      <a:endParaRPr lang="en-US" sz="2800" dirty="0"/>
                     </a:p>
                   </a:txBody>
                   <a:tcPr marL="60000" marR="60000" marT="18000" marB="18000" anchor="ctr">
@@ -5050,8 +5011,14 @@
                     <a:lnR>
                       <a:noFill/>
                     </a:lnR>
-                    <a:lnT>
-                      <a:noFill/>
+                    <a:lnT w="12700" cap="flat" cmpd="sng" algn="ctr">
+                      <a:solidFill>
+                        <a:srgbClr val="000000"/>
+                      </a:solidFill>
+                      <a:prstDash val="solid"/>
+                      <a:round/>
+                      <a:headEnd type="none" w="med" len="med"/>
+                      <a:tailEnd type="none" w="med" len="med"/>
                     </a:lnT>
                     <a:lnB>
                       <a:noFill/>
@@ -5069,7 +5036,6 @@
                         <a:rPr lang="en-US" sz="2800" dirty="0"/>
                         <a:t>0.87</a:t>
                       </a:r>
-                      <a:endParaRPr lang="en-US" sz="2800" dirty="0"/>
                     </a:p>
                   </a:txBody>
                   <a:tcPr marL="60000" marR="60000" marT="18000" marB="18000" anchor="ctr">
@@ -5079,8 +5045,14 @@
                     <a:lnR>
                       <a:noFill/>
                     </a:lnR>
-                    <a:lnT>
-                      <a:noFill/>
+                    <a:lnT w="12700" cap="flat" cmpd="sng" algn="ctr">
+                      <a:solidFill>
+                        <a:srgbClr val="000000"/>
+                      </a:solidFill>
+                      <a:prstDash val="solid"/>
+                      <a:round/>
+                      <a:headEnd type="none" w="med" len="med"/>
+                      <a:tailEnd type="none" w="med" len="med"/>
                     </a:lnT>
                     <a:lnB>
                       <a:noFill/>
@@ -5098,7 +5070,6 @@
                         <a:rPr lang="en-US" sz="2800" dirty="0"/>
                         <a:t>–</a:t>
                       </a:r>
-                      <a:endParaRPr lang="en-US" sz="2800" dirty="0"/>
                     </a:p>
                   </a:txBody>
                   <a:tcPr marL="60000" marR="60000" marT="18000" marB="18000" anchor="ctr">
@@ -5108,8 +5079,14 @@
                     <a:lnR>
                       <a:noFill/>
                     </a:lnR>
-                    <a:lnT>
-                      <a:noFill/>
+                    <a:lnT w="12700" cap="flat" cmpd="sng" algn="ctr">
+                      <a:solidFill>
+                        <a:srgbClr val="000000"/>
+                      </a:solidFill>
+                      <a:prstDash val="solid"/>
+                      <a:round/>
+                      <a:headEnd type="none" w="med" len="med"/>
+                      <a:tailEnd type="none" w="med" len="med"/>
                     </a:lnT>
                     <a:lnB>
                       <a:noFill/>
@@ -5127,7 +5104,6 @@
                         <a:rPr lang="en-US" sz="2800" dirty="0"/>
                         <a:t>0.77 (0.44–1.38)</a:t>
                       </a:r>
-                      <a:endParaRPr lang="en-US" sz="2800" dirty="0"/>
                     </a:p>
                   </a:txBody>
                   <a:tcPr marL="60000" marR="60000" marT="18000" marB="18000" anchor="ctr">
@@ -5137,8 +5113,14 @@
                     <a:lnR>
                       <a:noFill/>
                     </a:lnR>
-                    <a:lnT>
-                      <a:noFill/>
+                    <a:lnT w="12700" cap="flat" cmpd="sng" algn="ctr">
+                      <a:solidFill>
+                        <a:srgbClr val="000000"/>
+                      </a:solidFill>
+                      <a:prstDash val="solid"/>
+                      <a:round/>
+                      <a:headEnd type="none" w="med" len="med"/>
+                      <a:tailEnd type="none" w="med" len="med"/>
                     </a:lnT>
                     <a:lnB>
                       <a:noFill/>
@@ -5156,7 +5138,6 @@
                         <a:rPr lang="en-US" sz="2800" dirty="0"/>
                         <a:t>0.38</a:t>
                       </a:r>
-                      <a:endParaRPr lang="en-US" sz="2800" dirty="0"/>
                     </a:p>
                   </a:txBody>
                   <a:tcPr marL="60000" marR="60000" marT="18000" marB="18000" anchor="ctr">
@@ -5166,8 +5147,14 @@
                     <a:lnR>
                       <a:noFill/>
                     </a:lnR>
-                    <a:lnT>
-                      <a:noFill/>
+                    <a:lnT w="12700" cap="flat" cmpd="sng" algn="ctr">
+                      <a:solidFill>
+                        <a:srgbClr val="000000"/>
+                      </a:solidFill>
+                      <a:prstDash val="solid"/>
+                      <a:round/>
+                      <a:headEnd type="none" w="med" len="med"/>
+                      <a:tailEnd type="none" w="med" len="med"/>
                     </a:lnT>
                     <a:lnB>
                       <a:noFill/>
@@ -5185,7 +5172,6 @@
                         <a:rPr lang="en-US" sz="2800" dirty="0"/>
                         <a:t>–</a:t>
                       </a:r>
-                      <a:endParaRPr lang="en-US" sz="2800" dirty="0"/>
                     </a:p>
                   </a:txBody>
                   <a:tcPr marL="60000" marR="60000" marT="18000" marB="18000" anchor="ctr">
@@ -5195,8 +5181,14 @@
                     <a:lnR>
                       <a:noFill/>
                     </a:lnR>
-                    <a:lnT>
-                      <a:noFill/>
+                    <a:lnT w="12700" cap="flat" cmpd="sng" algn="ctr">
+                      <a:solidFill>
+                        <a:srgbClr val="000000"/>
+                      </a:solidFill>
+                      <a:prstDash val="solid"/>
+                      <a:round/>
+                      <a:headEnd type="none" w="med" len="med"/>
+                      <a:tailEnd type="none" w="med" len="med"/>
                     </a:lnT>
                     <a:lnB>
                       <a:noFill/>
@@ -5204,6 +5196,11 @@
                     <a:noFill/>
                   </a:tcPr>
                 </a:tc>
+                <a:extLst>
+                  <a:ext uri="{0D108BD9-81ED-4DB2-BD59-A6C34878D82A}">
+                    <a16:rowId xmlns:a16="http://schemas.microsoft.com/office/drawing/2014/main" val="10002"/>
+                  </a:ext>
+                </a:extLst>
               </a:tr>
               <a:tr h="530352">
                 <a:tc>
@@ -5216,7 +5213,6 @@
                         <a:rPr lang="en-US" sz="2800" dirty="0"/>
                         <a:t>CRP &lt;5 mg/L at week 4</a:t>
                       </a:r>
-                      <a:endParaRPr lang="en-US" sz="2800" dirty="0"/>
                     </a:p>
                   </a:txBody>
                   <a:tcPr marL="60000" marR="60000" marT="18000" marB="18000" anchor="ctr">
@@ -5245,7 +5241,6 @@
                         <a:rPr lang="en-US" sz="2800" dirty="0"/>
                         <a:t>Univariable (prognostic)</a:t>
                       </a:r>
-                      <a:endParaRPr lang="en-US" sz="2800" dirty="0"/>
                     </a:p>
                   </a:txBody>
                   <a:tcPr marL="60000" marR="60000" marT="18000" marB="18000" anchor="ctr">
@@ -5274,7 +5269,6 @@
                         <a:rPr lang="en-US" sz="2800" dirty="0"/>
                         <a:t>0.49 (0.27–0.84)</a:t>
                       </a:r>
-                      <a:endParaRPr lang="en-US" sz="2800" dirty="0"/>
                     </a:p>
                   </a:txBody>
                   <a:tcPr marL="60000" marR="60000" marT="18000" marB="18000" anchor="ctr">
@@ -5303,7 +5297,6 @@
                         <a:rPr lang="en-US" sz="2800" dirty="0"/>
                         <a:t>0.009</a:t>
                       </a:r>
-                      <a:endParaRPr lang="en-US" sz="2800" dirty="0"/>
                     </a:p>
                   </a:txBody>
                   <a:tcPr marL="60000" marR="60000" marT="18000" marB="18000" anchor="ctr">
@@ -5332,7 +5325,6 @@
                         <a:rPr lang="en-US" sz="2800" dirty="0"/>
                         <a:t>–</a:t>
                       </a:r>
-                      <a:endParaRPr lang="en-US" sz="2800" dirty="0"/>
                     </a:p>
                   </a:txBody>
                   <a:tcPr marL="60000" marR="60000" marT="18000" marB="18000" anchor="ctr">
@@ -5361,7 +5353,6 @@
                         <a:rPr lang="en-US" sz="2800" dirty="0"/>
                         <a:t>0.39 (0.20–0.73)</a:t>
                       </a:r>
-                      <a:endParaRPr lang="en-US" sz="2800" dirty="0"/>
                     </a:p>
                   </a:txBody>
                   <a:tcPr marL="60000" marR="60000" marT="18000" marB="18000" anchor="ctr">
@@ -5390,7 +5381,6 @@
                         <a:rPr lang="en-US" sz="2800" dirty="0"/>
                         <a:t>0.003</a:t>
                       </a:r>
-                      <a:endParaRPr lang="en-US" sz="2800" dirty="0"/>
                     </a:p>
                   </a:txBody>
                   <a:tcPr marL="60000" marR="60000" marT="18000" marB="18000" anchor="ctr">
@@ -5419,7 +5409,6 @@
                         <a:rPr lang="en-US" sz="2800" dirty="0"/>
                         <a:t>–</a:t>
                       </a:r>
-                      <a:endParaRPr lang="en-US" sz="2800" dirty="0"/>
                     </a:p>
                   </a:txBody>
                   <a:tcPr marL="60000" marR="60000" marT="18000" marB="18000" anchor="ctr">
@@ -5438,6 +5427,11 @@
                     <a:noFill/>
                   </a:tcPr>
                 </a:tc>
+                <a:extLst>
+                  <a:ext uri="{0D108BD9-81ED-4DB2-BD59-A6C34878D82A}">
+                    <a16:rowId xmlns:a16="http://schemas.microsoft.com/office/drawing/2014/main" val="10003"/>
+                  </a:ext>
+                </a:extLst>
               </a:tr>
               <a:tr h="530352">
                 <a:tc>
@@ -5448,7 +5442,7 @@
                       <a:pPr algn="l"/>
                       <a:r>
                         <a:rPr lang="en-US" sz="2800" dirty="0"/>
-                        <a:t xml:space="preserve">TMB ≥9 mut/Mb or </a:t>
+                        <a:t>TMB ≥9 mut/Mb or </a:t>
                       </a:r>
                       <a:r>
                         <a:rPr lang="en-US" sz="2800" i="1" dirty="0"/>
@@ -5456,9 +5450,8 @@
                       </a:r>
                       <a:r>
                         <a:rPr lang="en-US" sz="2800" dirty="0"/>
-                        <a:t xml:space="preserve"> V600E</a:t>
+                        <a:t> V600E</a:t>
                       </a:r>
-                      <a:endParaRPr lang="en-US" sz="2800" dirty="0"/>
                     </a:p>
                   </a:txBody>
                   <a:tcPr marL="60000" marR="60000" marT="18000" marB="18000" anchor="ctr">
@@ -5487,7 +5480,6 @@
                         <a:rPr lang="en-US" sz="2800" dirty="0"/>
                         <a:t>Univariable (prognostic)</a:t>
                       </a:r>
-                      <a:endParaRPr lang="en-US" sz="2800" dirty="0"/>
                     </a:p>
                   </a:txBody>
                   <a:tcPr marL="60000" marR="60000" marT="18000" marB="18000" anchor="ctr">
@@ -5516,7 +5508,6 @@
                         <a:rPr lang="en-US" sz="2800" dirty="0"/>
                         <a:t>0.68 (0.40–1.13)</a:t>
                       </a:r>
-                      <a:endParaRPr lang="en-US" sz="2800" dirty="0"/>
                     </a:p>
                   </a:txBody>
                   <a:tcPr marL="60000" marR="60000" marT="18000" marB="18000" anchor="ctr">
@@ -5545,7 +5536,6 @@
                         <a:rPr lang="en-US" sz="2800" dirty="0"/>
                         <a:t>0.14</a:t>
                       </a:r>
-                      <a:endParaRPr lang="en-US" sz="2800" dirty="0"/>
                     </a:p>
                   </a:txBody>
                   <a:tcPr marL="60000" marR="60000" marT="18000" marB="18000" anchor="ctr">
@@ -5574,7 +5564,6 @@
                         <a:rPr lang="en-US" sz="2800" dirty="0"/>
                         <a:t>–</a:t>
                       </a:r>
-                      <a:endParaRPr lang="en-US" sz="2800" dirty="0"/>
                     </a:p>
                   </a:txBody>
                   <a:tcPr marL="60000" marR="60000" marT="18000" marB="18000" anchor="ctr">
@@ -5603,7 +5592,6 @@
                         <a:rPr lang="en-US" sz="2800" dirty="0"/>
                         <a:t>0.39 (0.21–0.73)</a:t>
                       </a:r>
-                      <a:endParaRPr lang="en-US" sz="2800" dirty="0"/>
                     </a:p>
                   </a:txBody>
                   <a:tcPr marL="60000" marR="60000" marT="18000" marB="18000" anchor="ctr">
@@ -5632,7 +5620,6 @@
                         <a:rPr lang="en-US" sz="2800" dirty="0"/>
                         <a:t>0.003</a:t>
                       </a:r>
-                      <a:endParaRPr lang="en-US" sz="2800" dirty="0"/>
                     </a:p>
                   </a:txBody>
                   <a:tcPr marL="60000" marR="60000" marT="18000" marB="18000" anchor="ctr">
@@ -5661,7 +5648,6 @@
                         <a:rPr lang="en-US" sz="2800" dirty="0"/>
                         <a:t>–</a:t>
                       </a:r>
-                      <a:endParaRPr lang="en-US" sz="2800" dirty="0"/>
                     </a:p>
                   </a:txBody>
                   <a:tcPr marL="60000" marR="60000" marT="18000" marB="18000" anchor="ctr">
@@ -5680,6 +5666,11 @@
                     <a:noFill/>
                   </a:tcPr>
                 </a:tc>
+                <a:extLst>
+                  <a:ext uri="{0D108BD9-81ED-4DB2-BD59-A6C34878D82A}">
+                    <a16:rowId xmlns:a16="http://schemas.microsoft.com/office/drawing/2014/main" val="10004"/>
+                  </a:ext>
+                </a:extLst>
               </a:tr>
               <a:tr h="530352">
                 <a:tc>
@@ -5692,7 +5683,6 @@
                         <a:rPr lang="en-US" sz="2800" dirty="0"/>
                         <a:t>TLR ≥10% (week-9 landmark)†</a:t>
                       </a:r>
-                      <a:endParaRPr lang="en-US" sz="2800" dirty="0"/>
                     </a:p>
                   </a:txBody>
                   <a:tcPr marL="60000" marR="60000" marT="18000" marB="18000" anchor="ctr">
@@ -5721,7 +5711,6 @@
                         <a:rPr lang="en-US" sz="2800" dirty="0"/>
                         <a:t>Univariable (prognostic)</a:t>
                       </a:r>
-                      <a:endParaRPr lang="en-US" sz="2800" dirty="0"/>
                     </a:p>
                   </a:txBody>
                   <a:tcPr marL="60000" marR="60000" marT="18000" marB="18000" anchor="ctr">
@@ -5750,7 +5739,6 @@
                         <a:rPr lang="en-US" sz="2800" dirty="0"/>
                         <a:t>0.35 (0.21–0.61)</a:t>
                       </a:r>
-                      <a:endParaRPr lang="en-US" sz="2800" dirty="0"/>
                     </a:p>
                   </a:txBody>
                   <a:tcPr marL="60000" marR="60000" marT="18000" marB="18000" anchor="ctr">
@@ -5779,7 +5767,6 @@
                         <a:rPr lang="en-US" sz="2800" dirty="0"/>
                         <a:t>&lt;0.001</a:t>
                       </a:r>
-                      <a:endParaRPr lang="en-US" sz="2800" dirty="0"/>
                     </a:p>
                   </a:txBody>
                   <a:tcPr marL="60000" marR="60000" marT="18000" marB="18000" anchor="ctr">
@@ -5808,7 +5795,6 @@
                         <a:rPr lang="en-US" sz="2800" dirty="0"/>
                         <a:t>–</a:t>
                       </a:r>
-                      <a:endParaRPr lang="en-US" sz="2800" dirty="0"/>
                     </a:p>
                   </a:txBody>
                   <a:tcPr marL="60000" marR="60000" marT="18000" marB="18000" anchor="ctr">
@@ -5837,7 +5823,6 @@
                         <a:rPr lang="en-US" sz="2800" dirty="0"/>
                         <a:t>0.21 (0.11–0.42)</a:t>
                       </a:r>
-                      <a:endParaRPr lang="en-US" sz="2800" dirty="0"/>
                     </a:p>
                   </a:txBody>
                   <a:tcPr marL="60000" marR="60000" marT="18000" marB="18000" anchor="ctr">
@@ -5866,7 +5851,6 @@
                         <a:rPr lang="en-US" sz="2800" dirty="0"/>
                         <a:t>&lt;0.001</a:t>
                       </a:r>
-                      <a:endParaRPr lang="en-US" sz="2800" dirty="0"/>
                     </a:p>
                   </a:txBody>
                   <a:tcPr marL="60000" marR="60000" marT="18000" marB="18000" anchor="ctr">
@@ -5895,7 +5879,6 @@
                         <a:rPr lang="en-US" sz="2800" dirty="0"/>
                         <a:t>–</a:t>
                       </a:r>
-                      <a:endParaRPr lang="en-US" sz="2800" dirty="0"/>
                     </a:p>
                   </a:txBody>
                   <a:tcPr marL="60000" marR="60000" marT="18000" marB="18000" anchor="ctr">
@@ -5914,6 +5897,11 @@
                     <a:noFill/>
                   </a:tcPr>
                 </a:tc>
+                <a:extLst>
+                  <a:ext uri="{0D108BD9-81ED-4DB2-BD59-A6C34878D82A}">
+                    <a16:rowId xmlns:a16="http://schemas.microsoft.com/office/drawing/2014/main" val="10005"/>
+                  </a:ext>
+                </a:extLst>
               </a:tr>
               <a:tr h="530352">
                 <a:tc>
@@ -5926,7 +5914,6 @@
                         <a:rPr lang="en-US" sz="2800" dirty="0"/>
                         <a:t>CRP × treatment</a:t>
                       </a:r>
-                      <a:endParaRPr lang="en-US" sz="2800" dirty="0"/>
                     </a:p>
                   </a:txBody>
                   <a:tcPr marL="60000" marR="60000" marT="18000" marB="18000" anchor="ctr">
@@ -5955,7 +5942,6 @@
                         <a:rPr lang="en-US" sz="2800" dirty="0"/>
                         <a:t>Unified interaction model</a:t>
                       </a:r>
-                      <a:endParaRPr lang="en-US" sz="2800" dirty="0"/>
                     </a:p>
                   </a:txBody>
                   <a:tcPr marL="60000" marR="60000" marT="18000" marB="18000" anchor="ctr">
@@ -5984,7 +5970,6 @@
                         <a:rPr lang="en-US" sz="2800" dirty="0"/>
                         <a:t>0.65 (0.19–2.60)</a:t>
                       </a:r>
-                      <a:endParaRPr lang="en-US" sz="2800" dirty="0"/>
                     </a:p>
                   </a:txBody>
                   <a:tcPr marL="60000" marR="60000" marT="18000" marB="18000" anchor="ctr">
@@ -6013,7 +5998,6 @@
                         <a:rPr lang="en-US" sz="2800" dirty="0"/>
                         <a:t>0.52</a:t>
                       </a:r>
-                      <a:endParaRPr lang="en-US" sz="2800" dirty="0"/>
                     </a:p>
                   </a:txBody>
                   <a:tcPr marL="60000" marR="60000" marT="18000" marB="18000" anchor="ctr">
@@ -6042,7 +6026,6 @@
                         <a:rPr lang="en-US" sz="2800" dirty="0"/>
                         <a:t>0.80</a:t>
                       </a:r>
-                      <a:endParaRPr lang="en-US" sz="2800" dirty="0"/>
                     </a:p>
                   </a:txBody>
                   <a:tcPr marL="60000" marR="60000" marT="18000" marB="18000" anchor="ctr">
@@ -6071,7 +6054,6 @@
                         <a:rPr lang="en-US" sz="2800" dirty="0"/>
                         <a:t>0.26 (0.06–1.34)</a:t>
                       </a:r>
-                      <a:endParaRPr lang="en-US" sz="2800" dirty="0"/>
                     </a:p>
                   </a:txBody>
                   <a:tcPr marL="60000" marR="60000" marT="18000" marB="18000" anchor="ctr">
@@ -6100,7 +6082,6 @@
                         <a:rPr lang="en-US" sz="2800" dirty="0"/>
                         <a:t>0.10</a:t>
                       </a:r>
-                      <a:endParaRPr lang="en-US" sz="2800" dirty="0"/>
                     </a:p>
                   </a:txBody>
                   <a:tcPr marL="60000" marR="60000" marT="18000" marB="18000" anchor="ctr">
@@ -6129,7 +6110,6 @@
                         <a:rPr lang="en-US" sz="2800" dirty="0"/>
                         <a:t>0.66</a:t>
                       </a:r>
-                      <a:endParaRPr lang="en-US" sz="2800" dirty="0"/>
                     </a:p>
                   </a:txBody>
                   <a:tcPr marL="60000" marR="60000" marT="18000" marB="18000" anchor="ctr">
@@ -6148,6 +6128,11 @@
                     <a:noFill/>
                   </a:tcPr>
                 </a:tc>
+                <a:extLst>
+                  <a:ext uri="{0D108BD9-81ED-4DB2-BD59-A6C34878D82A}">
+                    <a16:rowId xmlns:a16="http://schemas.microsoft.com/office/drawing/2014/main" val="10006"/>
+                  </a:ext>
+                </a:extLst>
               </a:tr>
               <a:tr h="530352">
                 <a:tc>
@@ -6166,9 +6151,8 @@
                       </a:r>
                       <a:r>
                         <a:rPr lang="en-US" sz="2800" dirty="0"/>
-                        <a:t xml:space="preserve"> × treatment</a:t>
+                        <a:t> × treatment</a:t>
                       </a:r>
-                      <a:endParaRPr lang="en-US" sz="2800" dirty="0"/>
                     </a:p>
                   </a:txBody>
                   <a:tcPr marL="60000" marR="60000" marT="18000" marB="18000" anchor="ctr">
@@ -6197,7 +6181,6 @@
                         <a:rPr lang="en-US" sz="2800" dirty="0"/>
                         <a:t>Unified interaction model</a:t>
                       </a:r>
-                      <a:endParaRPr lang="en-US" sz="2800" dirty="0"/>
                     </a:p>
                   </a:txBody>
                   <a:tcPr marL="60000" marR="60000" marT="18000" marB="18000" anchor="ctr">
@@ -6226,7 +6209,6 @@
                         <a:rPr lang="en-US" sz="2800" dirty="0"/>
                         <a:t>0.95 (0.32–2.82)</a:t>
                       </a:r>
-                      <a:endParaRPr lang="en-US" sz="2800" dirty="0"/>
                     </a:p>
                   </a:txBody>
                   <a:tcPr marL="60000" marR="60000" marT="18000" marB="18000" anchor="ctr">
@@ -6255,7 +6237,6 @@
                         <a:rPr lang="en-US" sz="2800" dirty="0"/>
                         <a:t>0.92</a:t>
                       </a:r>
-                      <a:endParaRPr lang="en-US" sz="2800" dirty="0"/>
                     </a:p>
                   </a:txBody>
                   <a:tcPr marL="60000" marR="60000" marT="18000" marB="18000" anchor="ctr">
@@ -6284,7 +6265,6 @@
                         <a:rPr lang="en-US" sz="2800" dirty="0"/>
                         <a:t>0.91</a:t>
                       </a:r>
-                      <a:endParaRPr lang="en-US" sz="2800" dirty="0"/>
                     </a:p>
                   </a:txBody>
                   <a:tcPr marL="60000" marR="60000" marT="18000" marB="18000" anchor="ctr">
@@ -6313,7 +6293,6 @@
                         <a:rPr lang="en-US" sz="2800" dirty="0"/>
                         <a:t>0.65 (0.18–2.41)</a:t>
                       </a:r>
-                      <a:endParaRPr lang="en-US" sz="2800" dirty="0"/>
                     </a:p>
                   </a:txBody>
                   <a:tcPr marL="60000" marR="60000" marT="18000" marB="18000" anchor="ctr">
@@ -6342,7 +6321,6 @@
                         <a:rPr lang="en-US" sz="2800" dirty="0"/>
                         <a:t>0.52</a:t>
                       </a:r>
-                      <a:endParaRPr lang="en-US" sz="2800" dirty="0"/>
                     </a:p>
                   </a:txBody>
                   <a:tcPr marL="60000" marR="60000" marT="18000" marB="18000" anchor="ctr">
@@ -6371,7 +6349,6 @@
                         <a:rPr lang="en-US" sz="2800" dirty="0"/>
                         <a:t>0.74</a:t>
                       </a:r>
-                      <a:endParaRPr lang="en-US" sz="2800" dirty="0"/>
                     </a:p>
                   </a:txBody>
                   <a:tcPr marL="60000" marR="60000" marT="18000" marB="18000" anchor="ctr">
@@ -6390,6 +6367,11 @@
                     <a:noFill/>
                   </a:tcPr>
                 </a:tc>
+                <a:extLst>
+                  <a:ext uri="{0D108BD9-81ED-4DB2-BD59-A6C34878D82A}">
+                    <a16:rowId xmlns:a16="http://schemas.microsoft.com/office/drawing/2014/main" val="10007"/>
+                  </a:ext>
+                </a:extLst>
               </a:tr>
               <a:tr h="530352">
                 <a:tc>
@@ -6402,7 +6384,6 @@
                         <a:rPr lang="en-US" sz="2800" dirty="0"/>
                         <a:t>TLR × treatment</a:t>
                       </a:r>
-                      <a:endParaRPr lang="en-US" sz="2800" dirty="0"/>
                     </a:p>
                   </a:txBody>
                   <a:tcPr marL="60000" marR="60000" marT="18000" marB="18000" anchor="ctr">
@@ -6435,7 +6416,6 @@
                         <a:rPr lang="en-US" sz="2800" dirty="0"/>
                         <a:t>Landmark responder model†</a:t>
                       </a:r>
-                      <a:endParaRPr lang="en-US" sz="2800" dirty="0"/>
                     </a:p>
                   </a:txBody>
                   <a:tcPr marL="60000" marR="60000" marT="18000" marB="18000" anchor="ctr">
@@ -6468,7 +6448,6 @@
                         <a:rPr lang="en-US" sz="2800" dirty="0"/>
                         <a:t>2.47 (0.75–7.75)</a:t>
                       </a:r>
-                      <a:endParaRPr lang="en-US" sz="2800" dirty="0"/>
                     </a:p>
                   </a:txBody>
                   <a:tcPr marL="60000" marR="60000" marT="18000" marB="18000" anchor="ctr">
@@ -6501,7 +6480,6 @@
                         <a:rPr lang="en-US" sz="2800" dirty="0"/>
                         <a:t>0.14</a:t>
                       </a:r>
-                      <a:endParaRPr lang="en-US" sz="2800" dirty="0"/>
                     </a:p>
                   </a:txBody>
                   <a:tcPr marL="60000" marR="60000" marT="18000" marB="18000" anchor="ctr">
@@ -6534,7 +6512,6 @@
                         <a:rPr lang="en-US" sz="2800" dirty="0"/>
                         <a:t>1.13‡</a:t>
                       </a:r>
-                      <a:endParaRPr lang="en-US" sz="2800" dirty="0"/>
                     </a:p>
                   </a:txBody>
                   <a:tcPr marL="60000" marR="60000" marT="18000" marB="18000" anchor="ctr">
@@ -6567,7 +6544,6 @@
                         <a:rPr lang="en-US" sz="2800" dirty="0"/>
                         <a:t>0.88 (0.21–3.38)</a:t>
                       </a:r>
-                      <a:endParaRPr lang="en-US" sz="2800" dirty="0"/>
                     </a:p>
                   </a:txBody>
                   <a:tcPr marL="60000" marR="60000" marT="18000" marB="18000" anchor="ctr">
@@ -6600,7 +6576,6 @@
                         <a:rPr lang="en-US" sz="2800" dirty="0"/>
                         <a:t>0.85</a:t>
                       </a:r>
-                      <a:endParaRPr lang="en-US" sz="2800" dirty="0"/>
                     </a:p>
                   </a:txBody>
                   <a:tcPr marL="60000" marR="60000" marT="18000" marB="18000" anchor="ctr">
@@ -6633,7 +6608,6 @@
                         <a:rPr lang="en-US" sz="2800" dirty="0"/>
                         <a:t>0.63</a:t>
                       </a:r>
-                      <a:endParaRPr lang="en-US" sz="2800" dirty="0"/>
                     </a:p>
                   </a:txBody>
                   <a:tcPr marL="60000" marR="60000" marT="18000" marB="18000" anchor="ctr">
@@ -6656,6 +6630,11 @@
                     <a:noFill/>
                   </a:tcPr>
                 </a:tc>
+                <a:extLst>
+                  <a:ext uri="{0D108BD9-81ED-4DB2-BD59-A6C34878D82A}">
+                    <a16:rowId xmlns:a16="http://schemas.microsoft.com/office/drawing/2014/main" val="10008"/>
+                  </a:ext>
+                </a:extLst>
               </a:tr>
             </a:tbl>
           </a:graphicData>
@@ -6701,18 +6680,18 @@
           </a:fontRef>
         </p:style>
         <p:txBody>
-          <a:bodyPr lIns="109728" rIns="109728" tIns="36576" bIns="36576" rtlCol="0" anchor="ctr">
+          <a:bodyPr lIns="109728" tIns="36576" rIns="109728" bIns="36576" rtlCol="0" anchor="ctr">
             <a:noAutofit/>
           </a:bodyPr>
           <a:lstStyle/>
           <a:p>
             <a:r>
               <a:rPr lang="en-US" sz="2200" dirty="0"/>
-              <a:t xml:space="preserve">n = 68; p = penalized likelihood-ratio test. </a:t>
+              <a:t>n = 68; p = penalized likelihood-ratio test. </a:t>
             </a:r>
             <a:r>
               <a:rPr lang="en-US" sz="2200" b="1" dirty="0"/>
-              <a:t xml:space="preserve">Unified model: </a:t>
+              <a:t>Unified model: </a:t>
             </a:r>
             <a:r>
               <a:rPr lang="en-US" sz="2200" dirty="0"/>
@@ -6724,15 +6703,15 @@
             </a:r>
             <a:r>
               <a:rPr lang="en-US" sz="2200" dirty="0"/>
-              <a:t xml:space="preserve"> + both treatment × biomarker interactions. </a:t>
+              <a:t> + both treatment × biomarker interactions. </a:t>
             </a:r>
             <a:r>
               <a:rPr lang="en-US" sz="2200" b="1" dirty="0"/>
-              <a:t xml:space="preserve">Ridge: </a:t>
+              <a:t>Ridge: </a:t>
             </a:r>
             <a:r>
               <a:rPr lang="en-US" sz="2200" dirty="0"/>
-              <a:t xml:space="preserve">L2-penalized Cox with cross-validated penalty on the biomarker (or TLR) main effects and interactions; point estimates. </a:t>
+              <a:t>L2-penalized Cox with cross-validated penalty on the biomarker (or TLR) main effects and interactions; point estimates. </a:t>
             </a:r>
             <a:r>
               <a:rPr lang="en-US" sz="2200" b="1" dirty="0"/>
@@ -6748,7 +6727,7 @@
             </a:r>
             <a:r>
               <a:rPr lang="en-US" sz="2200" dirty="0"/>
-              <a:t xml:space="preserve">; TLR is measured on treatment, so this is not a treatment-selection estimate. </a:t>
+              <a:t>; TLR is measured on treatment, so this is not a treatment-selection estimate. </a:t>
             </a:r>
             <a:r>
               <a:rPr lang="en-US" sz="2200" b="1" dirty="0"/>
@@ -6756,7 +6735,7 @@
             </a:r>
             <a:r>
               <a:rPr lang="en-US" sz="2200" dirty="0"/>
-              <a:t xml:space="preserve">0.92–1.80 across cross-validation splits. </a:t>
+              <a:t>0.92–1.80 across cross-validation splits. </a:t>
             </a:r>
             <a:r>
               <a:rPr lang="en-US" sz="2200" b="1" dirty="0"/>
@@ -6764,7 +6743,7 @@
             </a:r>
             <a:r>
               <a:rPr lang="en-US" sz="2200" dirty="0"/>
-              <a:t xml:space="preserve">, confidence interval; </a:t>
+              <a:t>, confidence interval; </a:t>
             </a:r>
             <a:r>
               <a:rPr lang="en-US" sz="2200" b="1" dirty="0"/>
@@ -6772,7 +6751,7 @@
             </a:r>
             <a:r>
               <a:rPr lang="en-US" sz="2200" dirty="0"/>
-              <a:t xml:space="preserve">, hazard ratio; </a:t>
+              <a:t>, hazard ratio; </a:t>
             </a:r>
             <a:r>
               <a:rPr lang="en-US" sz="2200" b="1" dirty="0"/>
@@ -6780,7 +6759,7 @@
             </a:r>
             <a:r>
               <a:rPr lang="en-US" sz="2200" dirty="0"/>
-              <a:t xml:space="preserve">, target lesion reduction; </a:t>
+              <a:t>, target lesion reduction; </a:t>
             </a:r>
             <a:r>
               <a:rPr lang="en-US" sz="2200" b="1" dirty="0"/>
@@ -6790,7 +6769,6 @@
               <a:rPr lang="en-US" sz="2200" dirty="0"/>
               <a:t>, tumor mutational burden.</a:t>
             </a:r>
-            <a:endParaRPr lang="en-US" sz="2200" dirty="0"/>
           </a:p>
         </p:txBody>
       </p:sp>
@@ -6803,7 +6781,7 @@
           <p:nvPr/>
         </p:nvPicPr>
         <p:blipFill>
-          <a:blip r:embed="rId6"/>
+          <a:blip r:embed="rId4"/>
           <a:stretch>
             <a:fillRect/>
           </a:stretch>
@@ -6818,16 +6796,223 @@
           </a:prstGeom>
         </p:spPr>
       </p:pic>
-      <p:sp>
-        <p:nvSpPr>
-          <p:cNvPr id="116" name="Conclusion header"/>
+      <p:pic>
+        <p:nvPicPr>
+          <p:cNvPr id="118" name="Ahus logo" descr="Akershus University Hospital Cancer Center logo"/>
+          <p:cNvPicPr>
+            <a:picLocks noChangeAspect="1"/>
+          </p:cNvPicPr>
+          <p:nvPr/>
+        </p:nvPicPr>
+        <p:blipFill>
+          <a:blip r:embed="rId5"/>
+          <a:srcRect b="50329"/>
+          <a:stretch>
+            <a:fillRect/>
+          </a:stretch>
+        </p:blipFill>
+        <p:spPr>
+          <a:xfrm>
+            <a:off x="338328" y="29983176"/>
+            <a:ext cx="9272016" cy="1197864"/>
+          </a:xfrm>
+          <a:prstGeom prst="rect">
+            <a:avLst/>
+          </a:prstGeom>
+        </p:spPr>
+      </p:pic>
+      <p:sp>
+        <p:nvSpPr>
+          <p:cNvPr id="119" name="Disclosure and funding"/>
+          <p:cNvSpPr txBox="1"/>
+          <p:nvPr/>
+        </p:nvSpPr>
+        <p:spPr>
+          <a:xfrm>
+            <a:off x="9966960" y="29809440"/>
+            <a:ext cx="24963120" cy="1463040"/>
+          </a:xfrm>
+          <a:prstGeom prst="rect">
+            <a:avLst/>
+          </a:prstGeom>
+          <a:noFill/>
+        </p:spPr>
+        <p:txBody>
+          <a:bodyPr wrap="square" rtlCol="0" anchor="ctr">
+            <a:noAutofit/>
+          </a:bodyPr>
+          <a:lstStyle/>
+          <a:p>
+            <a:r>
+              <a:rPr lang="en-US" sz="2400" b="1" dirty="0"/>
+              <a:t>Disclosure: </a:t>
+            </a:r>
+            <a:r>
+              <a:rPr lang="en-US" sz="2400" dirty="0"/>
+              <a:t>B.P. Geisler has no potential conflicts of interest to declare. </a:t>
+            </a:r>
+            <a:r>
+              <a:rPr lang="en-US" sz="2400" b="1" dirty="0"/>
+              <a:t>Funding: </a:t>
+            </a:r>
+            <a:r>
+              <a:rPr lang="en-US" sz="2400" dirty="0"/>
+              <a:t>Study sponsored by Horizon Europe (101094938; ASCERTAIN project, www.access2meds.eu), Research Council of Norway (296114), Norwegian Cancer Society (215613 and 245151), South-Eastern Regional Health Authority (2018054), and Bristol-Myers Squibb and Sigma2 AS (in-kind donations). Views and opinions expressed are, however, those of the authors only and do not necessarily reflect those of the European Union or the European Health and Digital Executive Agency (HaDEA).</a:t>
+            </a:r>
+          </a:p>
+        </p:txBody>
+      </p:sp>
+      <p:sp>
+        <p:nvSpPr>
+          <p:cNvPr id="120" name="Email"/>
+          <p:cNvSpPr txBox="1"/>
+          <p:nvPr/>
+        </p:nvSpPr>
+        <p:spPr>
+          <a:xfrm>
+            <a:off x="35021520" y="29919168"/>
+            <a:ext cx="9509760" cy="822960"/>
+          </a:xfrm>
+          <a:prstGeom prst="rect">
+            <a:avLst/>
+          </a:prstGeom>
+          <a:noFill/>
+        </p:spPr>
+        <p:txBody>
+          <a:bodyPr wrap="square" rtlCol="0" anchor="ctr">
+            <a:noAutofit/>
+          </a:bodyPr>
+          <a:lstStyle/>
+          <a:p>
+            <a:r>
+              <a:rPr lang="en-US" sz="4400" b="1" baseline="30000" dirty="0"/>
+              <a:t>@ </a:t>
+            </a:r>
+            <a:r>
+              <a:rPr lang="en-US" sz="4400" b="1" dirty="0"/>
+              <a:t>b.p.geisler@medisin.uio.no</a:t>
+            </a:r>
+          </a:p>
+        </p:txBody>
+      </p:sp>
+      <p:pic>
+        <p:nvPicPr>
+          <p:cNvPr id="121" name="UiO logo" descr="University of Oslo logo"/>
+          <p:cNvPicPr>
+            <a:picLocks noChangeAspect="1"/>
+          </p:cNvPicPr>
+          <p:nvPr/>
+        </p:nvPicPr>
+        <p:blipFill>
+          <a:blip r:embed="rId6"/>
+          <a:stretch>
+            <a:fillRect/>
+          </a:stretch>
+        </p:blipFill>
+        <p:spPr>
+          <a:xfrm>
+            <a:off x="44686728" y="29910024"/>
+            <a:ext cx="6163056" cy="1033272"/>
+          </a:xfrm>
+          <a:prstGeom prst="rect">
+            <a:avLst/>
+          </a:prstGeom>
+        </p:spPr>
+      </p:pic>
+      <p:pic>
+        <p:nvPicPr>
+          <p:cNvPr id="3" name="Figure 1 DAG" descr="Directed acyclic graph of the assumed relationships between treatment, CRP, TMB/BRAF, age/sex and survival">
+            <a:extLst>
+              <a:ext uri="{FF2B5EF4-FFF2-40B4-BE49-F238E27FC236}">
+                <a16:creationId xmlns:a16="http://schemas.microsoft.com/office/drawing/2014/main" id="{60861256-7611-FF2A-1DC3-5FC0DE781B7B}"/>
+              </a:ext>
+            </a:extLst>
+          </p:cNvPr>
+          <p:cNvPicPr>
+            <a:picLocks noChangeAspect="1"/>
+          </p:cNvPicPr>
+          <p:nvPr/>
+        </p:nvPicPr>
+        <p:blipFill>
+          <a:blip r:embed="rId7"/>
+          <a:stretch>
+            <a:fillRect/>
+          </a:stretch>
+        </p:blipFill>
+        <p:spPr>
+          <a:xfrm>
+            <a:off x="2468880" y="19740592"/>
+            <a:ext cx="7863840" cy="5392347"/>
+          </a:xfrm>
+          <a:prstGeom prst="rect">
+            <a:avLst/>
+          </a:prstGeom>
+        </p:spPr>
+      </p:pic>
+      <p:sp>
+        <p:nvSpPr>
+          <p:cNvPr id="5" name="Figure 1 caption">
+            <a:extLst>
+              <a:ext uri="{FF2B5EF4-FFF2-40B4-BE49-F238E27FC236}">
+                <a16:creationId xmlns:a16="http://schemas.microsoft.com/office/drawing/2014/main" id="{EA87DA3D-F4FB-37A0-6EEF-DC2A5230A3B7}"/>
+              </a:ext>
+            </a:extLst>
+          </p:cNvPr>
+          <p:cNvSpPr txBox="1"/>
+          <p:nvPr/>
+        </p:nvSpPr>
+        <p:spPr>
+          <a:xfrm>
+            <a:off x="822960" y="25132939"/>
+            <a:ext cx="11155680" cy="777240"/>
+          </a:xfrm>
+          <a:prstGeom prst="rect">
+            <a:avLst/>
+          </a:prstGeom>
+          <a:noFill/>
+        </p:spPr>
+        <p:txBody>
+          <a:bodyPr wrap="square" rtlCol="0" anchor="t">
+            <a:noAutofit/>
+          </a:bodyPr>
+          <a:lstStyle/>
+          <a:p>
+            <a:pPr algn="ctr"/>
+            <a:r>
+              <a:rPr lang="en-US" sz="2400" b="1" dirty="0"/>
+              <a:t>Figure 1. Assumed relationships (DAG) behind the model. </a:t>
+            </a:r>
+            <a:r>
+              <a:rPr lang="en-US" sz="2400" dirty="0"/>
+              <a:t>Dashed arrow: treatment effect possibly modified by CRP and TMB/</a:t>
+            </a:r>
+            <a:r>
+              <a:rPr lang="en-US" sz="2400" i="1" dirty="0"/>
+              <a:t>BRAF</a:t>
+            </a:r>
+            <a:r>
+              <a:rPr lang="en-US" sz="2400" dirty="0"/>
+              <a:t>.</a:t>
+            </a:r>
+          </a:p>
+        </p:txBody>
+      </p:sp>
+      <p:sp>
+        <p:nvSpPr>
+          <p:cNvPr id="7" name="Conclusion header">
+            <a:extLst>
+              <a:ext uri="{FF2B5EF4-FFF2-40B4-BE49-F238E27FC236}">
+                <a16:creationId xmlns:a16="http://schemas.microsoft.com/office/drawing/2014/main" id="{0A2889D5-9C4C-1E21-0D27-EDE86B49D915}"/>
+              </a:ext>
+            </a:extLst>
+          </p:cNvPr>
           <p:cNvSpPr/>
           <p:nvPr/>
         </p:nvSpPr>
         <p:spPr>
           <a:xfrm>
-            <a:off x="365760" y="26654760"/>
-            <a:ext cx="50502312" cy="868680"/>
+            <a:off x="12931775" y="26654760"/>
+            <a:ext cx="37936297" cy="1046989"/>
           </a:xfrm>
           <a:prstGeom prst="roundRect">
             <a:avLst/>
@@ -6850,7 +7035,7 @@
           <a:p>
             <a:pPr algn="ctr"/>
             <a:r>
-              <a:rPr lang="en-US" sz="5400" b="1" dirty="0">
+              <a:rPr lang="en-US" sz="6600" b="1" dirty="0">
                 <a:solidFill>
                   <a:prstClr val="white"/>
                 </a:solidFill>
@@ -6865,14 +7050,20 @@
       </p:sp>
       <p:sp>
         <p:nvSpPr>
-          <p:cNvPr id="117" name="Conclusion box"/>
+          <p:cNvPr id="9" name="Conclusion box">
+            <a:extLst>
+              <a:ext uri="{FF2B5EF4-FFF2-40B4-BE49-F238E27FC236}">
+                <a16:creationId xmlns:a16="http://schemas.microsoft.com/office/drawing/2014/main" id="{6F3ADBD5-6029-39CF-38B9-65023D4617D6}"/>
+              </a:ext>
+            </a:extLst>
+          </p:cNvPr>
           <p:cNvSpPr/>
           <p:nvPr/>
         </p:nvSpPr>
         <p:spPr>
           <a:xfrm>
-            <a:off x="365760" y="27706320"/>
-            <a:ext cx="50502312" cy="2011680"/>
+            <a:off x="12931776" y="27961047"/>
+            <a:ext cx="37936296" cy="1744676"/>
           </a:xfrm>
           <a:prstGeom prst="roundRect">
             <a:avLst/>
@@ -6911,134 +7102,182 @@
             <a:pPr algn="ctr"/>
             <a:r>
               <a:rPr lang="en-US" sz="4400" b="1" dirty="0"/>
-              <a:t>In this exploratory analysis, biomarker signals in MSS/pMMR mCRC were predominantly prognostic rather than predictive. The CRP × treatment interaction for PFS is hypothesis-generating and warrants evaluation in adequately powered prospective studies.</a:t>
-            </a:r>
-          </a:p>
-        </p:txBody>
-      </p:sp>
-      <p:pic>
-        <p:nvPicPr>
-          <p:cNvPr id="118" name="Ahus logo" descr="Akershus University Hospital Cancer Center logo"/>
-          <p:cNvPicPr>
-            <a:picLocks noChangeAspect="1"/>
-          </p:cNvPicPr>
+              <a:t>In this exploratory analysis, biomarker signals in MSS/pMMR mCRC were predominantly prognostic rather than predictive. </a:t>
+            </a:r>
+          </a:p>
+          <a:p>
+            <a:pPr algn="ctr"/>
+            <a:r>
+              <a:rPr lang="en-US" sz="4400" b="1" dirty="0"/>
+              <a:t>The CRP × treatment interaction for PFS is hypothesis-generating, and evaluation in adequately powered prospective studies could be considered.</a:t>
+            </a:r>
+          </a:p>
+        </p:txBody>
+      </p:sp>
+      <p:sp>
+        <p:nvSpPr>
+          <p:cNvPr id="11" name="Methods header">
+            <a:extLst>
+              <a:ext uri="{FF2B5EF4-FFF2-40B4-BE49-F238E27FC236}">
+                <a16:creationId xmlns:a16="http://schemas.microsoft.com/office/drawing/2014/main" id="{D007517E-3779-54D1-D478-BFD43C1BD915}"/>
+              </a:ext>
+            </a:extLst>
+          </p:cNvPr>
+          <p:cNvSpPr/>
           <p:nvPr/>
-        </p:nvPicPr>
-        <p:blipFill>
-          <a:blip r:embed="rId4"/>
-          <a:srcRect b="50329"/>
-          <a:stretch>
-            <a:fillRect/>
-          </a:stretch>
-        </p:blipFill>
+        </p:nvSpPr>
         <p:spPr>
           <a:xfrm>
-            <a:off x="338328" y="29983176"/>
-            <a:ext cx="9272016" cy="1197864"/>
+            <a:off x="365760" y="26692641"/>
+            <a:ext cx="12139313" cy="1047516"/>
           </a:xfrm>
-          <a:prstGeom prst="rect">
+          <a:prstGeom prst="roundRect">
             <a:avLst/>
           </a:prstGeom>
+          <a:solidFill>
+            <a:srgbClr val="0093C8"/>
+          </a:solidFill>
+          <a:ln w="12700" cap="flat" cmpd="sng" algn="ctr">
+            <a:solidFill>
+              <a:srgbClr val="0093C8"/>
+            </a:solidFill>
+            <a:prstDash val="solid"/>
+            <a:miter lim="800000"/>
+          </a:ln>
+          <a:effectLst/>
         </p:spPr>
-      </p:pic>
-      <p:sp>
-        <p:nvSpPr>
-          <p:cNvPr id="119" name="Disclosure and funding"/>
-          <p:cNvSpPr txBox="1"/>
+        <p:txBody>
+          <a:bodyPr rtlCol="0" anchor="ctr"/>
+          <a:lstStyle/>
+          <a:p>
+            <a:pPr algn="ctr"/>
+            <a:r>
+              <a:rPr lang="en-US" sz="5400" b="1" dirty="0">
+                <a:solidFill>
+                  <a:prstClr val="white"/>
+                </a:solidFill>
+                <a:latin typeface="Calibri" panose="020F0502020204030204"/>
+              </a:rPr>
+              <a:t>Abbreviations</a:t>
+            </a:r>
+            <a:endParaRPr lang="en-US" sz="5400" b="1" dirty="0">
+              <a:solidFill>
+                <a:prstClr val="white"/>
+              </a:solidFill>
+              <a:latin typeface="Calibri" panose="020F0502020204030204"/>
+              <a:ea typeface="+mn-ea"/>
+              <a:cs typeface="+mn-cs"/>
+            </a:endParaRPr>
+          </a:p>
+        </p:txBody>
+      </p:sp>
+      <p:sp>
+        <p:nvSpPr>
+          <p:cNvPr id="13" name="Background box">
+            <a:extLst>
+              <a:ext uri="{FF2B5EF4-FFF2-40B4-BE49-F238E27FC236}">
+                <a16:creationId xmlns:a16="http://schemas.microsoft.com/office/drawing/2014/main" id="{17D4A325-E169-3D44-C321-43A94A73EA61}"/>
+              </a:ext>
+            </a:extLst>
+          </p:cNvPr>
+          <p:cNvSpPr/>
           <p:nvPr/>
         </p:nvSpPr>
         <p:spPr>
           <a:xfrm>
-            <a:off x="9966960" y="29809440"/>
-            <a:ext cx="24963120" cy="1463040"/>
+            <a:off x="329183" y="27949161"/>
+            <a:ext cx="12178729" cy="1756562"/>
           </a:xfrm>
-          <a:prstGeom prst="rect">
+          <a:prstGeom prst="roundRect">
             <a:avLst/>
           </a:prstGeom>
-          <a:noFill/>
+          <a:solidFill>
+            <a:schemeClr val="lt1">
+              <a:alpha val="0"/>
+            </a:schemeClr>
+          </a:solidFill>
+          <a:ln w="28575">
+            <a:solidFill>
+              <a:srgbClr val="0093C8"/>
+            </a:solidFill>
+          </a:ln>
         </p:spPr>
-        <p:txBody>
-          <a:bodyPr wrap="square" rtlCol="0" anchor="ctr">
+        <p:style>
+          <a:lnRef idx="2">
+            <a:schemeClr val="accent1"/>
+          </a:lnRef>
+          <a:fillRef idx="1">
+            <a:schemeClr val="lt1"/>
+          </a:fillRef>
+          <a:effectRef idx="0">
+            <a:schemeClr val="accent1"/>
+          </a:effectRef>
+          <a:fontRef idx="minor">
+            <a:schemeClr val="dk1"/>
+          </a:fontRef>
+        </p:style>
+        <p:txBody>
+          <a:bodyPr rtlCol="0" anchor="ctr">
             <a:noAutofit/>
           </a:bodyPr>
           <a:lstStyle/>
           <a:p>
-            <a:r>
-              <a:rPr lang="en-US" sz="2400" b="1" dirty="0"/>
-              <a:t xml:space="preserve">Disclosure: </a:t>
-            </a:r>
-            <a:r>
-              <a:rPr lang="en-US" sz="2400" dirty="0"/>
-              <a:t xml:space="preserve">B.P. Geisler has no potential conflicts of interest to declare. </a:t>
-            </a:r>
-            <a:r>
-              <a:rPr lang="en-US" sz="2400" b="1" dirty="0"/>
-              <a:t xml:space="preserve">Funding: </a:t>
-            </a:r>
-            <a:r>
-              <a:rPr lang="en-US" sz="2400" dirty="0"/>
-              <a:t>Study sponsored by European Union, Research Council of Norway, Norwegian Cancer Society, South-Eastern Regional Health Authority, and Bristol-Myers Squibb and Sigma2 AS (in-kind donations). Views and opinions expressed are, however, those of the authors only and do not necessarily reflect those of the European Union or the European Health and Digital Executive Agency (HaDEA).</a:t>
-            </a:r>
-          </a:p>
-        </p:txBody>
-      </p:sp>
-      <p:sp>
-        <p:nvSpPr>
-          <p:cNvPr id="120" name="Email"/>
-          <p:cNvSpPr txBox="1"/>
-          <p:nvPr/>
-        </p:nvSpPr>
-        <p:spPr>
-          <a:xfrm>
-            <a:off x="35021520" y="29919168"/>
-            <a:ext cx="9509760" cy="822960"/>
-          </a:xfrm>
-          <a:prstGeom prst="rect">
-            <a:avLst/>
-          </a:prstGeom>
-          <a:noFill/>
-        </p:spPr>
-        <p:txBody>
-          <a:bodyPr wrap="square" rtlCol="0" anchor="ctr">
-            <a:noAutofit/>
-          </a:bodyPr>
-          <a:lstStyle/>
-          <a:p>
-            <a:r>
-              <a:rPr lang="en-US" sz="4400" b="1" baseline="30000" dirty="0"/>
-              <a:t xml:space="preserve">@ </a:t>
-            </a:r>
-            <a:r>
-              <a:rPr lang="en-US" sz="4400" b="1" dirty="0"/>
-              <a:t>b.p.geisler@medisin.uio.no</a:t>
-            </a:r>
-          </a:p>
-        </p:txBody>
-      </p:sp>
-      <p:pic>
-        <p:nvPicPr>
-          <p:cNvPr id="121" name="UiO logo" descr="University of Oslo logo"/>
-          <p:cNvPicPr>
-            <a:picLocks noChangeAspect="1"/>
-          </p:cNvPicPr>
-          <p:nvPr/>
-        </p:nvPicPr>
-        <p:blipFill>
-          <a:blip r:embed="rId3"/>
-          <a:stretch>
-            <a:fillRect/>
-          </a:stretch>
-        </p:blipFill>
-        <p:spPr>
-          <a:xfrm>
-            <a:off x="44686728" y="29910024"/>
-            <a:ext cx="6163056" cy="1033272"/>
-          </a:xfrm>
-          <a:prstGeom prst="rect">
-            <a:avLst/>
-          </a:prstGeom>
-        </p:spPr>
-      </p:pic>
+            <a:pPr>
+              <a:spcAft>
+                <a:spcPts val="1200"/>
+              </a:spcAft>
+            </a:pPr>
+            <a:r>
+              <a:rPr lang="en-US" sz="3200" b="1" dirty="0"/>
+              <a:t>CRP</a:t>
+            </a:r>
+            <a:r>
+              <a:rPr lang="en-US" sz="3200" dirty="0"/>
+              <a:t>: C-reactive protein – </a:t>
+            </a:r>
+            <a:r>
+              <a:rPr lang="en-US" sz="3200" b="1" dirty="0"/>
+              <a:t>OS</a:t>
+            </a:r>
+            <a:r>
+              <a:rPr lang="en-US" sz="3200" dirty="0"/>
+              <a:t>: overall survival – </a:t>
+            </a:r>
+            <a:r>
+              <a:rPr lang="en-US" sz="3200" b="1" dirty="0"/>
+              <a:t>PFS</a:t>
+            </a:r>
+            <a:r>
+              <a:rPr lang="en-US" sz="3200" dirty="0"/>
+              <a:t>: progression-free survival – </a:t>
+            </a:r>
+            <a:r>
+              <a:rPr lang="en-US" sz="3200" b="1" dirty="0"/>
+              <a:t>PLRT</a:t>
+            </a:r>
+            <a:r>
+              <a:rPr lang="en-US" sz="3200" dirty="0"/>
+              <a:t>: penalized likelihood-ratio tests – </a:t>
+            </a:r>
+            <a:r>
+              <a:rPr lang="en-US" sz="3200" b="1" dirty="0"/>
+              <a:t>TLR</a:t>
+            </a:r>
+            <a:r>
+              <a:rPr lang="en-US" sz="3200" dirty="0"/>
+              <a:t>: target lesion reduction – </a:t>
+            </a:r>
+            <a:r>
+              <a:rPr lang="en-US" sz="3200" b="1" dirty="0"/>
+              <a:t>TMB</a:t>
+            </a:r>
+            <a:r>
+              <a:rPr lang="en-US" sz="3200" dirty="0"/>
+              <a:t>: tumor mutational burden</a:t>
+            </a:r>
+          </a:p>
+        </p:txBody>
+      </p:sp>
     </p:spTree>
   </p:cSld>
   <p:clrMapOvr>
